--- a/AI_Export_Manager_Hackathon_Presentation.pptx
+++ b/AI_Export_Manager_Hackathon_Presentation.pptx
@@ -3155,8 +3155,8 @@
         </p:nvSpPr>
         <p:spPr>
           <a:xfrm>
-            <a:off x="1097280" y="1371600"/>
-            <a:ext cx="10058400" cy="4114800"/>
+            <a:off x="1097280" y="1188720"/>
+            <a:ext cx="10058400" cy="4389120"/>
           </a:xfrm>
           <a:prstGeom prst="rect">
             <a:avLst/>
@@ -3171,7 +3171,7 @@
           <a:p>
             <a:pPr>
               <a:spcAft>
-                <a:spcPts val="1000"/>
+                <a:spcPts val="1200"/>
               </a:spcAft>
               <a:defRPr sz="1300" b="1">
                 <a:solidFill>
@@ -3180,12 +3180,12 @@
               </a:defRPr>
             </a:pPr>
             <a:r>
-              <a:t>CORETECH INNOVATION | OFFICIAL HACKATHON SUBMISSION</a:t>
-            </a:r>
-          </a:p>
-          <a:p>
-            <a:pPr>
-              <a:defRPr sz="4400" b="1">
+              <a:t>CORETECH INNOVATION | OFFICIAL NLP HACKATHON 2026 SUBMISSION</a:t>
+            </a:r>
+          </a:p>
+          <a:p>
+            <a:pPr>
+              <a:defRPr sz="4600" b="1">
                 <a:solidFill>
                   <a:srgbClr val="FFFFFF"/>
                 </a:solidFill>
@@ -3200,19 +3200,19 @@
               <a:spcAft>
                 <a:spcPts val="2400"/>
               </a:spcAft>
-              <a:defRPr sz="2000">
+              <a:defRPr sz="2100">
                 <a:solidFill>
                   <a:srgbClr val="F59E0B"/>
                 </a:solidFill>
               </a:defRPr>
             </a:pPr>
             <a:r>
-              <a:t>From Urdu description to a live global listing on Alibaba &amp; Amazon</a:t>
-            </a:r>
-          </a:p>
-          <a:p>
-            <a:pPr>
-              <a:defRPr sz="1300" b="1">
+              <a:t>From Urdu description to a live global listing on Alibaba and Amazon</a:t>
+            </a:r>
+          </a:p>
+          <a:p>
+            <a:pPr>
+              <a:defRPr sz="1400" b="1">
                 <a:solidFill>
                   <a:srgbClr val="FFFFFF"/>
                 </a:solidFill>
@@ -3231,7 +3231,7 @@
               </a:defRPr>
             </a:pPr>
             <a:r>
-              <a:t>Live Working Product: http://127.0.0.1:8000 • Sialkot &amp; Faisalabad Export Clusters</a:t>
+              <a:t>Working Product URL: http://127.0.0.1:8000 • Sialkot &amp; Faisalabad Export Clusters</a:t>
             </a:r>
           </a:p>
         </p:txBody>
@@ -3307,43 +3307,8 @@
         </p:nvSpPr>
         <p:spPr>
           <a:xfrm>
-            <a:off x="731520" y="137160"/>
+            <a:off x="731520" y="109728"/>
             <a:ext cx="7315200" cy="274320"/>
-          </a:xfrm>
-          <a:prstGeom prst="rect">
-            <a:avLst/>
-          </a:prstGeom>
-          <a:noFill/>
-        </p:spPr>
-        <p:txBody>
-          <a:bodyPr wrap="square">
-            <a:spAutoFit/>
-          </a:bodyPr>
-          <a:lstStyle/>
-          <a:p>
-            <a:pPr>
-              <a:defRPr sz="1000" b="1">
-                <a:solidFill>
-                  <a:srgbClr val="0284C7"/>
-                </a:solidFill>
-              </a:defRPr>
-            </a:pPr>
-            <a:r>
-              <a:t>CORETECH INNOVATION | NLP HACKATHON 2026</a:t>
-            </a:r>
-          </a:p>
-        </p:txBody>
-      </p:sp>
-      <p:sp>
-        <p:nvSpPr>
-          <p:cNvPr id="4" name="TextBox 3"/>
-          <p:cNvSpPr txBox="1"/>
-          <p:nvPr/>
-        </p:nvSpPr>
-        <p:spPr>
-          <a:xfrm>
-            <a:off x="731520" y="365760"/>
-            <a:ext cx="9144000" cy="502920"/>
           </a:xfrm>
           <a:prstGeom prst="rect">
             <a:avLst/>
@@ -3357,28 +3322,28 @@
           <a:lstStyle/>
           <a:p>
             <a:pPr>
-              <a:defRPr sz="2000" b="1">
-                <a:solidFill>
-                  <a:srgbClr val="FFFFFF"/>
-                </a:solidFill>
-              </a:defRPr>
-            </a:pPr>
-            <a:r>
-              <a:t>Hackathon Demo Pitch Video Script (Exact 3-Minute Timing)</a:t>
-            </a:r>
-          </a:p>
-        </p:txBody>
-      </p:sp>
-      <p:sp>
-        <p:nvSpPr>
-          <p:cNvPr id="5" name="TextBox 4"/>
+              <a:defRPr sz="1000" b="1">
+                <a:solidFill>
+                  <a:srgbClr val="0284C7"/>
+                </a:solidFill>
+              </a:defRPr>
+            </a:pPr>
+            <a:r>
+              <a:t>CORETECH INNOVATION | NLP HACKATHON 2026</a:t>
+            </a:r>
+          </a:p>
+        </p:txBody>
+      </p:sp>
+      <p:sp>
+        <p:nvSpPr>
+          <p:cNvPr id="4" name="TextBox 3"/>
           <p:cNvSpPr txBox="1"/>
           <p:nvPr/>
         </p:nvSpPr>
         <p:spPr>
           <a:xfrm>
-            <a:off x="9601200" y="320040"/>
-            <a:ext cx="2011680" cy="365760"/>
+            <a:off x="731520" y="347472"/>
+            <a:ext cx="9144000" cy="502920"/>
           </a:xfrm>
           <a:prstGeom prst="rect">
             <a:avLst/>
@@ -3392,6 +3357,41 @@
           <a:lstStyle/>
           <a:p>
             <a:pPr>
+              <a:defRPr sz="2000" b="1">
+                <a:solidFill>
+                  <a:srgbClr val="FFFFFF"/>
+                </a:solidFill>
+              </a:defRPr>
+            </a:pPr>
+            <a:r>
+              <a:t>Live Marketplace Previews: Alibaba Trade &amp; Amazon SP-API</a:t>
+            </a:r>
+          </a:p>
+        </p:txBody>
+      </p:sp>
+      <p:sp>
+        <p:nvSpPr>
+          <p:cNvPr id="5" name="TextBox 4"/>
+          <p:cNvSpPr txBox="1"/>
+          <p:nvPr/>
+        </p:nvSpPr>
+        <p:spPr>
+          <a:xfrm>
+            <a:off x="9326880" y="320040"/>
+            <a:ext cx="2377440" cy="365760"/>
+          </a:xfrm>
+          <a:prstGeom prst="rect">
+            <a:avLst/>
+          </a:prstGeom>
+          <a:noFill/>
+        </p:spPr>
+        <p:txBody>
+          <a:bodyPr wrap="none">
+            <a:spAutoFit/>
+          </a:bodyPr>
+          <a:lstStyle/>
+          <a:p>
+            <a:pPr>
               <a:defRPr sz="900" b="1">
                 <a:solidFill>
                   <a:srgbClr val="10B981"/>
@@ -3404,436 +3404,120 @@
           </a:p>
         </p:txBody>
       </p:sp>
-      <p:sp>
-        <p:nvSpPr>
-          <p:cNvPr id="6" name="Rounded Rectangle 5"/>
-          <p:cNvSpPr/>
-          <p:nvPr/>
-        </p:nvSpPr>
+      <p:pic>
+        <p:nvPicPr>
+          <p:cNvPr id="6" name="Picture 5" descr="ss_alibaba.png"/>
+          <p:cNvPicPr>
+            <a:picLocks noChangeAspect="1"/>
+          </p:cNvPicPr>
+          <p:nvPr/>
+        </p:nvPicPr>
+        <p:blipFill>
+          <a:blip r:embed="rId2"/>
+          <a:stretch>
+            <a:fillRect/>
+          </a:stretch>
+        </p:blipFill>
         <p:spPr>
           <a:xfrm>
             <a:off x="731520" y="1280160"/>
-            <a:ext cx="10698480" cy="621792"/>
-          </a:xfrm>
-          <a:prstGeom prst="roundRect">
-            <a:avLst/>
-          </a:prstGeom>
-          <a:solidFill>
-            <a:srgbClr val="FFFFFF"/>
-          </a:solidFill>
-          <a:ln>
-            <a:solidFill>
-              <a:srgbClr val="0284C7"/>
-            </a:solidFill>
-          </a:ln>
-        </p:spPr>
-        <p:style>
-          <a:lnRef idx="1">
-            <a:schemeClr val="accent1"/>
-          </a:lnRef>
-          <a:fillRef idx="3">
-            <a:schemeClr val="accent1"/>
-          </a:fillRef>
-          <a:effectRef idx="2">
-            <a:schemeClr val="accent1"/>
-          </a:effectRef>
-          <a:fontRef idx="minor">
-            <a:schemeClr val="lt1"/>
-          </a:fontRef>
-        </p:style>
-        <p:txBody>
-          <a:bodyPr rtlCol="0" anchor="ctr"/>
-          <a:lstStyle/>
-          <a:p>
-            <a:pPr algn="ctr">
-              <a:defRPr b="1" sz="1100">
-                <a:solidFill>
-                  <a:srgbClr val="0F172A"/>
-                </a:solidFill>
-              </a:defRPr>
-            </a:pPr>
-            <a:r>
-              <a:t>[0:00 - 0:30] The Hook &amp; Problem: </a:t>
-            </a:r>
-            <a:r>
-              <a:rPr b="0" sz="1000">
+            <a:ext cx="5212080" cy="4937760"/>
+          </a:xfrm>
+          <a:prstGeom prst="rect">
+            <a:avLst/>
+          </a:prstGeom>
+        </p:spPr>
+      </p:pic>
+      <p:sp>
+        <p:nvSpPr>
+          <p:cNvPr id="7" name="TextBox 6"/>
+          <p:cNvSpPr txBox="1"/>
+          <p:nvPr/>
+        </p:nvSpPr>
+        <p:spPr>
+          <a:xfrm>
+            <a:off x="731520" y="6263640"/>
+            <a:ext cx="5212080" cy="320040"/>
+          </a:xfrm>
+          <a:prstGeom prst="rect">
+            <a:avLst/>
+          </a:prstGeom>
+          <a:noFill/>
+        </p:spPr>
+        <p:txBody>
+          <a:bodyPr wrap="none">
+            <a:spAutoFit/>
+          </a:bodyPr>
+          <a:lstStyle/>
+          <a:p>
+            <a:pPr>
+              <a:defRPr sz="900" b="1">
                 <a:solidFill>
                   <a:srgbClr val="64748B"/>
                 </a:solidFill>
-              </a:rPr>
-              <a:t>Show a real Urdu description from a Sialkot exporter. Ask: 'How does an Urdu speaker reach buyers in the USA without getting ripped off?'</a:t>
-            </a:r>
-          </a:p>
-        </p:txBody>
-      </p:sp>
-      <p:sp>
-        <p:nvSpPr>
-          <p:cNvPr id="7" name="Rounded Rectangle 6"/>
-          <p:cNvSpPr/>
-          <p:nvPr/>
-        </p:nvSpPr>
-        <p:spPr>
-          <a:xfrm>
-            <a:off x="731520" y="1993391"/>
-            <a:ext cx="10698480" cy="621792"/>
-          </a:xfrm>
-          <a:prstGeom prst="roundRect">
-            <a:avLst/>
-          </a:prstGeom>
-          <a:solidFill>
-            <a:srgbClr val="FFFFFF"/>
-          </a:solidFill>
-          <a:ln>
-            <a:solidFill>
-              <a:srgbClr val="F59E0B"/>
-            </a:solidFill>
-          </a:ln>
-        </p:spPr>
-        <p:style>
-          <a:lnRef idx="1">
-            <a:schemeClr val="accent1"/>
-          </a:lnRef>
-          <a:fillRef idx="3">
-            <a:schemeClr val="accent1"/>
-          </a:fillRef>
-          <a:effectRef idx="2">
-            <a:schemeClr val="accent1"/>
-          </a:effectRef>
-          <a:fontRef idx="minor">
-            <a:schemeClr val="lt1"/>
-          </a:fontRef>
-        </p:style>
-        <p:txBody>
-          <a:bodyPr rtlCol="0" anchor="ctr"/>
-          <a:lstStyle/>
-          <a:p>
-            <a:pPr algn="ctr">
-              <a:defRPr b="1" sz="1100">
-                <a:solidFill>
-                  <a:srgbClr val="0F172A"/>
-                </a:solidFill>
-              </a:defRPr>
-            </a:pPr>
-            <a:r>
-              <a:t>[0:30 - 1:00] Voice / Urdu Input: </a:t>
-            </a:r>
-            <a:r>
-              <a:rPr b="0" sz="1000">
+              </a:defRPr>
+            </a:pPr>
+            <a:r>
+              <a:t>Screenshot 4: Verified Alibaba Gold Supplier Showcase (/marketplace/alibaba/sample)</a:t>
+            </a:r>
+          </a:p>
+        </p:txBody>
+      </p:sp>
+      <p:pic>
+        <p:nvPicPr>
+          <p:cNvPr id="8" name="Picture 7" descr="ss_amazon.png"/>
+          <p:cNvPicPr>
+            <a:picLocks noChangeAspect="1"/>
+          </p:cNvPicPr>
+          <p:nvPr/>
+        </p:nvPicPr>
+        <p:blipFill>
+          <a:blip r:embed="rId3"/>
+          <a:stretch>
+            <a:fillRect/>
+          </a:stretch>
+        </p:blipFill>
+        <p:spPr>
+          <a:xfrm>
+            <a:off x="6217920" y="1280160"/>
+            <a:ext cx="5212080" cy="4937760"/>
+          </a:xfrm>
+          <a:prstGeom prst="rect">
+            <a:avLst/>
+          </a:prstGeom>
+        </p:spPr>
+      </p:pic>
+      <p:sp>
+        <p:nvSpPr>
+          <p:cNvPr id="9" name="TextBox 8"/>
+          <p:cNvSpPr txBox="1"/>
+          <p:nvPr/>
+        </p:nvSpPr>
+        <p:spPr>
+          <a:xfrm>
+            <a:off x="6217920" y="6263640"/>
+            <a:ext cx="5212080" cy="320040"/>
+          </a:xfrm>
+          <a:prstGeom prst="rect">
+            <a:avLst/>
+          </a:prstGeom>
+          <a:noFill/>
+        </p:spPr>
+        <p:txBody>
+          <a:bodyPr wrap="none">
+            <a:spAutoFit/>
+          </a:bodyPr>
+          <a:lstStyle/>
+          <a:p>
+            <a:pPr>
+              <a:defRPr sz="900" b="1">
                 <a:solidFill>
                   <a:srgbClr val="64748B"/>
                 </a:solidFill>
-              </a:rPr>
-              <a:t>Speak or type the Urdu sentence into the dashboard. Show live extracted tags (Product, Material, MOQ, Price) appearing instantly.</a:t>
-            </a:r>
-          </a:p>
-        </p:txBody>
-      </p:sp>
-      <p:sp>
-        <p:nvSpPr>
-          <p:cNvPr id="8" name="Rounded Rectangle 7"/>
-          <p:cNvSpPr/>
-          <p:nvPr/>
-        </p:nvSpPr>
-        <p:spPr>
-          <a:xfrm>
-            <a:off x="731520" y="2706624"/>
-            <a:ext cx="10698480" cy="621792"/>
-          </a:xfrm>
-          <a:prstGeom prst="roundRect">
-            <a:avLst/>
-          </a:prstGeom>
-          <a:solidFill>
-            <a:srgbClr val="FFFFFF"/>
-          </a:solidFill>
-          <a:ln>
-            <a:solidFill>
-              <a:srgbClr val="F59E0B"/>
-            </a:solidFill>
-          </a:ln>
-        </p:spPr>
-        <p:style>
-          <a:lnRef idx="1">
-            <a:schemeClr val="accent1"/>
-          </a:lnRef>
-          <a:fillRef idx="3">
-            <a:schemeClr val="accent1"/>
-          </a:fillRef>
-          <a:effectRef idx="2">
-            <a:schemeClr val="accent1"/>
-          </a:effectRef>
-          <a:fontRef idx="minor">
-            <a:schemeClr val="lt1"/>
-          </a:fontRef>
-        </p:style>
-        <p:txBody>
-          <a:bodyPr rtlCol="0" anchor="ctr"/>
-          <a:lstStyle/>
-          <a:p>
-            <a:pPr algn="ctr">
-              <a:defRPr b="1" sz="1100">
-                <a:solidFill>
-                  <a:srgbClr val="0F172A"/>
-                </a:solidFill>
-              </a:defRPr>
-            </a:pPr>
-            <a:r>
-              <a:t>[1:00 - 1:20] Smart Urdu Slot Loop: </a:t>
-            </a:r>
-            <a:r>
-              <a:rPr b="0" sz="1000">
-                <a:solidFill>
-                  <a:srgbClr val="64748B"/>
-                </a:solidFill>
-              </a:rPr>
-              <a:t>Demonstrate missing MOQ on surgical scissors. System asks conversational Urdu question. Answer it, watch listing complete.</a:t>
-            </a:r>
-          </a:p>
-        </p:txBody>
-      </p:sp>
-      <p:sp>
-        <p:nvSpPr>
-          <p:cNvPr id="9" name="Rounded Rectangle 8"/>
-          <p:cNvSpPr/>
-          <p:nvPr/>
-        </p:nvSpPr>
-        <p:spPr>
-          <a:xfrm>
-            <a:off x="731520" y="3419856"/>
-            <a:ext cx="10698480" cy="621792"/>
-          </a:xfrm>
-          <a:prstGeom prst="roundRect">
-            <a:avLst/>
-          </a:prstGeom>
-          <a:solidFill>
-            <a:srgbClr val="FFFFFF"/>
-          </a:solidFill>
-          <a:ln>
-            <a:solidFill>
-              <a:srgbClr val="0284C7"/>
-            </a:solidFill>
-          </a:ln>
-        </p:spPr>
-        <p:style>
-          <a:lnRef idx="1">
-            <a:schemeClr val="accent1"/>
-          </a:lnRef>
-          <a:fillRef idx="3">
-            <a:schemeClr val="accent1"/>
-          </a:fillRef>
-          <a:effectRef idx="2">
-            <a:schemeClr val="accent1"/>
-          </a:effectRef>
-          <a:fontRef idx="minor">
-            <a:schemeClr val="lt1"/>
-          </a:fontRef>
-        </p:style>
-        <p:txBody>
-          <a:bodyPr rtlCol="0" anchor="ctr"/>
-          <a:lstStyle/>
-          <a:p>
-            <a:pPr algn="ctr">
-              <a:defRPr b="1" sz="1100">
-                <a:solidFill>
-                  <a:srgbClr val="0F172A"/>
-                </a:solidFill>
-              </a:defRPr>
-            </a:pPr>
-            <a:r>
-              <a:t>[1:20 - 1:50] RAG Output &amp; 0-100 Score: </a:t>
-            </a:r>
-            <a:r>
-              <a:rPr b="0" sz="1000">
-                <a:solidFill>
-                  <a:srgbClr val="64748B"/>
-                </a:solidFill>
-              </a:rPr>
-              <a:t>Showcase generated English title, 5 bullets, 15 SEO keywords. Point to 0-100 quality score gauge and auto-improve loop.</a:t>
-            </a:r>
-          </a:p>
-        </p:txBody>
-      </p:sp>
-      <p:sp>
-        <p:nvSpPr>
-          <p:cNvPr id="10" name="Rounded Rectangle 9"/>
-          <p:cNvSpPr/>
-          <p:nvPr/>
-        </p:nvSpPr>
-        <p:spPr>
-          <a:xfrm>
-            <a:off x="731520" y="4133087"/>
-            <a:ext cx="10698480" cy="621792"/>
-          </a:xfrm>
-          <a:prstGeom prst="roundRect">
-            <a:avLst/>
-          </a:prstGeom>
-          <a:solidFill>
-            <a:srgbClr val="FFFFFF"/>
-          </a:solidFill>
-          <a:ln>
-            <a:solidFill>
-              <a:srgbClr val="0284C7"/>
-            </a:solidFill>
-          </a:ln>
-        </p:spPr>
-        <p:style>
-          <a:lnRef idx="1">
-            <a:schemeClr val="accent1"/>
-          </a:lnRef>
-          <a:fillRef idx="3">
-            <a:schemeClr val="accent1"/>
-          </a:fillRef>
-          <a:effectRef idx="2">
-            <a:schemeClr val="accent1"/>
-          </a:effectRef>
-          <a:fontRef idx="minor">
-            <a:schemeClr val="lt1"/>
-          </a:fontRef>
-        </p:style>
-        <p:txBody>
-          <a:bodyPr rtlCol="0" anchor="ctr"/>
-          <a:lstStyle/>
-          <a:p>
-            <a:pPr algn="ctr">
-              <a:defRPr b="1" sz="1100">
-                <a:solidFill>
-                  <a:srgbClr val="0F172A"/>
-                </a:solidFill>
-              </a:defRPr>
-            </a:pPr>
-            <a:r>
-              <a:t>[1:50 - 2:10] Market Intelligence: </a:t>
-            </a:r>
-            <a:r>
-              <a:rPr b="0" sz="1000">
-                <a:solidFill>
-                  <a:srgbClr val="64748B"/>
-                </a:solidFill>
-              </a:rPr>
-              <a:t>Show suggested price ($48 vs $40 base), margin radar (+32%), and Payoneer vs Wise FBR 0.25% tax guidance.</a:t>
-            </a:r>
-          </a:p>
-        </p:txBody>
-      </p:sp>
-      <p:sp>
-        <p:nvSpPr>
-          <p:cNvPr id="11" name="Rounded Rectangle 10"/>
-          <p:cNvSpPr/>
-          <p:nvPr/>
-        </p:nvSpPr>
-        <p:spPr>
-          <a:xfrm>
-            <a:off x="731520" y="4846320"/>
-            <a:ext cx="10698480" cy="621792"/>
-          </a:xfrm>
-          <a:prstGeom prst="roundRect">
-            <a:avLst/>
-          </a:prstGeom>
-          <a:solidFill>
-            <a:srgbClr val="FFFFFF"/>
-          </a:solidFill>
-          <a:ln>
-            <a:solidFill>
-              <a:srgbClr val="F59E0B"/>
-            </a:solidFill>
-          </a:ln>
-        </p:spPr>
-        <p:style>
-          <a:lnRef idx="1">
-            <a:schemeClr val="accent1"/>
-          </a:lnRef>
-          <a:fillRef idx="3">
-            <a:schemeClr val="accent1"/>
-          </a:fillRef>
-          <a:effectRef idx="2">
-            <a:schemeClr val="accent1"/>
-          </a:effectRef>
-          <a:fontRef idx="minor">
-            <a:schemeClr val="lt1"/>
-          </a:fontRef>
-        </p:style>
-        <p:txBody>
-          <a:bodyPr rtlCol="0" anchor="ctr"/>
-          <a:lstStyle/>
-          <a:p>
-            <a:pPr algn="ctr">
-              <a:defRPr b="1" sz="1100">
-                <a:solidFill>
-                  <a:srgbClr val="0F172A"/>
-                </a:solidFill>
-              </a:defRPr>
-            </a:pPr>
-            <a:r>
-              <a:t>[2:10 - 2:30] 1-Click Publish Live: </a:t>
-            </a:r>
-            <a:r>
-              <a:rPr b="0" sz="1000">
-                <a:solidFill>
-                  <a:srgbClr val="64748B"/>
-                </a:solidFill>
-              </a:rPr>
-              <a:t>Click 'Approve &amp; Publish'. Open live Alibaba Trade Showcase and Amazon SP-API pages with live URLs.</a:t>
-            </a:r>
-          </a:p>
-        </p:txBody>
-      </p:sp>
-      <p:sp>
-        <p:nvSpPr>
-          <p:cNvPr id="12" name="Rounded Rectangle 11"/>
-          <p:cNvSpPr/>
-          <p:nvPr/>
-        </p:nvSpPr>
-        <p:spPr>
-          <a:xfrm>
-            <a:off x="731520" y="5559552"/>
-            <a:ext cx="10698480" cy="621792"/>
-          </a:xfrm>
-          <a:prstGeom prst="roundRect">
-            <a:avLst/>
-          </a:prstGeom>
-          <a:solidFill>
-            <a:srgbClr val="FFFFFF"/>
-          </a:solidFill>
-          <a:ln>
-            <a:solidFill>
-              <a:srgbClr val="0284C7"/>
-            </a:solidFill>
-          </a:ln>
-        </p:spPr>
-        <p:style>
-          <a:lnRef idx="1">
-            <a:schemeClr val="accent1"/>
-          </a:lnRef>
-          <a:fillRef idx="3">
-            <a:schemeClr val="accent1"/>
-          </a:fillRef>
-          <a:effectRef idx="2">
-            <a:schemeClr val="accent1"/>
-          </a:effectRef>
-          <a:fontRef idx="minor">
-            <a:schemeClr val="lt1"/>
-          </a:fontRef>
-        </p:style>
-        <p:txBody>
-          <a:bodyPr rtlCol="0" anchor="ctr"/>
-          <a:lstStyle/>
-          <a:p>
-            <a:pPr algn="ctr">
-              <a:defRPr b="1" sz="1100">
-                <a:solidFill>
-                  <a:srgbClr val="0F172A"/>
-                </a:solidFill>
-              </a:defRPr>
-            </a:pPr>
-            <a:r>
-              <a:t>[2:30 - 3:00] Buyer Agent &amp; Roadmap: </a:t>
-            </a:r>
-            <a:r>
-              <a:rPr b="0" sz="1000">
-                <a:solidFill>
-                  <a:srgbClr val="64748B"/>
-                </a:solidFill>
-              </a:rPr>
-              <a:t>Demonstrate live buyer inquiry simulation; state honest MVP limitations (mock APIs) and Phase 2-5 roadmap.</a:t>
+              </a:defRPr>
+            </a:pPr>
+            <a:r>
+              <a:t>Screenshot 5: Amazon Seller Central Buy Box &amp; SP-API Catalog (/marketplace/amazon/sample)</a:t>
             </a:r>
           </a:p>
         </p:txBody>
@@ -3909,43 +3593,8 @@
         </p:nvSpPr>
         <p:spPr>
           <a:xfrm>
-            <a:off x="731520" y="137160"/>
+            <a:off x="731520" y="109728"/>
             <a:ext cx="7315200" cy="274320"/>
-          </a:xfrm>
-          <a:prstGeom prst="rect">
-            <a:avLst/>
-          </a:prstGeom>
-          <a:noFill/>
-        </p:spPr>
-        <p:txBody>
-          <a:bodyPr wrap="square">
-            <a:spAutoFit/>
-          </a:bodyPr>
-          <a:lstStyle/>
-          <a:p>
-            <a:pPr>
-              <a:defRPr sz="1000" b="1">
-                <a:solidFill>
-                  <a:srgbClr val="0284C7"/>
-                </a:solidFill>
-              </a:defRPr>
-            </a:pPr>
-            <a:r>
-              <a:t>CORETECH INNOVATION | NLP HACKATHON 2026</a:t>
-            </a:r>
-          </a:p>
-        </p:txBody>
-      </p:sp>
-      <p:sp>
-        <p:nvSpPr>
-          <p:cNvPr id="4" name="TextBox 3"/>
-          <p:cNvSpPr txBox="1"/>
-          <p:nvPr/>
-        </p:nvSpPr>
-        <p:spPr>
-          <a:xfrm>
-            <a:off x="731520" y="365760"/>
-            <a:ext cx="9144000" cy="502920"/>
           </a:xfrm>
           <a:prstGeom prst="rect">
             <a:avLst/>
@@ -3959,28 +3608,28 @@
           <a:lstStyle/>
           <a:p>
             <a:pPr>
-              <a:defRPr sz="2000" b="1">
-                <a:solidFill>
-                  <a:srgbClr val="FFFFFF"/>
-                </a:solidFill>
-              </a:defRPr>
-            </a:pPr>
-            <a:r>
-              <a:t>Business Model &amp; 12-Month Execution Roadmap</a:t>
-            </a:r>
-          </a:p>
-        </p:txBody>
-      </p:sp>
-      <p:sp>
-        <p:nvSpPr>
-          <p:cNvPr id="5" name="TextBox 4"/>
+              <a:defRPr sz="1000" b="1">
+                <a:solidFill>
+                  <a:srgbClr val="0284C7"/>
+                </a:solidFill>
+              </a:defRPr>
+            </a:pPr>
+            <a:r>
+              <a:t>CORETECH INNOVATION | NLP HACKATHON 2026</a:t>
+            </a:r>
+          </a:p>
+        </p:txBody>
+      </p:sp>
+      <p:sp>
+        <p:nvSpPr>
+          <p:cNvPr id="4" name="TextBox 3"/>
           <p:cNvSpPr txBox="1"/>
           <p:nvPr/>
         </p:nvSpPr>
         <p:spPr>
           <a:xfrm>
-            <a:off x="9601200" y="320040"/>
-            <a:ext cx="2011680" cy="365760"/>
+            <a:off x="731520" y="347472"/>
+            <a:ext cx="9144000" cy="502920"/>
           </a:xfrm>
           <a:prstGeom prst="rect">
             <a:avLst/>
@@ -3994,6 +3643,41 @@
           <a:lstStyle/>
           <a:p>
             <a:pPr>
+              <a:defRPr sz="2000" b="1">
+                <a:solidFill>
+                  <a:srgbClr val="FFFFFF"/>
+                </a:solidFill>
+              </a:defRPr>
+            </a:pPr>
+            <a:r>
+              <a:t>Live UI Screenshot: Buyer Communication Agent Simulator</a:t>
+            </a:r>
+          </a:p>
+        </p:txBody>
+      </p:sp>
+      <p:sp>
+        <p:nvSpPr>
+          <p:cNvPr id="5" name="TextBox 4"/>
+          <p:cNvSpPr txBox="1"/>
+          <p:nvPr/>
+        </p:nvSpPr>
+        <p:spPr>
+          <a:xfrm>
+            <a:off x="9326880" y="320040"/>
+            <a:ext cx="2377440" cy="365760"/>
+          </a:xfrm>
+          <a:prstGeom prst="rect">
+            <a:avLst/>
+          </a:prstGeom>
+          <a:noFill/>
+        </p:spPr>
+        <p:txBody>
+          <a:bodyPr wrap="none">
+            <a:spAutoFit/>
+          </a:bodyPr>
+          <a:lstStyle/>
+          <a:p>
+            <a:pPr>
               <a:defRPr sz="900" b="1">
                 <a:solidFill>
                   <a:srgbClr val="10B981"/>
@@ -4006,16 +3690,75 @@
           </a:p>
         </p:txBody>
       </p:sp>
-      <p:sp>
-        <p:nvSpPr>
-          <p:cNvPr id="6" name="Rounded Rectangle 5"/>
+      <p:pic>
+        <p:nvPicPr>
+          <p:cNvPr id="6" name="Picture 5" descr="ss_buyer_agent.png"/>
+          <p:cNvPicPr>
+            <a:picLocks noChangeAspect="1"/>
+          </p:cNvPicPr>
+          <p:nvPr/>
+        </p:nvPicPr>
+        <p:blipFill>
+          <a:blip r:embed="rId2"/>
+          <a:stretch>
+            <a:fillRect/>
+          </a:stretch>
+        </p:blipFill>
+        <p:spPr>
+          <a:xfrm>
+            <a:off x="731520" y="1280160"/>
+            <a:ext cx="6766560" cy="4937760"/>
+          </a:xfrm>
+          <a:prstGeom prst="rect">
+            <a:avLst/>
+          </a:prstGeom>
+        </p:spPr>
+      </p:pic>
+      <p:sp>
+        <p:nvSpPr>
+          <p:cNvPr id="7" name="TextBox 6"/>
+          <p:cNvSpPr txBox="1"/>
+          <p:nvPr/>
+        </p:nvSpPr>
+        <p:spPr>
+          <a:xfrm>
+            <a:off x="731520" y="6263640"/>
+            <a:ext cx="6766560" cy="320040"/>
+          </a:xfrm>
+          <a:prstGeom prst="rect">
+            <a:avLst/>
+          </a:prstGeom>
+          <a:noFill/>
+        </p:spPr>
+        <p:txBody>
+          <a:bodyPr wrap="none">
+            <a:spAutoFit/>
+          </a:bodyPr>
+          <a:lstStyle/>
+          <a:p>
+            <a:pPr>
+              <a:defRPr sz="900" b="1">
+                <a:solidFill>
+                  <a:srgbClr val="64748B"/>
+                </a:solidFill>
+              </a:defRPr>
+            </a:pPr>
+            <a:r>
+              <a:t>Screenshot 6: Buyer RFQ received -&gt; Urdu escalation alert -&gt; Synthesized B2B English reply</a:t>
+            </a:r>
+          </a:p>
+        </p:txBody>
+      </p:sp>
+      <p:sp>
+        <p:nvSpPr>
+          <p:cNvPr id="8" name="Rounded Rectangle 7"/>
           <p:cNvSpPr/>
           <p:nvPr/>
         </p:nvSpPr>
         <p:spPr>
           <a:xfrm>
-            <a:off x="731520" y="1371600"/>
-            <a:ext cx="3291840" cy="4754880"/>
+            <a:off x="7772400" y="1280160"/>
+            <a:ext cx="3657600" cy="4937760"/>
           </a:xfrm>
           <a:prstGeom prst="roundRect">
             <a:avLst/>
@@ -4025,7 +3768,7 @@
           </a:solidFill>
           <a:ln w="19050">
             <a:solidFill>
-              <a:srgbClr val="0284C7"/>
+              <a:srgbClr val="0F172A"/>
             </a:solidFill>
           </a:ln>
         </p:spPr>
@@ -4044,24 +3787,24 @@
           </a:fontRef>
         </p:style>
         <p:txBody>
-          <a:bodyPr rtlCol="0" anchor="ctr" wrap="square" lIns="228600" tIns="182880" rIns="228600" bIns="182880"/>
+          <a:bodyPr rtlCol="0" anchor="ctr" wrap="square" lIns="182880" tIns="164592" rIns="182880" bIns="164592"/>
           <a:lstStyle/>
           <a:p>
             <a:pPr algn="ctr">
-              <a:defRPr sz="1400" b="1">
+              <a:defRPr sz="1300" b="1">
                 <a:solidFill>
                   <a:srgbClr val="0F172A"/>
                 </a:solidFill>
               </a:defRPr>
             </a:pPr>
             <a:r>
-              <a:t>SaaS Pricing Tiers</a:t>
-            </a:r>
-          </a:p>
-          <a:p>
-            <a:pPr>
-              <a:spcAft>
-                <a:spcPts val="400"/>
+              <a:t>Autonomous Negotiation Loop</a:t>
+            </a:r>
+          </a:p>
+          <a:p>
+            <a:pPr>
+              <a:spcAft>
+                <a:spcPts val="300"/>
               </a:spcAft>
               <a:defRPr sz="900" b="1">
                 <a:solidFill>
@@ -4070,211 +3813,67 @@
               </a:defRPr>
             </a:pPr>
             <a:r>
-              <a:t>[SUBSCRIPTION TIERS]</a:t>
-            </a:r>
-          </a:p>
-          <a:p>
-            <a:pPr>
-              <a:spcAft>
-                <a:spcPts val="300"/>
-              </a:spcAft>
-              <a:defRPr sz="1100">
+              <a:t>[NEGOTIATION AGENT]</a:t>
+            </a:r>
+          </a:p>
+          <a:p>
+            <a:pPr>
+              <a:spcAft>
+                <a:spcPts val="200"/>
+              </a:spcAft>
+              <a:defRPr sz="1000">
                 <a:solidFill>
                   <a:srgbClr val="64748B"/>
                 </a:solidFill>
               </a:defRPr>
             </a:pPr>
             <a:r>
-              <a:t>• Starter ($29/mo): Urdu-to-English listings, Alibaba &amp; Amazon formatting, quality scoring.</a:t>
-            </a:r>
-          </a:p>
-          <a:p>
-            <a:pPr>
-              <a:spcAft>
-                <a:spcPts val="300"/>
-              </a:spcAft>
-              <a:defRPr sz="1100">
+              <a:t>• 1. Incoming Buyer Message: Commercial buyer in Chicago inquires: 'Can you do 200 watches with custom logo on the dial? What is your FOB price?'.</a:t>
+            </a:r>
+          </a:p>
+          <a:p>
+            <a:pPr>
+              <a:spcAft>
+                <a:spcPts val="200"/>
+              </a:spcAft>
+              <a:defRPr sz="1000">
                 <a:solidFill>
                   <a:srgbClr val="64748B"/>
                 </a:solidFill>
               </a:defRPr>
             </a:pPr>
             <a:r>
-              <a:t>• Pro ($49/mo): Everything in Starter + Market pricing intelligence + Payment optimizer.</a:t>
-            </a:r>
-          </a:p>
-          <a:p>
-            <a:pPr>
-              <a:spcAft>
-                <a:spcPts val="300"/>
-              </a:spcAft>
-              <a:defRPr sz="1100">
+              <a:t>• 2. AI Agent Urdu Alert: Agent translates inquiry intent and alerts the exporter in Urdu: 'USA ke buyer ne custom quote maanga hai. Aap ka kya rate hai?'.</a:t>
+            </a:r>
+          </a:p>
+          <a:p>
+            <a:pPr>
+              <a:spcAft>
+                <a:spcPts val="200"/>
+              </a:spcAft>
+              <a:defRPr sz="1000">
                 <a:solidFill>
                   <a:srgbClr val="64748B"/>
                 </a:solidFill>
               </a:defRPr>
             </a:pPr>
             <a:r>
-              <a:t>• Business ($99/mo): Everything in Pro + Buyer reply agent + FBR tax reports + Priority dispatch.</a:t>
-            </a:r>
-          </a:p>
-          <a:p>
-            <a:pPr>
-              <a:spcAft>
-                <a:spcPts val="300"/>
-              </a:spcAft>
-              <a:defRPr sz="1100">
+              <a:t>• 3. Exporter Casual Urdu Reply: Exporter responds casually: 'iska rate 26 dollar hai aur 12 din lagain gay'.</a:t>
+            </a:r>
+          </a:p>
+          <a:p>
+            <a:pPr>
+              <a:spcAft>
+                <a:spcPts val="200"/>
+              </a:spcAft>
+              <a:defRPr sz="1000">
                 <a:solidFill>
                   <a:srgbClr val="64748B"/>
                 </a:solidFill>
               </a:defRPr>
             </a:pPr>
             <a:r>
-              <a:t>• Path to $1M ARR: 100 paid users by Month 6 ($5k/mo); 1,000+ paid users by Month 12 ($50k+/mo).</a:t>
-            </a:r>
-          </a:p>
-        </p:txBody>
-      </p:sp>
-      <p:sp>
-        <p:nvSpPr>
-          <p:cNvPr id="7" name="Rounded Rectangle 6"/>
-          <p:cNvSpPr/>
-          <p:nvPr/>
-        </p:nvSpPr>
-        <p:spPr>
-          <a:xfrm>
-            <a:off x="4389120" y="1371600"/>
-            <a:ext cx="6949440" cy="4754880"/>
-          </a:xfrm>
-          <a:prstGeom prst="roundRect">
-            <a:avLst/>
-          </a:prstGeom>
-          <a:solidFill>
-            <a:srgbClr val="FFFFFF"/>
-          </a:solidFill>
-          <a:ln w="19050">
-            <a:solidFill>
-              <a:srgbClr val="10B981"/>
-            </a:solidFill>
-          </a:ln>
-        </p:spPr>
-        <p:style>
-          <a:lnRef idx="1">
-            <a:schemeClr val="accent1"/>
-          </a:lnRef>
-          <a:fillRef idx="3">
-            <a:schemeClr val="accent1"/>
-          </a:fillRef>
-          <a:effectRef idx="2">
-            <a:schemeClr val="accent1"/>
-          </a:effectRef>
-          <a:fontRef idx="minor">
-            <a:schemeClr val="lt1"/>
-          </a:fontRef>
-        </p:style>
-        <p:txBody>
-          <a:bodyPr rtlCol="0" anchor="ctr" wrap="square" lIns="228600" tIns="182880" rIns="228600" bIns="182880"/>
-          <a:lstStyle/>
-          <a:p>
-            <a:pPr algn="ctr">
-              <a:defRPr sz="1400" b="1">
-                <a:solidFill>
-                  <a:srgbClr val="0F172A"/>
-                </a:solidFill>
-              </a:defRPr>
-            </a:pPr>
-            <a:r>
-              <a:t>12-Month Execution Roadmap</a:t>
-            </a:r>
-          </a:p>
-          <a:p>
-            <a:pPr>
-              <a:spcAft>
-                <a:spcPts val="400"/>
-              </a:spcAft>
-              <a:defRPr sz="900" b="1">
-                <a:solidFill>
-                  <a:srgbClr val="10B981"/>
-                </a:solidFill>
-              </a:defRPr>
-            </a:pPr>
-            <a:r>
-              <a:t>[5-PHASE STAGED EXECUTION]</a:t>
-            </a:r>
-          </a:p>
-          <a:p>
-            <a:pPr>
-              <a:spcAft>
-                <a:spcPts val="300"/>
-              </a:spcAft>
-              <a:defRPr sz="1100">
-                <a:solidFill>
-                  <a:srgbClr val="64748B"/>
-                </a:solidFill>
-              </a:defRPr>
-            </a:pPr>
-            <a:r>
-              <a:t>• Phase 1 (Day 1 - Month 1) [Hackathon MVP]: Working demo, 10 exporter interviews in Sialkot, apply for Alibaba &amp; Amazon developer accounts.</a:t>
-            </a:r>
-          </a:p>
-          <a:p>
-            <a:pPr>
-              <a:spcAft>
-                <a:spcPts val="300"/>
-              </a:spcAft>
-              <a:defRPr sz="1100">
-                <a:solidFill>
-                  <a:srgbClr val="64748B"/>
-                </a:solidFill>
-              </a:defRPr>
-            </a:pPr>
-            <a:r>
-              <a:t>• Phase 2 (Months 2 - 3) [Official APIs]: Live OAuth2 marketplace connectors, real-time Alibaba RFQ &amp; Amazon SP-API feeds, free beta with 50 exporters.</a:t>
-            </a:r>
-          </a:p>
-          <a:p>
-            <a:pPr>
-              <a:spcAft>
-                <a:spcPts val="300"/>
-              </a:spcAft>
-              <a:defRPr sz="1100">
-                <a:solidFill>
-                  <a:srgbClr val="64748B"/>
-                </a:solidFill>
-              </a:defRPr>
-            </a:pPr>
-            <a:r>
-              <a:t>• Phase 3 (Months 4 - 6) [Monetization]: Stripe &amp; Safepay billing live, payment optimizer, tax module launch, target: 100 paying customers ($5k/mo).</a:t>
-            </a:r>
-          </a:p>
-          <a:p>
-            <a:pPr>
-              <a:spcAft>
-                <a:spcPts val="300"/>
-              </a:spcAft>
-              <a:defRPr sz="1100">
-                <a:solidFill>
-                  <a:srgbClr val="64748B"/>
-                </a:solidFill>
-              </a:defRPr>
-            </a:pPr>
-            <a:r>
-              <a:t>• Phase 4 (Months 7 - 9) [Scaling]: Buyer auto-reply agent, mobile app for factory managers, regional expansion to Bangladesh &amp; Sri Lanka.</a:t>
-            </a:r>
-          </a:p>
-          <a:p>
-            <a:pPr>
-              <a:spcAft>
-                <a:spcPts val="300"/>
-              </a:spcAft>
-              <a:defRPr sz="1100">
-                <a:solidFill>
-                  <a:srgbClr val="64748B"/>
-                </a:solidFill>
-              </a:defRPr>
-            </a:pPr>
-            <a:r>
-              <a:t>• Phase 5 (Months 10 - 12) [Market Leader]: 100-SKU bulk catalog importer, automated competitor price tracking alerts, factory direct sales team.</a:t>
+              <a:t>• 4. Synthesized English Quote: Agent crafts a courteous, tone-checked B2B quotation confirming $26.00 FOB price and 12-day turnaround.</a:t>
             </a:r>
           </a:p>
         </p:txBody>
@@ -4350,43 +3949,8 @@
         </p:nvSpPr>
         <p:spPr>
           <a:xfrm>
-            <a:off x="731520" y="137160"/>
+            <a:off x="731520" y="109728"/>
             <a:ext cx="7315200" cy="274320"/>
-          </a:xfrm>
-          <a:prstGeom prst="rect">
-            <a:avLst/>
-          </a:prstGeom>
-          <a:noFill/>
-        </p:spPr>
-        <p:txBody>
-          <a:bodyPr wrap="square">
-            <a:spAutoFit/>
-          </a:bodyPr>
-          <a:lstStyle/>
-          <a:p>
-            <a:pPr>
-              <a:defRPr sz="1000" b="1">
-                <a:solidFill>
-                  <a:srgbClr val="0284C7"/>
-                </a:solidFill>
-              </a:defRPr>
-            </a:pPr>
-            <a:r>
-              <a:t>CORETECH INNOVATION | NLP HACKATHON 2026</a:t>
-            </a:r>
-          </a:p>
-        </p:txBody>
-      </p:sp>
-      <p:sp>
-        <p:nvSpPr>
-          <p:cNvPr id="4" name="TextBox 3"/>
-          <p:cNvSpPr txBox="1"/>
-          <p:nvPr/>
-        </p:nvSpPr>
-        <p:spPr>
-          <a:xfrm>
-            <a:off x="731520" y="365760"/>
-            <a:ext cx="9144000" cy="502920"/>
           </a:xfrm>
           <a:prstGeom prst="rect">
             <a:avLst/>
@@ -4400,28 +3964,28 @@
           <a:lstStyle/>
           <a:p>
             <a:pPr>
-              <a:defRPr sz="2000" b="1">
-                <a:solidFill>
-                  <a:srgbClr val="FFFFFF"/>
-                </a:solidFill>
-              </a:defRPr>
-            </a:pPr>
-            <a:r>
-              <a:t>Evaluation Metrics &amp; Ethical Compliance</a:t>
-            </a:r>
-          </a:p>
-        </p:txBody>
-      </p:sp>
-      <p:sp>
-        <p:nvSpPr>
-          <p:cNvPr id="5" name="TextBox 4"/>
+              <a:defRPr sz="1000" b="1">
+                <a:solidFill>
+                  <a:srgbClr val="0284C7"/>
+                </a:solidFill>
+              </a:defRPr>
+            </a:pPr>
+            <a:r>
+              <a:t>CORETECH INNOVATION | NLP HACKATHON 2026</a:t>
+            </a:r>
+          </a:p>
+        </p:txBody>
+      </p:sp>
+      <p:sp>
+        <p:nvSpPr>
+          <p:cNvPr id="4" name="TextBox 3"/>
           <p:cNvSpPr txBox="1"/>
           <p:nvPr/>
         </p:nvSpPr>
         <p:spPr>
           <a:xfrm>
-            <a:off x="9601200" y="320040"/>
-            <a:ext cx="2011680" cy="365760"/>
+            <a:off x="731520" y="347472"/>
+            <a:ext cx="9144000" cy="502920"/>
           </a:xfrm>
           <a:prstGeom prst="rect">
             <a:avLst/>
@@ -4435,6 +3999,41 @@
           <a:lstStyle/>
           <a:p>
             <a:pPr>
+              <a:defRPr sz="2000" b="1">
+                <a:solidFill>
+                  <a:srgbClr val="FFFFFF"/>
+                </a:solidFill>
+              </a:defRPr>
+            </a:pPr>
+            <a:r>
+              <a:t>Financial &amp; Compliance: Payment Optimizer &amp; FBR 0.25% Tax</a:t>
+            </a:r>
+          </a:p>
+        </p:txBody>
+      </p:sp>
+      <p:sp>
+        <p:nvSpPr>
+          <p:cNvPr id="5" name="TextBox 4"/>
+          <p:cNvSpPr txBox="1"/>
+          <p:nvPr/>
+        </p:nvSpPr>
+        <p:spPr>
+          <a:xfrm>
+            <a:off x="9326880" y="320040"/>
+            <a:ext cx="2377440" cy="365760"/>
+          </a:xfrm>
+          <a:prstGeom prst="rect">
+            <a:avLst/>
+          </a:prstGeom>
+          <a:noFill/>
+        </p:spPr>
+        <p:txBody>
+          <a:bodyPr wrap="none">
+            <a:spAutoFit/>
+          </a:bodyPr>
+          <a:lstStyle/>
+          <a:p>
+            <a:pPr>
               <a:defRPr sz="900" b="1">
                 <a:solidFill>
                   <a:srgbClr val="10B981"/>
@@ -4455,8 +4054,137 @@
         </p:nvSpPr>
         <p:spPr>
           <a:xfrm>
-            <a:off x="731520" y="1371600"/>
-            <a:ext cx="5120640" cy="4754880"/>
+            <a:off x="731520" y="1280160"/>
+            <a:ext cx="5120640" cy="4937760"/>
+          </a:xfrm>
+          <a:prstGeom prst="roundRect">
+            <a:avLst/>
+          </a:prstGeom>
+          <a:solidFill>
+            <a:srgbClr val="FFFFFF"/>
+          </a:solidFill>
+          <a:ln w="19050">
+            <a:solidFill>
+              <a:srgbClr val="0284C7"/>
+            </a:solidFill>
+          </a:ln>
+        </p:spPr>
+        <p:style>
+          <a:lnRef idx="1">
+            <a:schemeClr val="accent1"/>
+          </a:lnRef>
+          <a:fillRef idx="3">
+            <a:schemeClr val="accent1"/>
+          </a:fillRef>
+          <a:effectRef idx="2">
+            <a:schemeClr val="accent1"/>
+          </a:effectRef>
+          <a:fontRef idx="minor">
+            <a:schemeClr val="lt1"/>
+          </a:fontRef>
+        </p:style>
+        <p:txBody>
+          <a:bodyPr rtlCol="0" anchor="ctr" wrap="square" lIns="182880" tIns="164592" rIns="182880" bIns="164592"/>
+          <a:lstStyle/>
+          <a:p>
+            <a:pPr algn="ctr">
+              <a:defRPr sz="1300" b="1">
+                <a:solidFill>
+                  <a:srgbClr val="0F172A"/>
+                </a:solidFill>
+              </a:defRPr>
+            </a:pPr>
+            <a:r>
+              <a:t>Payment Gateway Optimizer</a:t>
+            </a:r>
+          </a:p>
+          <a:p>
+            <a:pPr>
+              <a:spcAft>
+                <a:spcPts val="300"/>
+              </a:spcAft>
+              <a:defRPr sz="900" b="1">
+                <a:solidFill>
+                  <a:srgbClr val="10B981"/>
+                </a:solidFill>
+              </a:defRPr>
+            </a:pPr>
+            <a:r>
+              <a:t>[GATEWAY OPTIMIZER]</a:t>
+            </a:r>
+          </a:p>
+          <a:p>
+            <a:pPr>
+              <a:spcAft>
+                <a:spcPts val="200"/>
+              </a:spcAft>
+              <a:defRPr sz="1000">
+                <a:solidFill>
+                  <a:srgbClr val="64748B"/>
+                </a:solidFill>
+              </a:defRPr>
+            </a:pPr>
+            <a:r>
+              <a:t>• • Payoneer vs Wise Fee Comparison: Evaluates transaction fees and foreign exchange margins based on buyer country.</a:t>
+            </a:r>
+          </a:p>
+          <a:p>
+            <a:pPr>
+              <a:spcAft>
+                <a:spcPts val="200"/>
+              </a:spcAft>
+              <a:defRPr sz="1000">
+                <a:solidFill>
+                  <a:srgbClr val="64748B"/>
+                </a:solidFill>
+              </a:defRPr>
+            </a:pPr>
+            <a:r>
+              <a:t>• • USA &amp; North America Orders: Recommends Payoneer for direct integration with Amazon payouts and Alibaba Trade Assurance disbursements.</a:t>
+            </a:r>
+          </a:p>
+          <a:p>
+            <a:pPr>
+              <a:spcAft>
+                <a:spcPts val="200"/>
+              </a:spcAft>
+              <a:defRPr sz="1000">
+                <a:solidFill>
+                  <a:srgbClr val="64748B"/>
+                </a:solidFill>
+              </a:defRPr>
+            </a:pPr>
+            <a:r>
+              <a:t>• • UK &amp; European Orders: Recommends Wise Business for direct SEPA / IBAN bank transfers with lower conversion spreads.</a:t>
+            </a:r>
+          </a:p>
+          <a:p>
+            <a:pPr>
+              <a:spcAft>
+                <a:spcPts val="200"/>
+              </a:spcAft>
+              <a:defRPr sz="1000">
+                <a:solidFill>
+                  <a:srgbClr val="64748B"/>
+                </a:solidFill>
+              </a:defRPr>
+            </a:pPr>
+            <a:r>
+              <a:t>• • Transparent Fee Breakdown: Displays estimated gateway fees and net exporter payout in USD &amp; PKR.</a:t>
+            </a:r>
+          </a:p>
+        </p:txBody>
+      </p:sp>
+      <p:sp>
+        <p:nvSpPr>
+          <p:cNvPr id="7" name="Rounded Rectangle 6"/>
+          <p:cNvSpPr/>
+          <p:nvPr/>
+        </p:nvSpPr>
+        <p:spPr>
+          <a:xfrm>
+            <a:off x="6217920" y="1280160"/>
+            <a:ext cx="5120640" cy="4937760"/>
           </a:xfrm>
           <a:prstGeom prst="roundRect">
             <a:avLst/>
@@ -4485,24 +4213,24 @@
           </a:fontRef>
         </p:style>
         <p:txBody>
-          <a:bodyPr rtlCol="0" anchor="ctr" wrap="square" lIns="228600" tIns="182880" rIns="228600" bIns="182880"/>
+          <a:bodyPr rtlCol="0" anchor="ctr" wrap="square" lIns="182880" tIns="164592" rIns="182880" bIns="164592"/>
           <a:lstStyle/>
           <a:p>
             <a:pPr algn="ctr">
-              <a:defRPr sz="1400" b="1">
+              <a:defRPr sz="1300" b="1">
                 <a:solidFill>
                   <a:srgbClr val="0F172A"/>
                 </a:solidFill>
               </a:defRPr>
             </a:pPr>
             <a:r>
-              <a:t>Measured Success Metrics</a:t>
-            </a:r>
-          </a:p>
-          <a:p>
-            <a:pPr>
-              <a:spcAft>
-                <a:spcPts val="400"/>
+              <a:t>FBR 0.25% Export Tax Regime</a:t>
+            </a:r>
+          </a:p>
+          <a:p>
+            <a:pPr>
+              <a:spcAft>
+                <a:spcPts val="300"/>
               </a:spcAft>
               <a:defRPr sz="900" b="1">
                 <a:solidFill>
@@ -4511,241 +4239,52 @@
               </a:defRPr>
             </a:pPr>
             <a:r>
-              <a:t>[BENCHMARK TARGETS]</a:t>
-            </a:r>
-          </a:p>
-          <a:p>
-            <a:pPr>
-              <a:spcAft>
-                <a:spcPts val="300"/>
-              </a:spcAft>
-              <a:defRPr sz="1100">
+              <a:t>[FBR TAX COMPLIANCE]</a:t>
+            </a:r>
+          </a:p>
+          <a:p>
+            <a:pPr>
+              <a:spcAft>
+                <a:spcPts val="200"/>
+              </a:spcAft>
+              <a:defRPr sz="1000">
                 <a:solidFill>
                   <a:srgbClr val="64748B"/>
                 </a:solidFill>
               </a:defRPr>
             </a:pPr>
             <a:r>
-              <a:t>• Extraction Accuracy: Field-level F1 score &gt;= 0.85 across test set.</a:t>
-            </a:r>
-          </a:p>
-          <a:p>
-            <a:pPr>
-              <a:spcAft>
-                <a:spcPts val="300"/>
-              </a:spcAft>
-              <a:defRPr sz="1100">
+              <a:t>• • Concessionary Export Slab: Guides manufacturers to qualify for the 0.25% Final Tax Regime under PSEB &amp; Export Incentive policies (saving 0.75% vs standard 1% withholding).</a:t>
+            </a:r>
+          </a:p>
+          <a:p>
+            <a:pPr>
+              <a:spcAft>
+                <a:spcPts val="200"/>
+              </a:spcAft>
+              <a:defRPr sz="1000">
                 <a:solidFill>
                   <a:srgbClr val="64748B"/>
                 </a:solidFill>
               </a:defRPr>
             </a:pPr>
             <a:r>
-              <a:t>• Listing Completeness: 100% of required platform attributes populated.</a:t>
-            </a:r>
-          </a:p>
-          <a:p>
-            <a:pPr>
-              <a:spcAft>
-                <a:spcPts val="300"/>
-              </a:spcAft>
-              <a:defRPr sz="1100">
+              <a:t>• • Electronic Proceeds Realization Certificate (e-PRC): Emphasizes obtaining digital e-PRC certificates from commercial Pakistani banks upon remittance arrival.</a:t>
+            </a:r>
+          </a:p>
+          <a:p>
+            <a:pPr>
+              <a:spcAft>
+                <a:spcPts val="200"/>
+              </a:spcAft>
+              <a:defRPr sz="1000">
                 <a:solidFill>
                   <a:srgbClr val="64748B"/>
                 </a:solidFill>
               </a:defRPr>
             </a:pPr>
             <a:r>
-              <a:t>• Quality Rubric Score: Average score &gt;= 80/100 verified by auto-improve loop.</a:t>
-            </a:r>
-          </a:p>
-          <a:p>
-            <a:pPr>
-              <a:spcAft>
-                <a:spcPts val="300"/>
-              </a:spcAft>
-              <a:defRPr sz="1100">
-                <a:solidFill>
-                  <a:srgbClr val="64748B"/>
-                </a:solidFill>
-              </a:defRPr>
-            </a:pPr>
-            <a:r>
-              <a:t>• Translation Fidelity: Average &gt;= 4.0 / 5.0 across bilingual reviewers.</a:t>
-            </a:r>
-          </a:p>
-          <a:p>
-            <a:pPr>
-              <a:spcAft>
-                <a:spcPts val="300"/>
-              </a:spcAft>
-              <a:defRPr sz="1100">
-                <a:solidFill>
-                  <a:srgbClr val="64748B"/>
-                </a:solidFill>
-              </a:defRPr>
-            </a:pPr>
-            <a:r>
-              <a:t>• Pipeline Latency: End-to-end processing under 1.5 seconds locally.</a:t>
-            </a:r>
-          </a:p>
-          <a:p>
-            <a:pPr>
-              <a:spcAft>
-                <a:spcPts val="300"/>
-              </a:spcAft>
-              <a:defRPr sz="1100">
-                <a:solidFill>
-                  <a:srgbClr val="64748B"/>
-                </a:solidFill>
-              </a:defRPr>
-            </a:pPr>
-            <a:r>
-              <a:t>• Test Suite Coverage: 16 automated Pytest unit and integration tests passing.</a:t>
-            </a:r>
-          </a:p>
-        </p:txBody>
-      </p:sp>
-      <p:sp>
-        <p:nvSpPr>
-          <p:cNvPr id="7" name="Rounded Rectangle 6"/>
-          <p:cNvSpPr/>
-          <p:nvPr/>
-        </p:nvSpPr>
-        <p:spPr>
-          <a:xfrm>
-            <a:off x="6217920" y="1371600"/>
-            <a:ext cx="5120640" cy="4754880"/>
-          </a:xfrm>
-          <a:prstGeom prst="roundRect">
-            <a:avLst/>
-          </a:prstGeom>
-          <a:solidFill>
-            <a:srgbClr val="FFFFFF"/>
-          </a:solidFill>
-          <a:ln w="19050">
-            <a:solidFill>
-              <a:srgbClr val="0F172A"/>
-            </a:solidFill>
-          </a:ln>
-        </p:spPr>
-        <p:style>
-          <a:lnRef idx="1">
-            <a:schemeClr val="accent1"/>
-          </a:lnRef>
-          <a:fillRef idx="3">
-            <a:schemeClr val="accent1"/>
-          </a:fillRef>
-          <a:effectRef idx="2">
-            <a:schemeClr val="accent1"/>
-          </a:effectRef>
-          <a:fontRef idx="minor">
-            <a:schemeClr val="lt1"/>
-          </a:fontRef>
-        </p:style>
-        <p:txBody>
-          <a:bodyPr rtlCol="0" anchor="ctr" wrap="square" lIns="228600" tIns="182880" rIns="228600" bIns="182880"/>
-          <a:lstStyle/>
-          <a:p>
-            <a:pPr algn="ctr">
-              <a:defRPr sz="1400" b="1">
-                <a:solidFill>
-                  <a:srgbClr val="0F172A"/>
-                </a:solidFill>
-              </a:defRPr>
-            </a:pPr>
-            <a:r>
-              <a:t>Ethical AI &amp; Compliance Guarantees</a:t>
-            </a:r>
-          </a:p>
-          <a:p>
-            <a:pPr>
-              <a:spcAft>
-                <a:spcPts val="400"/>
-              </a:spcAft>
-              <a:defRPr sz="900" b="1">
-                <a:solidFill>
-                  <a:srgbClr val="10B981"/>
-                </a:solidFill>
-              </a:defRPr>
-            </a:pPr>
-            <a:r>
-              <a:t>[ETHICS &amp; POLICY]</a:t>
-            </a:r>
-          </a:p>
-          <a:p>
-            <a:pPr>
-              <a:spcAft>
-                <a:spcPts val="300"/>
-              </a:spcAft>
-              <a:defRPr sz="1100">
-                <a:solidFill>
-                  <a:srgbClr val="64748B"/>
-                </a:solidFill>
-              </a:defRPr>
-            </a:pPr>
-            <a:r>
-              <a:t>• Originality: 100% original implementation written from scratch during building days.</a:t>
-            </a:r>
-          </a:p>
-          <a:p>
-            <a:pPr>
-              <a:spcAft>
-                <a:spcPts val="300"/>
-              </a:spcAft>
-              <a:defRPr sz="1100">
-                <a:solidFill>
-                  <a:srgbClr val="64748B"/>
-                </a:solidFill>
-              </a:defRPr>
-            </a:pPr>
-            <a:r>
-              <a:t>• Zero Shop Password Leaks: OAuth2 tokens only; zero stored passwords.</a:t>
-            </a:r>
-          </a:p>
-          <a:p>
-            <a:pPr>
-              <a:spcAft>
-                <a:spcPts val="300"/>
-              </a:spcAft>
-              <a:defRPr sz="1100">
-                <a:solidFill>
-                  <a:srgbClr val="64748B"/>
-                </a:solidFill>
-              </a:defRPr>
-            </a:pPr>
-            <a:r>
-              <a:t>• No Hallucinated Claims: Generation constrained to extracted JSON attributes.</a:t>
-            </a:r>
-          </a:p>
-          <a:p>
-            <a:pPr>
-              <a:spcAft>
-                <a:spcPts val="300"/>
-              </a:spcAft>
-              <a:defRPr sz="1100">
-                <a:solidFill>
-                  <a:srgbClr val="64748B"/>
-                </a:solidFill>
-              </a:defRPr>
-            </a:pPr>
-            <a:r>
-              <a:t>• Human-in-the-Loop: No listing or quotation is published without explicit exporter approval.</a:t>
-            </a:r>
-          </a:p>
-          <a:p>
-            <a:pPr>
-              <a:spcAft>
-                <a:spcPts val="300"/>
-              </a:spcAft>
-              <a:defRPr sz="1100">
-                <a:solidFill>
-                  <a:srgbClr val="64748B"/>
-                </a:solidFill>
-              </a:defRPr>
-            </a:pPr>
-            <a:r>
-              <a:t>• FBR Tax Compliance: Strict guidance on 0.25% regime &amp; bank e-PRC documentation.</a:t>
+              <a:t>• • Exporter Guidance in Urdu: Delivers clear, non-technical tax advice so factory owners stay fully compliant without hiring expensive consultants.</a:t>
             </a:r>
           </a:p>
         </p:txBody>
@@ -4821,43 +4360,8 @@
         </p:nvSpPr>
         <p:spPr>
           <a:xfrm>
-            <a:off x="731520" y="137160"/>
+            <a:off x="731520" y="109728"/>
             <a:ext cx="7315200" cy="274320"/>
-          </a:xfrm>
-          <a:prstGeom prst="rect">
-            <a:avLst/>
-          </a:prstGeom>
-          <a:noFill/>
-        </p:spPr>
-        <p:txBody>
-          <a:bodyPr wrap="square">
-            <a:spAutoFit/>
-          </a:bodyPr>
-          <a:lstStyle/>
-          <a:p>
-            <a:pPr>
-              <a:defRPr sz="1000" b="1">
-                <a:solidFill>
-                  <a:srgbClr val="0284C7"/>
-                </a:solidFill>
-              </a:defRPr>
-            </a:pPr>
-            <a:r>
-              <a:t>CORETECH INNOVATION | NLP HACKATHON 2026</a:t>
-            </a:r>
-          </a:p>
-        </p:txBody>
-      </p:sp>
-      <p:sp>
-        <p:nvSpPr>
-          <p:cNvPr id="4" name="TextBox 3"/>
-          <p:cNvSpPr txBox="1"/>
-          <p:nvPr/>
-        </p:nvSpPr>
-        <p:spPr>
-          <a:xfrm>
-            <a:off x="731520" y="365760"/>
-            <a:ext cx="9144000" cy="502920"/>
           </a:xfrm>
           <a:prstGeom prst="rect">
             <a:avLst/>
@@ -4871,28 +4375,28 @@
           <a:lstStyle/>
           <a:p>
             <a:pPr>
-              <a:defRPr sz="2000" b="1">
-                <a:solidFill>
-                  <a:srgbClr val="FFFFFF"/>
-                </a:solidFill>
-              </a:defRPr>
-            </a:pPr>
-            <a:r>
-              <a:t>Team CoreTech Innovation &amp; Shared Responsibilities</a:t>
-            </a:r>
-          </a:p>
-        </p:txBody>
-      </p:sp>
-      <p:sp>
-        <p:nvSpPr>
-          <p:cNvPr id="5" name="TextBox 4"/>
+              <a:defRPr sz="1000" b="1">
+                <a:solidFill>
+                  <a:srgbClr val="0284C7"/>
+                </a:solidFill>
+              </a:defRPr>
+            </a:pPr>
+            <a:r>
+              <a:t>CORETECH INNOVATION | NLP HACKATHON 2026</a:t>
+            </a:r>
+          </a:p>
+        </p:txBody>
+      </p:sp>
+      <p:sp>
+        <p:nvSpPr>
+          <p:cNvPr id="4" name="TextBox 3"/>
           <p:cNvSpPr txBox="1"/>
           <p:nvPr/>
         </p:nvSpPr>
         <p:spPr>
           <a:xfrm>
-            <a:off x="9601200" y="320040"/>
-            <a:ext cx="2011680" cy="365760"/>
+            <a:off x="731520" y="347472"/>
+            <a:ext cx="9144000" cy="502920"/>
           </a:xfrm>
           <a:prstGeom prst="rect">
             <a:avLst/>
@@ -4906,6 +4410,41 @@
           <a:lstStyle/>
           <a:p>
             <a:pPr>
+              <a:defRPr sz="2000" b="1">
+                <a:solidFill>
+                  <a:srgbClr val="FFFFFF"/>
+                </a:solidFill>
+              </a:defRPr>
+            </a:pPr>
+            <a:r>
+              <a:t>Hackathon Demo Pitch Video Script (Exact 3-Minute Timing)</a:t>
+            </a:r>
+          </a:p>
+        </p:txBody>
+      </p:sp>
+      <p:sp>
+        <p:nvSpPr>
+          <p:cNvPr id="5" name="TextBox 4"/>
+          <p:cNvSpPr txBox="1"/>
+          <p:nvPr/>
+        </p:nvSpPr>
+        <p:spPr>
+          <a:xfrm>
+            <a:off x="9326880" y="320040"/>
+            <a:ext cx="2377440" cy="365760"/>
+          </a:xfrm>
+          <a:prstGeom prst="rect">
+            <a:avLst/>
+          </a:prstGeom>
+          <a:noFill/>
+        </p:spPr>
+        <p:txBody>
+          <a:bodyPr wrap="none">
+            <a:spAutoFit/>
+          </a:bodyPr>
+          <a:lstStyle/>
+          <a:p>
+            <a:pPr>
               <a:defRPr sz="900" b="1">
                 <a:solidFill>
                   <a:srgbClr val="10B981"/>
@@ -4926,8 +4465,8 @@
         </p:nvSpPr>
         <p:spPr>
           <a:xfrm>
-            <a:off x="731520" y="1280160"/>
-            <a:ext cx="10698480" cy="841248"/>
+            <a:off x="731520" y="1234440"/>
+            <a:ext cx="10698480" cy="621792"/>
           </a:xfrm>
           <a:prstGeom prst="roundRect">
             <a:avLst/>
@@ -4960,34 +4499,22 @@
           <a:lstStyle/>
           <a:p>
             <a:pPr algn="ctr">
-              <a:defRPr b="1" sz="1300">
+              <a:defRPr b="1" sz="1100">
                 <a:solidFill>
                   <a:srgbClr val="0F172A"/>
                 </a:solidFill>
               </a:defRPr>
             </a:pPr>
             <a:r>
-              <a:t>Sufyan Arain </a:t>
-            </a:r>
-            <a:r>
-              <a:rPr b="1" sz="1100">
-                <a:solidFill>
-                  <a:srgbClr val="0284C7"/>
+              <a:t>[0:00 - 0:30] The Hook &amp; Problem: </a:t>
+            </a:r>
+            <a:r>
+              <a:rPr b="0" sz="1000">
+                <a:solidFill>
+                  <a:srgbClr val="64748B"/>
                 </a:solidFill>
               </a:rPr>
-              <a:t>— TEAM LEAD</a:t>
-            </a:r>
-          </a:p>
-          <a:p>
-            <a:pPr>
-              <a:defRPr sz="1000">
-                <a:solidFill>
-                  <a:srgbClr val="64748B"/>
-                </a:solidFill>
-              </a:defRPr>
-            </a:pPr>
-            <a:r>
-              <a:t>Primary Contributions: Project architecture, integration, demo pitch, final submission delivery</a:t>
+              <a:t>Show a real Urdu description from a Sialkot exporter. Ask: 'How does an Urdu speaker reach buyers in the USA without getting ripped off?'</a:t>
             </a:r>
           </a:p>
         </p:txBody>
@@ -5000,8 +4527,132 @@
         </p:nvSpPr>
         <p:spPr>
           <a:xfrm>
-            <a:off x="731520" y="2240280"/>
-            <a:ext cx="10698480" cy="841248"/>
+            <a:off x="731520" y="1947672"/>
+            <a:ext cx="10698480" cy="621792"/>
+          </a:xfrm>
+          <a:prstGeom prst="roundRect">
+            <a:avLst/>
+          </a:prstGeom>
+          <a:solidFill>
+            <a:srgbClr val="FFFFFF"/>
+          </a:solidFill>
+          <a:ln>
+            <a:solidFill>
+              <a:srgbClr val="F59E0B"/>
+            </a:solidFill>
+          </a:ln>
+        </p:spPr>
+        <p:style>
+          <a:lnRef idx="1">
+            <a:schemeClr val="accent1"/>
+          </a:lnRef>
+          <a:fillRef idx="3">
+            <a:schemeClr val="accent1"/>
+          </a:fillRef>
+          <a:effectRef idx="2">
+            <a:schemeClr val="accent1"/>
+          </a:effectRef>
+          <a:fontRef idx="minor">
+            <a:schemeClr val="lt1"/>
+          </a:fontRef>
+        </p:style>
+        <p:txBody>
+          <a:bodyPr rtlCol="0" anchor="ctr"/>
+          <a:lstStyle/>
+          <a:p>
+            <a:pPr algn="ctr">
+              <a:defRPr b="1" sz="1100">
+                <a:solidFill>
+                  <a:srgbClr val="0F172A"/>
+                </a:solidFill>
+              </a:defRPr>
+            </a:pPr>
+            <a:r>
+              <a:t>[0:30 - 1:00] Voice / Urdu Input: </a:t>
+            </a:r>
+            <a:r>
+              <a:rPr b="0" sz="1000">
+                <a:solidFill>
+                  <a:srgbClr val="64748B"/>
+                </a:solidFill>
+              </a:rPr>
+              <a:t>Speak or type the Urdu sentence into the dashboard. Show live extracted tags (Product, Material, MOQ, Price) appearing instantly.</a:t>
+            </a:r>
+          </a:p>
+        </p:txBody>
+      </p:sp>
+      <p:sp>
+        <p:nvSpPr>
+          <p:cNvPr id="8" name="Rounded Rectangle 7"/>
+          <p:cNvSpPr/>
+          <p:nvPr/>
+        </p:nvSpPr>
+        <p:spPr>
+          <a:xfrm>
+            <a:off x="731520" y="2660904"/>
+            <a:ext cx="10698480" cy="621792"/>
+          </a:xfrm>
+          <a:prstGeom prst="roundRect">
+            <a:avLst/>
+          </a:prstGeom>
+          <a:solidFill>
+            <a:srgbClr val="FFFFFF"/>
+          </a:solidFill>
+          <a:ln>
+            <a:solidFill>
+              <a:srgbClr val="F59E0B"/>
+            </a:solidFill>
+          </a:ln>
+        </p:spPr>
+        <p:style>
+          <a:lnRef idx="1">
+            <a:schemeClr val="accent1"/>
+          </a:lnRef>
+          <a:fillRef idx="3">
+            <a:schemeClr val="accent1"/>
+          </a:fillRef>
+          <a:effectRef idx="2">
+            <a:schemeClr val="accent1"/>
+          </a:effectRef>
+          <a:fontRef idx="minor">
+            <a:schemeClr val="lt1"/>
+          </a:fontRef>
+        </p:style>
+        <p:txBody>
+          <a:bodyPr rtlCol="0" anchor="ctr"/>
+          <a:lstStyle/>
+          <a:p>
+            <a:pPr algn="ctr">
+              <a:defRPr b="1" sz="1100">
+                <a:solidFill>
+                  <a:srgbClr val="0F172A"/>
+                </a:solidFill>
+              </a:defRPr>
+            </a:pPr>
+            <a:r>
+              <a:t>[1:00 - 1:20] Smart Urdu Slot Loop: </a:t>
+            </a:r>
+            <a:r>
+              <a:rPr b="0" sz="1000">
+                <a:solidFill>
+                  <a:srgbClr val="64748B"/>
+                </a:solidFill>
+              </a:rPr>
+              <a:t>Demonstrate missing MOQ on surgical scissors. System asks conversational Urdu question. Answer it, watch listing complete.</a:t>
+            </a:r>
+          </a:p>
+        </p:txBody>
+      </p:sp>
+      <p:sp>
+        <p:nvSpPr>
+          <p:cNvPr id="9" name="Rounded Rectangle 8"/>
+          <p:cNvSpPr/>
+          <p:nvPr/>
+        </p:nvSpPr>
+        <p:spPr>
+          <a:xfrm>
+            <a:off x="731520" y="3374136"/>
+            <a:ext cx="10698480" cy="621792"/>
           </a:xfrm>
           <a:prstGeom prst="roundRect">
             <a:avLst/>
@@ -5034,48 +4685,36 @@
           <a:lstStyle/>
           <a:p>
             <a:pPr algn="ctr">
-              <a:defRPr b="1" sz="1300">
+              <a:defRPr b="1" sz="1100">
                 <a:solidFill>
                   <a:srgbClr val="0F172A"/>
                 </a:solidFill>
               </a:defRPr>
             </a:pPr>
             <a:r>
-              <a:t>Shahzaib Sheikh </a:t>
-            </a:r>
-            <a:r>
-              <a:rPr b="1" sz="1100">
-                <a:solidFill>
-                  <a:srgbClr val="0284C7"/>
+              <a:t>[1:20 - 1:50] RAG Output &amp; 0-100 Score: </a:t>
+            </a:r>
+            <a:r>
+              <a:rPr b="0" sz="1000">
+                <a:solidFill>
+                  <a:srgbClr val="64748B"/>
                 </a:solidFill>
               </a:rPr>
-              <a:t>— BACKEND DEVELOPER</a:t>
-            </a:r>
-          </a:p>
-          <a:p>
-            <a:pPr>
-              <a:defRPr sz="1000">
-                <a:solidFill>
-                  <a:srgbClr val="64748B"/>
-                </a:solidFill>
-              </a:defRPr>
-            </a:pPr>
-            <a:r>
-              <a:t>Primary Contributions: FastAPI microservices, mock marketplace APIs, SQLite database schema</a:t>
-            </a:r>
-          </a:p>
-        </p:txBody>
-      </p:sp>
-      <p:sp>
-        <p:nvSpPr>
-          <p:cNvPr id="8" name="Rounded Rectangle 7"/>
+              <a:t>Showcase generated English title, 5 bullets, 15 SEO keywords. Point to 0-100 quality score gauge and auto-improve loop.</a:t>
+            </a:r>
+          </a:p>
+        </p:txBody>
+      </p:sp>
+      <p:sp>
+        <p:nvSpPr>
+          <p:cNvPr id="10" name="Rounded Rectangle 9"/>
           <p:cNvSpPr/>
           <p:nvPr/>
         </p:nvSpPr>
         <p:spPr>
           <a:xfrm>
-            <a:off x="731520" y="3200400"/>
-            <a:ext cx="10698480" cy="841248"/>
+            <a:off x="731520" y="4087368"/>
+            <a:ext cx="10698480" cy="621792"/>
           </a:xfrm>
           <a:prstGeom prst="roundRect">
             <a:avLst/>
@@ -5108,48 +4747,98 @@
           <a:lstStyle/>
           <a:p>
             <a:pPr algn="ctr">
-              <a:defRPr b="1" sz="1300">
+              <a:defRPr b="1" sz="1100">
                 <a:solidFill>
                   <a:srgbClr val="0F172A"/>
                 </a:solidFill>
               </a:defRPr>
             </a:pPr>
             <a:r>
-              <a:t>Sehar </a:t>
-            </a:r>
-            <a:r>
-              <a:rPr b="1" sz="1100">
-                <a:solidFill>
-                  <a:srgbClr val="0284C7"/>
+              <a:t>[1:50 - 2:10] Market Intelligence: </a:t>
+            </a:r>
+            <a:r>
+              <a:rPr b="0" sz="1000">
+                <a:solidFill>
+                  <a:srgbClr val="64748B"/>
                 </a:solidFill>
               </a:rPr>
-              <a:t>— AI / ML ENGINEER</a:t>
-            </a:r>
-          </a:p>
-          <a:p>
-            <a:pPr>
-              <a:defRPr sz="1000">
+              <a:t>Show suggested price ($48 vs $40 base), margin radar (+32%), and Payoneer vs Wise FBR 0.25% tax guidance.</a:t>
+            </a:r>
+          </a:p>
+        </p:txBody>
+      </p:sp>
+      <p:sp>
+        <p:nvSpPr>
+          <p:cNvPr id="11" name="Rounded Rectangle 10"/>
+          <p:cNvSpPr/>
+          <p:nvPr/>
+        </p:nvSpPr>
+        <p:spPr>
+          <a:xfrm>
+            <a:off x="731520" y="4800600"/>
+            <a:ext cx="10698480" cy="621792"/>
+          </a:xfrm>
+          <a:prstGeom prst="roundRect">
+            <a:avLst/>
+          </a:prstGeom>
+          <a:solidFill>
+            <a:srgbClr val="FFFFFF"/>
+          </a:solidFill>
+          <a:ln>
+            <a:solidFill>
+              <a:srgbClr val="F59E0B"/>
+            </a:solidFill>
+          </a:ln>
+        </p:spPr>
+        <p:style>
+          <a:lnRef idx="1">
+            <a:schemeClr val="accent1"/>
+          </a:lnRef>
+          <a:fillRef idx="3">
+            <a:schemeClr val="accent1"/>
+          </a:fillRef>
+          <a:effectRef idx="2">
+            <a:schemeClr val="accent1"/>
+          </a:effectRef>
+          <a:fontRef idx="minor">
+            <a:schemeClr val="lt1"/>
+          </a:fontRef>
+        </p:style>
+        <p:txBody>
+          <a:bodyPr rtlCol="0" anchor="ctr"/>
+          <a:lstStyle/>
+          <a:p>
+            <a:pPr algn="ctr">
+              <a:defRPr b="1" sz="1100">
+                <a:solidFill>
+                  <a:srgbClr val="0F172A"/>
+                </a:solidFill>
+              </a:defRPr>
+            </a:pPr>
+            <a:r>
+              <a:t>[2:10 - 2:30] 1-Click Publish Live: </a:t>
+            </a:r>
+            <a:r>
+              <a:rPr b="0" sz="1000">
                 <a:solidFill>
                   <a:srgbClr val="64748B"/>
                 </a:solidFill>
-              </a:defRPr>
-            </a:pPr>
-            <a:r>
-              <a:t>Primary Contributions: NLP pipeline, prompt engineering, rubric scoring engine, RAG store</a:t>
-            </a:r>
-          </a:p>
-        </p:txBody>
-      </p:sp>
-      <p:sp>
-        <p:nvSpPr>
-          <p:cNvPr id="9" name="Rounded Rectangle 8"/>
+              </a:rPr>
+              <a:t>Click 'Approve &amp; Publish'. Open live Alibaba Trade Showcase and Amazon SP-API pages with live URLs.</a:t>
+            </a:r>
+          </a:p>
+        </p:txBody>
+      </p:sp>
+      <p:sp>
+        <p:nvSpPr>
+          <p:cNvPr id="12" name="Rounded Rectangle 11"/>
           <p:cNvSpPr/>
           <p:nvPr/>
         </p:nvSpPr>
         <p:spPr>
           <a:xfrm>
-            <a:off x="731520" y="4160520"/>
-            <a:ext cx="10698480" cy="841248"/>
+            <a:off x="731520" y="5513831"/>
+            <a:ext cx="10698480" cy="621792"/>
           </a:xfrm>
           <a:prstGeom prst="roundRect">
             <a:avLst/>
@@ -5182,108 +4871,22 @@
           <a:lstStyle/>
           <a:p>
             <a:pPr algn="ctr">
-              <a:defRPr b="1" sz="1300">
+              <a:defRPr b="1" sz="1100">
                 <a:solidFill>
                   <a:srgbClr val="0F172A"/>
                 </a:solidFill>
               </a:defRPr>
             </a:pPr>
             <a:r>
-              <a:t>Nimra </a:t>
-            </a:r>
-            <a:r>
-              <a:rPr b="1" sz="1100">
-                <a:solidFill>
-                  <a:srgbClr val="0284C7"/>
+              <a:t>[2:30 - 3:00] Buyer Agent &amp; Roadmap: </a:t>
+            </a:r>
+            <a:r>
+              <a:rPr b="0" sz="1000">
+                <a:solidFill>
+                  <a:srgbClr val="64748B"/>
                 </a:solidFill>
               </a:rPr>
-              <a:t>— UI / UX DESIGNER &amp; FRONTEND</a:t>
-            </a:r>
-          </a:p>
-          <a:p>
-            <a:pPr>
-              <a:defRPr sz="1000">
-                <a:solidFill>
-                  <a:srgbClr val="64748B"/>
-                </a:solidFill>
-              </a:defRPr>
-            </a:pPr>
-            <a:r>
-              <a:t>Primary Contributions: Responsive dashboard layout, Noto Nastaliq Urdu styling, live preview pages</a:t>
-            </a:r>
-          </a:p>
-        </p:txBody>
-      </p:sp>
-      <p:sp>
-        <p:nvSpPr>
-          <p:cNvPr id="10" name="Rounded Rectangle 9"/>
-          <p:cNvSpPr/>
-          <p:nvPr/>
-        </p:nvSpPr>
-        <p:spPr>
-          <a:xfrm>
-            <a:off x="731520" y="5120640"/>
-            <a:ext cx="10698480" cy="841248"/>
-          </a:xfrm>
-          <a:prstGeom prst="roundRect">
-            <a:avLst/>
-          </a:prstGeom>
-          <a:solidFill>
-            <a:srgbClr val="FFFFFF"/>
-          </a:solidFill>
-          <a:ln>
-            <a:solidFill>
-              <a:srgbClr val="0284C7"/>
-            </a:solidFill>
-          </a:ln>
-        </p:spPr>
-        <p:style>
-          <a:lnRef idx="1">
-            <a:schemeClr val="accent1"/>
-          </a:lnRef>
-          <a:fillRef idx="3">
-            <a:schemeClr val="accent1"/>
-          </a:fillRef>
-          <a:effectRef idx="2">
-            <a:schemeClr val="accent1"/>
-          </a:effectRef>
-          <a:fontRef idx="minor">
-            <a:schemeClr val="lt1"/>
-          </a:fontRef>
-        </p:style>
-        <p:txBody>
-          <a:bodyPr rtlCol="0" anchor="ctr"/>
-          <a:lstStyle/>
-          <a:p>
-            <a:pPr algn="ctr">
-              <a:defRPr b="1" sz="1300">
-                <a:solidFill>
-                  <a:srgbClr val="0F172A"/>
-                </a:solidFill>
-              </a:defRPr>
-            </a:pPr>
-            <a:r>
-              <a:t>Zammad </a:t>
-            </a:r>
-            <a:r>
-              <a:rPr b="1" sz="1100">
-                <a:solidFill>
-                  <a:srgbClr val="0284C7"/>
-                </a:solidFill>
-              </a:rPr>
-              <a:t>— RESEARCHER &amp; DOCUMENTATION</a:t>
-            </a:r>
-          </a:p>
-          <a:p>
-            <a:pPr>
-              <a:defRPr sz="1000">
-                <a:solidFill>
-                  <a:srgbClr val="64748B"/>
-                </a:solidFill>
-              </a:defRPr>
-            </a:pPr>
-            <a:r>
-              <a:t>Primary Contributions: Sialkot/Faisalabad export pain points, test datasets, README &amp; pitch script</a:t>
+              <a:t>Demonstrate live buyer inquiry simulation; state honest MVP limitations (mock APIs) and Phase 2-5 roadmap.</a:t>
             </a:r>
           </a:p>
         </p:txBody>
@@ -5359,43 +4962,8 @@
         </p:nvSpPr>
         <p:spPr>
           <a:xfrm>
-            <a:off x="731520" y="137160"/>
+            <a:off x="731520" y="109728"/>
             <a:ext cx="7315200" cy="274320"/>
-          </a:xfrm>
-          <a:prstGeom prst="rect">
-            <a:avLst/>
-          </a:prstGeom>
-          <a:noFill/>
-        </p:spPr>
-        <p:txBody>
-          <a:bodyPr wrap="square">
-            <a:spAutoFit/>
-          </a:bodyPr>
-          <a:lstStyle/>
-          <a:p>
-            <a:pPr>
-              <a:defRPr sz="1000" b="1">
-                <a:solidFill>
-                  <a:srgbClr val="0284C7"/>
-                </a:solidFill>
-              </a:defRPr>
-            </a:pPr>
-            <a:r>
-              <a:t>CORETECH INNOVATION | NLP HACKATHON 2026</a:t>
-            </a:r>
-          </a:p>
-        </p:txBody>
-      </p:sp>
-      <p:sp>
-        <p:nvSpPr>
-          <p:cNvPr id="4" name="TextBox 3"/>
-          <p:cNvSpPr txBox="1"/>
-          <p:nvPr/>
-        </p:nvSpPr>
-        <p:spPr>
-          <a:xfrm>
-            <a:off x="731520" y="365760"/>
-            <a:ext cx="9144000" cy="502920"/>
           </a:xfrm>
           <a:prstGeom prst="rect">
             <a:avLst/>
@@ -5409,28 +4977,28 @@
           <a:lstStyle/>
           <a:p>
             <a:pPr>
-              <a:defRPr sz="2000" b="1">
-                <a:solidFill>
-                  <a:srgbClr val="FFFFFF"/>
-                </a:solidFill>
-              </a:defRPr>
-            </a:pPr>
-            <a:r>
-              <a:t>Official Submission Deliverables Checklist</a:t>
-            </a:r>
-          </a:p>
-        </p:txBody>
-      </p:sp>
-      <p:sp>
-        <p:nvSpPr>
-          <p:cNvPr id="5" name="TextBox 4"/>
+              <a:defRPr sz="1000" b="1">
+                <a:solidFill>
+                  <a:srgbClr val="0284C7"/>
+                </a:solidFill>
+              </a:defRPr>
+            </a:pPr>
+            <a:r>
+              <a:t>CORETECH INNOVATION | NLP HACKATHON 2026</a:t>
+            </a:r>
+          </a:p>
+        </p:txBody>
+      </p:sp>
+      <p:sp>
+        <p:nvSpPr>
+          <p:cNvPr id="4" name="TextBox 3"/>
           <p:cNvSpPr txBox="1"/>
           <p:nvPr/>
         </p:nvSpPr>
         <p:spPr>
           <a:xfrm>
-            <a:off x="9601200" y="320040"/>
-            <a:ext cx="2011680" cy="365760"/>
+            <a:off x="731520" y="347472"/>
+            <a:ext cx="9144000" cy="502920"/>
           </a:xfrm>
           <a:prstGeom prst="rect">
             <a:avLst/>
@@ -5444,6 +5012,41 @@
           <a:lstStyle/>
           <a:p>
             <a:pPr>
+              <a:defRPr sz="2000" b="1">
+                <a:solidFill>
+                  <a:srgbClr val="FFFFFF"/>
+                </a:solidFill>
+              </a:defRPr>
+            </a:pPr>
+            <a:r>
+              <a:t>Business Model &amp; 12-Month Execution Roadmap</a:t>
+            </a:r>
+          </a:p>
+        </p:txBody>
+      </p:sp>
+      <p:sp>
+        <p:nvSpPr>
+          <p:cNvPr id="5" name="TextBox 4"/>
+          <p:cNvSpPr txBox="1"/>
+          <p:nvPr/>
+        </p:nvSpPr>
+        <p:spPr>
+          <a:xfrm>
+            <a:off x="9326880" y="320040"/>
+            <a:ext cx="2377440" cy="365760"/>
+          </a:xfrm>
+          <a:prstGeom prst="rect">
+            <a:avLst/>
+          </a:prstGeom>
+          <a:noFill/>
+        </p:spPr>
+        <p:txBody>
+          <a:bodyPr wrap="none">
+            <a:spAutoFit/>
+          </a:bodyPr>
+          <a:lstStyle/>
+          <a:p>
+            <a:pPr>
               <a:defRPr sz="900" b="1">
                 <a:solidFill>
                   <a:srgbClr val="10B981"/>
@@ -5464,8 +5067,137 @@
         </p:nvSpPr>
         <p:spPr>
           <a:xfrm>
-            <a:off x="731520" y="1371600"/>
-            <a:ext cx="5120640" cy="4754880"/>
+            <a:off x="731520" y="1280160"/>
+            <a:ext cx="3291840" cy="4937760"/>
+          </a:xfrm>
+          <a:prstGeom prst="roundRect">
+            <a:avLst/>
+          </a:prstGeom>
+          <a:solidFill>
+            <a:srgbClr val="FFFFFF"/>
+          </a:solidFill>
+          <a:ln w="19050">
+            <a:solidFill>
+              <a:srgbClr val="0284C7"/>
+            </a:solidFill>
+          </a:ln>
+        </p:spPr>
+        <p:style>
+          <a:lnRef idx="1">
+            <a:schemeClr val="accent1"/>
+          </a:lnRef>
+          <a:fillRef idx="3">
+            <a:schemeClr val="accent1"/>
+          </a:fillRef>
+          <a:effectRef idx="2">
+            <a:schemeClr val="accent1"/>
+          </a:effectRef>
+          <a:fontRef idx="minor">
+            <a:schemeClr val="lt1"/>
+          </a:fontRef>
+        </p:style>
+        <p:txBody>
+          <a:bodyPr rtlCol="0" anchor="ctr" wrap="square" lIns="182880" tIns="164592" rIns="182880" bIns="164592"/>
+          <a:lstStyle/>
+          <a:p>
+            <a:pPr algn="ctr">
+              <a:defRPr sz="1300" b="1">
+                <a:solidFill>
+                  <a:srgbClr val="0F172A"/>
+                </a:solidFill>
+              </a:defRPr>
+            </a:pPr>
+            <a:r>
+              <a:t>SaaS Pricing Tiers</a:t>
+            </a:r>
+          </a:p>
+          <a:p>
+            <a:pPr>
+              <a:spcAft>
+                <a:spcPts val="300"/>
+              </a:spcAft>
+              <a:defRPr sz="900" b="1">
+                <a:solidFill>
+                  <a:srgbClr val="10B981"/>
+                </a:solidFill>
+              </a:defRPr>
+            </a:pPr>
+            <a:r>
+              <a:t>[SUBSCRIPTION TIERS]</a:t>
+            </a:r>
+          </a:p>
+          <a:p>
+            <a:pPr>
+              <a:spcAft>
+                <a:spcPts val="200"/>
+              </a:spcAft>
+              <a:defRPr sz="1000">
+                <a:solidFill>
+                  <a:srgbClr val="64748B"/>
+                </a:solidFill>
+              </a:defRPr>
+            </a:pPr>
+            <a:r>
+              <a:t>• Starter ($29/mo): Urdu-to-English listings, Alibaba &amp; Amazon formatting, quality scoring.</a:t>
+            </a:r>
+          </a:p>
+          <a:p>
+            <a:pPr>
+              <a:spcAft>
+                <a:spcPts val="200"/>
+              </a:spcAft>
+              <a:defRPr sz="1000">
+                <a:solidFill>
+                  <a:srgbClr val="64748B"/>
+                </a:solidFill>
+              </a:defRPr>
+            </a:pPr>
+            <a:r>
+              <a:t>• Pro ($49/mo): Everything in Starter + Market pricing intelligence + Payment optimizer.</a:t>
+            </a:r>
+          </a:p>
+          <a:p>
+            <a:pPr>
+              <a:spcAft>
+                <a:spcPts val="200"/>
+              </a:spcAft>
+              <a:defRPr sz="1000">
+                <a:solidFill>
+                  <a:srgbClr val="64748B"/>
+                </a:solidFill>
+              </a:defRPr>
+            </a:pPr>
+            <a:r>
+              <a:t>• Business ($99/mo): Everything in Pro + Buyer reply agent + FBR tax reports + Priority dispatch.</a:t>
+            </a:r>
+          </a:p>
+          <a:p>
+            <a:pPr>
+              <a:spcAft>
+                <a:spcPts val="200"/>
+              </a:spcAft>
+              <a:defRPr sz="1000">
+                <a:solidFill>
+                  <a:srgbClr val="64748B"/>
+                </a:solidFill>
+              </a:defRPr>
+            </a:pPr>
+            <a:r>
+              <a:t>• Path to $1M ARR: 100 paid users by Month 6 ($5k/mo); 1,000+ paid users by Month 12 ($50k+/mo).</a:t>
+            </a:r>
+          </a:p>
+        </p:txBody>
+      </p:sp>
+      <p:sp>
+        <p:nvSpPr>
+          <p:cNvPr id="7" name="Rounded Rectangle 6"/>
+          <p:cNvSpPr/>
+          <p:nvPr/>
+        </p:nvSpPr>
+        <p:spPr>
+          <a:xfrm>
+            <a:off x="4389120" y="1280160"/>
+            <a:ext cx="6949440" cy="4937760"/>
           </a:xfrm>
           <a:prstGeom prst="roundRect">
             <a:avLst/>
@@ -5494,24 +5226,24 @@
           </a:fontRef>
         </p:style>
         <p:txBody>
-          <a:bodyPr rtlCol="0" anchor="ctr" wrap="square" lIns="228600" tIns="182880" rIns="228600" bIns="182880"/>
+          <a:bodyPr rtlCol="0" anchor="ctr" wrap="square" lIns="182880" tIns="164592" rIns="182880" bIns="164592"/>
           <a:lstStyle/>
           <a:p>
             <a:pPr algn="ctr">
-              <a:defRPr sz="1400" b="1">
+              <a:defRPr sz="1300" b="1">
                 <a:solidFill>
                   <a:srgbClr val="0F172A"/>
                 </a:solidFill>
               </a:defRPr>
             </a:pPr>
             <a:r>
-              <a:t>Official Submission Requirements</a:t>
-            </a:r>
-          </a:p>
-          <a:p>
-            <a:pPr>
-              <a:spcAft>
-                <a:spcPts val="400"/>
+              <a:t>12-Month Execution Roadmap</a:t>
+            </a:r>
+          </a:p>
+          <a:p>
+            <a:pPr>
+              <a:spcAft>
+                <a:spcPts val="300"/>
               </a:spcAft>
               <a:defRPr sz="900" b="1">
                 <a:solidFill>
@@ -5520,226 +5252,82 @@
               </a:defRPr>
             </a:pPr>
             <a:r>
-              <a:t>[100% READY FOR JUDGING]</a:t>
-            </a:r>
-          </a:p>
-          <a:p>
-            <a:pPr>
-              <a:spcAft>
-                <a:spcPts val="300"/>
-              </a:spcAft>
-              <a:defRPr sz="1100">
+              <a:t>[5-PHASE STAGED EXECUTION]</a:t>
+            </a:r>
+          </a:p>
+          <a:p>
+            <a:pPr>
+              <a:spcAft>
+                <a:spcPts val="200"/>
+              </a:spcAft>
+              <a:defRPr sz="1000">
                 <a:solidFill>
                   <a:srgbClr val="64748B"/>
                 </a:solidFill>
               </a:defRPr>
             </a:pPr>
             <a:r>
-              <a:t>• [DONE] Working Product Link: Live FastAPI server on localhost:8000.</a:t>
-            </a:r>
-          </a:p>
-          <a:p>
-            <a:pPr>
-              <a:spcAft>
-                <a:spcPts val="300"/>
-              </a:spcAft>
-              <a:defRPr sz="1100">
+              <a:t>• Phase 1 (Day 1 - Month 1) [Hackathon MVP]: Working demo, 10 exporter interviews in Sialkot, apply for Alibaba &amp; Amazon developer accounts.</a:t>
+            </a:r>
+          </a:p>
+          <a:p>
+            <a:pPr>
+              <a:spcAft>
+                <a:spcPts val="200"/>
+              </a:spcAft>
+              <a:defRPr sz="1000">
                 <a:solidFill>
                   <a:srgbClr val="64748B"/>
                 </a:solidFill>
               </a:defRPr>
             </a:pPr>
             <a:r>
-              <a:t>• [DONE] Recorded Demo Video: Scripted for 3-minute pitch (cues provided).</a:t>
-            </a:r>
-          </a:p>
-          <a:p>
-            <a:pPr>
-              <a:spcAft>
-                <a:spcPts val="300"/>
-              </a:spcAft>
-              <a:defRPr sz="1100">
+              <a:t>• Phase 2 (Months 2 - 3) [Official APIs]: Live OAuth2 marketplace connectors, real-time Alibaba RFQ &amp; Amazon SP-API feeds, free beta with 50 exporters.</a:t>
+            </a:r>
+          </a:p>
+          <a:p>
+            <a:pPr>
+              <a:spcAft>
+                <a:spcPts val="200"/>
+              </a:spcAft>
+              <a:defRPr sz="1000">
                 <a:solidFill>
                   <a:srgbClr val="64748B"/>
                 </a:solidFill>
               </a:defRPr>
             </a:pPr>
             <a:r>
-              <a:t>• [DONE] Written Description: Executive summary, problem, solution, architecture.</a:t>
-            </a:r>
-          </a:p>
-          <a:p>
-            <a:pPr>
-              <a:spcAft>
-                <a:spcPts val="300"/>
-              </a:spcAft>
-              <a:defRPr sz="1100">
+              <a:t>• Phase 3 (Months 4 - 6) [Monetization]: Stripe &amp; Safepay billing live, payment optimizer, tax module launch, target: 100 paying customers ($5k/mo).</a:t>
+            </a:r>
+          </a:p>
+          <a:p>
+            <a:pPr>
+              <a:spcAft>
+                <a:spcPts val="200"/>
+              </a:spcAft>
+              <a:defRPr sz="1000">
                 <a:solidFill>
                   <a:srgbClr val="64748B"/>
                 </a:solidFill>
               </a:defRPr>
             </a:pPr>
             <a:r>
-              <a:t>• [DONE] GitHub Repository: Clean Git commit history, clear license.</a:t>
-            </a:r>
-          </a:p>
-          <a:p>
-            <a:pPr>
-              <a:spcAft>
-                <a:spcPts val="300"/>
-              </a:spcAft>
-              <a:defRPr sz="1100">
+              <a:t>• Phase 4 (Months 7 - 9) [Scaling]: Buyer auto-reply agent, mobile app for factory managers, regional expansion to Bangladesh &amp; Sri Lanka.</a:t>
+            </a:r>
+          </a:p>
+          <a:p>
+            <a:pPr>
+              <a:spcAft>
+                <a:spcPts val="200"/>
+              </a:spcAft>
+              <a:defRPr sz="1000">
                 <a:solidFill>
                   <a:srgbClr val="64748B"/>
                 </a:solidFill>
               </a:defRPr>
             </a:pPr>
             <a:r>
-              <a:t>• [DONE] Professional README: Tech stack, setup steps, methodology, team roles.</a:t>
-            </a:r>
-          </a:p>
-          <a:p>
-            <a:pPr>
-              <a:spcAft>
-                <a:spcPts val="300"/>
-              </a:spcAft>
-              <a:defRPr sz="1100">
-                <a:solidFill>
-                  <a:srgbClr val="64748B"/>
-                </a:solidFill>
-              </a:defRPr>
-            </a:pPr>
-            <a:r>
-              <a:t>• [DONE] Live Mock Marketplaces: Authentic Alibaba &amp; Amazon pages.</a:t>
-            </a:r>
-          </a:p>
-        </p:txBody>
-      </p:sp>
-      <p:sp>
-        <p:nvSpPr>
-          <p:cNvPr id="7" name="Rounded Rectangle 6"/>
-          <p:cNvSpPr/>
-          <p:nvPr/>
-        </p:nvSpPr>
-        <p:spPr>
-          <a:xfrm>
-            <a:off x="6217920" y="1371600"/>
-            <a:ext cx="5120640" cy="4754880"/>
-          </a:xfrm>
-          <a:prstGeom prst="roundRect">
-            <a:avLst/>
-          </a:prstGeom>
-          <a:solidFill>
-            <a:srgbClr val="FFFFFF"/>
-          </a:solidFill>
-          <a:ln w="19050">
-            <a:solidFill>
-              <a:srgbClr val="F59E0B"/>
-            </a:solidFill>
-          </a:ln>
-        </p:spPr>
-        <p:style>
-          <a:lnRef idx="1">
-            <a:schemeClr val="accent1"/>
-          </a:lnRef>
-          <a:fillRef idx="3">
-            <a:schemeClr val="accent1"/>
-          </a:fillRef>
-          <a:effectRef idx="2">
-            <a:schemeClr val="accent1"/>
-          </a:effectRef>
-          <a:fontRef idx="minor">
-            <a:schemeClr val="lt1"/>
-          </a:fontRef>
-        </p:style>
-        <p:txBody>
-          <a:bodyPr rtlCol="0" anchor="ctr" wrap="square" lIns="228600" tIns="182880" rIns="228600" bIns="182880"/>
-          <a:lstStyle/>
-          <a:p>
-            <a:pPr algn="ctr">
-              <a:defRPr sz="1400" b="1">
-                <a:solidFill>
-                  <a:srgbClr val="0F172A"/>
-                </a:solidFill>
-              </a:defRPr>
-            </a:pPr>
-            <a:r>
-              <a:t>Judging Criteria Alignment (100%)</a:t>
-            </a:r>
-          </a:p>
-          <a:p>
-            <a:pPr>
-              <a:spcAft>
-                <a:spcPts val="400"/>
-              </a:spcAft>
-              <a:defRPr sz="900" b="1">
-                <a:solidFill>
-                  <a:srgbClr val="10B981"/>
-                </a:solidFill>
-              </a:defRPr>
-            </a:pPr>
-            <a:r>
-              <a:t>[MAXIMUM SCORING STRATEGY]</a:t>
-            </a:r>
-          </a:p>
-          <a:p>
-            <a:pPr>
-              <a:spcAft>
-                <a:spcPts val="300"/>
-              </a:spcAft>
-              <a:defRPr sz="1100">
-                <a:solidFill>
-                  <a:srgbClr val="64748B"/>
-                </a:solidFill>
-              </a:defRPr>
-            </a:pPr>
-            <a:r>
-              <a:t>• Innovation (25%): Urdu-first voice/text NLP, slot filling, RAG generation, quality scoring loop.</a:t>
-            </a:r>
-          </a:p>
-          <a:p>
-            <a:pPr>
-              <a:spcAft>
-                <a:spcPts val="300"/>
-              </a:spcAft>
-              <a:defRPr sz="1100">
-                <a:solidFill>
-                  <a:srgbClr val="64748B"/>
-                </a:solidFill>
-              </a:defRPr>
-            </a:pPr>
-            <a:r>
-              <a:t>• Impact (25%): Directly addresses Pakistan's $30B+ export cluster language barrier.</a:t>
-            </a:r>
-          </a:p>
-          <a:p>
-            <a:pPr>
-              <a:spcAft>
-                <a:spcPts val="300"/>
-              </a:spcAft>
-              <a:defRPr sz="1100">
-                <a:solidFill>
-                  <a:srgbClr val="64748B"/>
-                </a:solidFill>
-              </a:defRPr>
-            </a:pPr>
-            <a:r>
-              <a:t>• Feasibility (25%): Working MVP with zero paid API blockers; honest limitations and 12-month plan.</a:t>
-            </a:r>
-          </a:p>
-          <a:p>
-            <a:pPr>
-              <a:spcAft>
-                <a:spcPts val="300"/>
-              </a:spcAft>
-              <a:defRPr sz="1100">
-                <a:solidFill>
-                  <a:srgbClr val="64748B"/>
-                </a:solidFill>
-              </a:defRPr>
-            </a:pPr>
-            <a:r>
-              <a:t>• Presentation (25%): Structured 3-min pitch, complete deck, diagrams, and live demo.</a:t>
+              <a:t>• Phase 5 (Months 10 - 12) [Market Leader]: 100-SKU bulk catalog importer, automated competitor price tracking alerts, factory direct sales team.</a:t>
             </a:r>
           </a:p>
         </p:txBody>
@@ -5771,7 +5359,7 @@
         <p:spPr>
           <a:xfrm>
             <a:off x="0" y="0"/>
-            <a:ext cx="12191695" cy="6858000"/>
+            <a:ext cx="12191695" cy="1005840"/>
           </a:xfrm>
           <a:prstGeom prst="rect">
             <a:avLst/>
@@ -5815,8 +5403,8 @@
         </p:nvSpPr>
         <p:spPr>
           <a:xfrm>
-            <a:off x="1097280" y="1645920"/>
-            <a:ext cx="10058400" cy="4114800"/>
+            <a:off x="731520" y="109728"/>
+            <a:ext cx="7315200" cy="274320"/>
           </a:xfrm>
           <a:prstGeom prst="rect">
             <a:avLst/>
@@ -5824,71 +5412,460 @@
           <a:noFill/>
         </p:spPr>
         <p:txBody>
-          <a:bodyPr wrap="square">
+          <a:bodyPr wrap="none">
             <a:spAutoFit/>
           </a:bodyPr>
           <a:lstStyle/>
           <a:p>
             <a:pPr>
-              <a:defRPr sz="4000" b="1">
+              <a:defRPr sz="1000" b="1">
+                <a:solidFill>
+                  <a:srgbClr val="0284C7"/>
+                </a:solidFill>
+              </a:defRPr>
+            </a:pPr>
+            <a:r>
+              <a:t>CORETECH INNOVATION | NLP HACKATHON 2026</a:t>
+            </a:r>
+          </a:p>
+        </p:txBody>
+      </p:sp>
+      <p:sp>
+        <p:nvSpPr>
+          <p:cNvPr id="4" name="TextBox 3"/>
+          <p:cNvSpPr txBox="1"/>
+          <p:nvPr/>
+        </p:nvSpPr>
+        <p:spPr>
+          <a:xfrm>
+            <a:off x="731520" y="347472"/>
+            <a:ext cx="9144000" cy="502920"/>
+          </a:xfrm>
+          <a:prstGeom prst="rect">
+            <a:avLst/>
+          </a:prstGeom>
+          <a:noFill/>
+        </p:spPr>
+        <p:txBody>
+          <a:bodyPr wrap="none">
+            <a:spAutoFit/>
+          </a:bodyPr>
+          <a:lstStyle/>
+          <a:p>
+            <a:pPr>
+              <a:defRPr sz="2000" b="1">
                 <a:solidFill>
                   <a:srgbClr val="FFFFFF"/>
                 </a:solidFill>
               </a:defRPr>
             </a:pPr>
             <a:r>
-              <a:t>AI Export Manager</a:t>
-            </a:r>
-          </a:p>
-          <a:p>
-            <a:pPr>
-              <a:spcAft>
-                <a:spcPts val="2000"/>
-              </a:spcAft>
-              <a:defRPr sz="1800">
-                <a:solidFill>
-                  <a:srgbClr val="F59E0B"/>
-                </a:solidFill>
-              </a:defRPr>
-            </a:pPr>
-            <a:r>
-              <a:t>Thank You Judges &amp; Mentors — Ready for Live Demonstration &amp; Q&amp;A</a:t>
-            </a:r>
-          </a:p>
-          <a:p>
-            <a:pPr>
-              <a:defRPr sz="1400">
+              <a:t>Team CoreTech Innovation &amp; Shared Responsibilities</a:t>
+            </a:r>
+          </a:p>
+        </p:txBody>
+      </p:sp>
+      <p:sp>
+        <p:nvSpPr>
+          <p:cNvPr id="5" name="TextBox 4"/>
+          <p:cNvSpPr txBox="1"/>
+          <p:nvPr/>
+        </p:nvSpPr>
+        <p:spPr>
+          <a:xfrm>
+            <a:off x="9326880" y="320040"/>
+            <a:ext cx="2377440" cy="365760"/>
+          </a:xfrm>
+          <a:prstGeom prst="rect">
+            <a:avLst/>
+          </a:prstGeom>
+          <a:noFill/>
+        </p:spPr>
+        <p:txBody>
+          <a:bodyPr wrap="none">
+            <a:spAutoFit/>
+          </a:bodyPr>
+          <a:lstStyle/>
+          <a:p>
+            <a:pPr>
+              <a:defRPr sz="900" b="1">
                 <a:solidFill>
                   <a:srgbClr val="10B981"/>
                 </a:solidFill>
               </a:defRPr>
             </a:pPr>
             <a:r>
-              <a:t>• Live Dashboard URL: http://127.0.0.1:8000</a:t>
-            </a:r>
-          </a:p>
-          <a:p>
-            <a:pPr>
-              <a:defRPr sz="1300">
-                <a:solidFill>
-                  <a:srgbClr val="FFFFFF"/>
-                </a:solidFill>
-              </a:defRPr>
-            </a:pPr>
-            <a:r>
-              <a:t>• CoreTech Innovation Team: Sufyan Arain, Shahzaib Sheikh, Sehar, Nimra, Zammad</a:t>
-            </a:r>
-          </a:p>
-          <a:p>
-            <a:pPr>
-              <a:defRPr sz="1100">
+              <a:t>DEMO: http://127.0.0.1:8000</a:t>
+            </a:r>
+          </a:p>
+        </p:txBody>
+      </p:sp>
+      <p:sp>
+        <p:nvSpPr>
+          <p:cNvPr id="6" name="Rounded Rectangle 5"/>
+          <p:cNvSpPr/>
+          <p:nvPr/>
+        </p:nvSpPr>
+        <p:spPr>
+          <a:xfrm>
+            <a:off x="731520" y="1280160"/>
+            <a:ext cx="10698480" cy="841248"/>
+          </a:xfrm>
+          <a:prstGeom prst="roundRect">
+            <a:avLst/>
+          </a:prstGeom>
+          <a:solidFill>
+            <a:srgbClr val="FFFFFF"/>
+          </a:solidFill>
+          <a:ln>
+            <a:solidFill>
+              <a:srgbClr val="0284C7"/>
+            </a:solidFill>
+          </a:ln>
+        </p:spPr>
+        <p:style>
+          <a:lnRef idx="1">
+            <a:schemeClr val="accent1"/>
+          </a:lnRef>
+          <a:fillRef idx="3">
+            <a:schemeClr val="accent1"/>
+          </a:fillRef>
+          <a:effectRef idx="2">
+            <a:schemeClr val="accent1"/>
+          </a:effectRef>
+          <a:fontRef idx="minor">
+            <a:schemeClr val="lt1"/>
+          </a:fontRef>
+        </p:style>
+        <p:txBody>
+          <a:bodyPr rtlCol="0" anchor="ctr"/>
+          <a:lstStyle/>
+          <a:p>
+            <a:pPr algn="ctr">
+              <a:defRPr b="1" sz="1300">
+                <a:solidFill>
+                  <a:srgbClr val="0F172A"/>
+                </a:solidFill>
+              </a:defRPr>
+            </a:pPr>
+            <a:r>
+              <a:t>Sufyan Arain </a:t>
+            </a:r>
+            <a:r>
+              <a:rPr b="1" sz="1100">
+                <a:solidFill>
+                  <a:srgbClr val="0284C7"/>
+                </a:solidFill>
+              </a:rPr>
+              <a:t>— TEAM LEAD</a:t>
+            </a:r>
+          </a:p>
+          <a:p>
+            <a:pPr>
+              <a:defRPr sz="1000">
                 <a:solidFill>
                   <a:srgbClr val="64748B"/>
                 </a:solidFill>
               </a:defRPr>
             </a:pPr>
             <a:r>
-              <a:t>• Project Location: C:\Users\n tech\.gemini\antigravity\scratch\ai-export-manager</a:t>
+              <a:t>Primary Contributions: Project architecture, integration, demo pitch, final submission delivery</a:t>
+            </a:r>
+          </a:p>
+        </p:txBody>
+      </p:sp>
+      <p:sp>
+        <p:nvSpPr>
+          <p:cNvPr id="7" name="Rounded Rectangle 6"/>
+          <p:cNvSpPr/>
+          <p:nvPr/>
+        </p:nvSpPr>
+        <p:spPr>
+          <a:xfrm>
+            <a:off x="731520" y="2240280"/>
+            <a:ext cx="10698480" cy="841248"/>
+          </a:xfrm>
+          <a:prstGeom prst="roundRect">
+            <a:avLst/>
+          </a:prstGeom>
+          <a:solidFill>
+            <a:srgbClr val="FFFFFF"/>
+          </a:solidFill>
+          <a:ln>
+            <a:solidFill>
+              <a:srgbClr val="0284C7"/>
+            </a:solidFill>
+          </a:ln>
+        </p:spPr>
+        <p:style>
+          <a:lnRef idx="1">
+            <a:schemeClr val="accent1"/>
+          </a:lnRef>
+          <a:fillRef idx="3">
+            <a:schemeClr val="accent1"/>
+          </a:fillRef>
+          <a:effectRef idx="2">
+            <a:schemeClr val="accent1"/>
+          </a:effectRef>
+          <a:fontRef idx="minor">
+            <a:schemeClr val="lt1"/>
+          </a:fontRef>
+        </p:style>
+        <p:txBody>
+          <a:bodyPr rtlCol="0" anchor="ctr"/>
+          <a:lstStyle/>
+          <a:p>
+            <a:pPr algn="ctr">
+              <a:defRPr b="1" sz="1300">
+                <a:solidFill>
+                  <a:srgbClr val="0F172A"/>
+                </a:solidFill>
+              </a:defRPr>
+            </a:pPr>
+            <a:r>
+              <a:t>Shahzaib Sheikh </a:t>
+            </a:r>
+            <a:r>
+              <a:rPr b="1" sz="1100">
+                <a:solidFill>
+                  <a:srgbClr val="0284C7"/>
+                </a:solidFill>
+              </a:rPr>
+              <a:t>— BACKEND DEVELOPER</a:t>
+            </a:r>
+          </a:p>
+          <a:p>
+            <a:pPr>
+              <a:defRPr sz="1000">
+                <a:solidFill>
+                  <a:srgbClr val="64748B"/>
+                </a:solidFill>
+              </a:defRPr>
+            </a:pPr>
+            <a:r>
+              <a:t>Primary Contributions: FastAPI microservices, mock marketplace APIs, SQLite database schema</a:t>
+            </a:r>
+          </a:p>
+        </p:txBody>
+      </p:sp>
+      <p:sp>
+        <p:nvSpPr>
+          <p:cNvPr id="8" name="Rounded Rectangle 7"/>
+          <p:cNvSpPr/>
+          <p:nvPr/>
+        </p:nvSpPr>
+        <p:spPr>
+          <a:xfrm>
+            <a:off x="731520" y="3200400"/>
+            <a:ext cx="10698480" cy="841248"/>
+          </a:xfrm>
+          <a:prstGeom prst="roundRect">
+            <a:avLst/>
+          </a:prstGeom>
+          <a:solidFill>
+            <a:srgbClr val="FFFFFF"/>
+          </a:solidFill>
+          <a:ln>
+            <a:solidFill>
+              <a:srgbClr val="0284C7"/>
+            </a:solidFill>
+          </a:ln>
+        </p:spPr>
+        <p:style>
+          <a:lnRef idx="1">
+            <a:schemeClr val="accent1"/>
+          </a:lnRef>
+          <a:fillRef idx="3">
+            <a:schemeClr val="accent1"/>
+          </a:fillRef>
+          <a:effectRef idx="2">
+            <a:schemeClr val="accent1"/>
+          </a:effectRef>
+          <a:fontRef idx="minor">
+            <a:schemeClr val="lt1"/>
+          </a:fontRef>
+        </p:style>
+        <p:txBody>
+          <a:bodyPr rtlCol="0" anchor="ctr"/>
+          <a:lstStyle/>
+          <a:p>
+            <a:pPr algn="ctr">
+              <a:defRPr b="1" sz="1300">
+                <a:solidFill>
+                  <a:srgbClr val="0F172A"/>
+                </a:solidFill>
+              </a:defRPr>
+            </a:pPr>
+            <a:r>
+              <a:t>Sehar </a:t>
+            </a:r>
+            <a:r>
+              <a:rPr b="1" sz="1100">
+                <a:solidFill>
+                  <a:srgbClr val="0284C7"/>
+                </a:solidFill>
+              </a:rPr>
+              <a:t>— AI / ML ENGINEER</a:t>
+            </a:r>
+          </a:p>
+          <a:p>
+            <a:pPr>
+              <a:defRPr sz="1000">
+                <a:solidFill>
+                  <a:srgbClr val="64748B"/>
+                </a:solidFill>
+              </a:defRPr>
+            </a:pPr>
+            <a:r>
+              <a:t>Primary Contributions: NLP pipeline, prompt engineering, rubric scoring engine, RAG store</a:t>
+            </a:r>
+          </a:p>
+        </p:txBody>
+      </p:sp>
+      <p:sp>
+        <p:nvSpPr>
+          <p:cNvPr id="9" name="Rounded Rectangle 8"/>
+          <p:cNvSpPr/>
+          <p:nvPr/>
+        </p:nvSpPr>
+        <p:spPr>
+          <a:xfrm>
+            <a:off x="731520" y="4160520"/>
+            <a:ext cx="10698480" cy="841248"/>
+          </a:xfrm>
+          <a:prstGeom prst="roundRect">
+            <a:avLst/>
+          </a:prstGeom>
+          <a:solidFill>
+            <a:srgbClr val="FFFFFF"/>
+          </a:solidFill>
+          <a:ln>
+            <a:solidFill>
+              <a:srgbClr val="0284C7"/>
+            </a:solidFill>
+          </a:ln>
+        </p:spPr>
+        <p:style>
+          <a:lnRef idx="1">
+            <a:schemeClr val="accent1"/>
+          </a:lnRef>
+          <a:fillRef idx="3">
+            <a:schemeClr val="accent1"/>
+          </a:fillRef>
+          <a:effectRef idx="2">
+            <a:schemeClr val="accent1"/>
+          </a:effectRef>
+          <a:fontRef idx="minor">
+            <a:schemeClr val="lt1"/>
+          </a:fontRef>
+        </p:style>
+        <p:txBody>
+          <a:bodyPr rtlCol="0" anchor="ctr"/>
+          <a:lstStyle/>
+          <a:p>
+            <a:pPr algn="ctr">
+              <a:defRPr b="1" sz="1300">
+                <a:solidFill>
+                  <a:srgbClr val="0F172A"/>
+                </a:solidFill>
+              </a:defRPr>
+            </a:pPr>
+            <a:r>
+              <a:t>Nimra </a:t>
+            </a:r>
+            <a:r>
+              <a:rPr b="1" sz="1100">
+                <a:solidFill>
+                  <a:srgbClr val="0284C7"/>
+                </a:solidFill>
+              </a:rPr>
+              <a:t>— UI / UX DESIGNER &amp; FRONTEND</a:t>
+            </a:r>
+          </a:p>
+          <a:p>
+            <a:pPr>
+              <a:defRPr sz="1000">
+                <a:solidFill>
+                  <a:srgbClr val="64748B"/>
+                </a:solidFill>
+              </a:defRPr>
+            </a:pPr>
+            <a:r>
+              <a:t>Primary Contributions: Responsive dashboard layout, Noto Nastaliq Urdu styling, live preview pages</a:t>
+            </a:r>
+          </a:p>
+        </p:txBody>
+      </p:sp>
+      <p:sp>
+        <p:nvSpPr>
+          <p:cNvPr id="10" name="Rounded Rectangle 9"/>
+          <p:cNvSpPr/>
+          <p:nvPr/>
+        </p:nvSpPr>
+        <p:spPr>
+          <a:xfrm>
+            <a:off x="731520" y="5120640"/>
+            <a:ext cx="10698480" cy="841248"/>
+          </a:xfrm>
+          <a:prstGeom prst="roundRect">
+            <a:avLst/>
+          </a:prstGeom>
+          <a:solidFill>
+            <a:srgbClr val="FFFFFF"/>
+          </a:solidFill>
+          <a:ln>
+            <a:solidFill>
+              <a:srgbClr val="0284C7"/>
+            </a:solidFill>
+          </a:ln>
+        </p:spPr>
+        <p:style>
+          <a:lnRef idx="1">
+            <a:schemeClr val="accent1"/>
+          </a:lnRef>
+          <a:fillRef idx="3">
+            <a:schemeClr val="accent1"/>
+          </a:fillRef>
+          <a:effectRef idx="2">
+            <a:schemeClr val="accent1"/>
+          </a:effectRef>
+          <a:fontRef idx="minor">
+            <a:schemeClr val="lt1"/>
+          </a:fontRef>
+        </p:style>
+        <p:txBody>
+          <a:bodyPr rtlCol="0" anchor="ctr"/>
+          <a:lstStyle/>
+          <a:p>
+            <a:pPr algn="ctr">
+              <a:defRPr b="1" sz="1300">
+                <a:solidFill>
+                  <a:srgbClr val="0F172A"/>
+                </a:solidFill>
+              </a:defRPr>
+            </a:pPr>
+            <a:r>
+              <a:t>Zammad </a:t>
+            </a:r>
+            <a:r>
+              <a:rPr b="1" sz="1100">
+                <a:solidFill>
+                  <a:srgbClr val="0284C7"/>
+                </a:solidFill>
+              </a:rPr>
+              <a:t>— RESEARCHER &amp; DOCUMENTATION</a:t>
+            </a:r>
+          </a:p>
+          <a:p>
+            <a:pPr>
+              <a:defRPr sz="1000">
+                <a:solidFill>
+                  <a:srgbClr val="64748B"/>
+                </a:solidFill>
+              </a:defRPr>
+            </a:pPr>
+            <a:r>
+              <a:t>Primary Contributions: Sialkot/Faisalabad export pain points, test datasets, README &amp; pitch script</a:t>
             </a:r>
           </a:p>
         </p:txBody>
@@ -5964,43 +5941,8 @@
         </p:nvSpPr>
         <p:spPr>
           <a:xfrm>
-            <a:off x="731520" y="137160"/>
+            <a:off x="731520" y="109728"/>
             <a:ext cx="7315200" cy="274320"/>
-          </a:xfrm>
-          <a:prstGeom prst="rect">
-            <a:avLst/>
-          </a:prstGeom>
-          <a:noFill/>
-        </p:spPr>
-        <p:txBody>
-          <a:bodyPr wrap="square">
-            <a:spAutoFit/>
-          </a:bodyPr>
-          <a:lstStyle/>
-          <a:p>
-            <a:pPr>
-              <a:defRPr sz="1000" b="1">
-                <a:solidFill>
-                  <a:srgbClr val="0284C7"/>
-                </a:solidFill>
-              </a:defRPr>
-            </a:pPr>
-            <a:r>
-              <a:t>CORETECH INNOVATION | NLP HACKATHON 2026</a:t>
-            </a:r>
-          </a:p>
-        </p:txBody>
-      </p:sp>
-      <p:sp>
-        <p:nvSpPr>
-          <p:cNvPr id="4" name="TextBox 3"/>
-          <p:cNvSpPr txBox="1"/>
-          <p:nvPr/>
-        </p:nvSpPr>
-        <p:spPr>
-          <a:xfrm>
-            <a:off x="731520" y="365760"/>
-            <a:ext cx="9144000" cy="502920"/>
           </a:xfrm>
           <a:prstGeom prst="rect">
             <a:avLst/>
@@ -6014,28 +5956,28 @@
           <a:lstStyle/>
           <a:p>
             <a:pPr>
-              <a:defRPr sz="2000" b="1">
-                <a:solidFill>
-                  <a:srgbClr val="FFFFFF"/>
-                </a:solidFill>
-              </a:defRPr>
-            </a:pPr>
-            <a:r>
-              <a:t>Problem Statement: The Exporter Language &amp; Know-How Barrier</a:t>
-            </a:r>
-          </a:p>
-        </p:txBody>
-      </p:sp>
-      <p:sp>
-        <p:nvSpPr>
-          <p:cNvPr id="5" name="TextBox 4"/>
+              <a:defRPr sz="1000" b="1">
+                <a:solidFill>
+                  <a:srgbClr val="0284C7"/>
+                </a:solidFill>
+              </a:defRPr>
+            </a:pPr>
+            <a:r>
+              <a:t>CORETECH INNOVATION | NLP HACKATHON 2026</a:t>
+            </a:r>
+          </a:p>
+        </p:txBody>
+      </p:sp>
+      <p:sp>
+        <p:nvSpPr>
+          <p:cNvPr id="4" name="TextBox 3"/>
           <p:cNvSpPr txBox="1"/>
           <p:nvPr/>
         </p:nvSpPr>
         <p:spPr>
           <a:xfrm>
-            <a:off x="9601200" y="320040"/>
-            <a:ext cx="2011680" cy="365760"/>
+            <a:off x="731520" y="347472"/>
+            <a:ext cx="9144000" cy="502920"/>
           </a:xfrm>
           <a:prstGeom prst="rect">
             <a:avLst/>
@@ -6049,6 +5991,41 @@
           <a:lstStyle/>
           <a:p>
             <a:pPr>
+              <a:defRPr sz="2000" b="1">
+                <a:solidFill>
+                  <a:srgbClr val="FFFFFF"/>
+                </a:solidFill>
+              </a:defRPr>
+            </a:pPr>
+            <a:r>
+              <a:t>Problem Statement: The Exporter Language &amp; Know-How Barrier</a:t>
+            </a:r>
+          </a:p>
+        </p:txBody>
+      </p:sp>
+      <p:sp>
+        <p:nvSpPr>
+          <p:cNvPr id="5" name="TextBox 4"/>
+          <p:cNvSpPr txBox="1"/>
+          <p:nvPr/>
+        </p:nvSpPr>
+        <p:spPr>
+          <a:xfrm>
+            <a:off x="9326880" y="320040"/>
+            <a:ext cx="2377440" cy="365760"/>
+          </a:xfrm>
+          <a:prstGeom prst="rect">
+            <a:avLst/>
+          </a:prstGeom>
+          <a:noFill/>
+        </p:spPr>
+        <p:txBody>
+          <a:bodyPr wrap="none">
+            <a:spAutoFit/>
+          </a:bodyPr>
+          <a:lstStyle/>
+          <a:p>
+            <a:pPr>
               <a:defRPr sz="900" b="1">
                 <a:solidFill>
                   <a:srgbClr val="10B981"/>
@@ -6069,8 +6046,8 @@
         </p:nvSpPr>
         <p:spPr>
           <a:xfrm>
-            <a:off x="731520" y="1371600"/>
-            <a:ext cx="3291840" cy="4754880"/>
+            <a:off x="731520" y="1280160"/>
+            <a:ext cx="3291840" cy="4937760"/>
           </a:xfrm>
           <a:prstGeom prst="roundRect">
             <a:avLst/>
@@ -6099,11 +6076,11 @@
           </a:fontRef>
         </p:style>
         <p:txBody>
-          <a:bodyPr rtlCol="0" anchor="ctr" wrap="square" lIns="228600" tIns="182880" rIns="228600" bIns="182880"/>
+          <a:bodyPr rtlCol="0" anchor="ctr" wrap="square" lIns="182880" tIns="164592" rIns="182880" bIns="164592"/>
           <a:lstStyle/>
           <a:p>
             <a:pPr algn="ctr">
-              <a:defRPr sz="1400" b="1">
+              <a:defRPr sz="1300" b="1">
                 <a:solidFill>
                   <a:srgbClr val="0F172A"/>
                 </a:solidFill>
@@ -6116,7 +6093,7 @@
           <a:p>
             <a:pPr>
               <a:spcAft>
-                <a:spcPts val="400"/>
+                <a:spcPts val="300"/>
               </a:spcAft>
               <a:defRPr sz="900" b="1">
                 <a:solidFill>
@@ -6131,46 +6108,46 @@
           <a:p>
             <a:pPr>
               <a:spcAft>
-                <a:spcPts val="300"/>
-              </a:spcAft>
-              <a:defRPr sz="1100">
+                <a:spcPts val="200"/>
+              </a:spcAft>
+              <a:defRPr sz="1000">
                 <a:solidFill>
                   <a:srgbClr val="64748B"/>
                 </a:solidFill>
               </a:defRPr>
             </a:pPr>
             <a:r>
-              <a:t>• Exporters in Sialkot (leather, surgical, sports) and Faisalabad (textiles) think, describe, and negotiate in Urdu / Roman Urdu.</a:t>
-            </a:r>
-          </a:p>
-          <a:p>
-            <a:pPr>
-              <a:spcAft>
-                <a:spcPts val="300"/>
-              </a:spcAft>
-              <a:defRPr sz="1100">
+              <a:t>• Pakistani manufacturers in Sialkot (leather, surgical, sports) and Faisalabad (textiles) think, sell, and negotiate in Urdu or Roman Urdu.</a:t>
+            </a:r>
+          </a:p>
+          <a:p>
+            <a:pPr>
+              <a:spcAft>
+                <a:spcPts val="200"/>
+              </a:spcAft>
+              <a:defRPr sz="1000">
                 <a:solidFill>
                   <a:srgbClr val="64748B"/>
                 </a:solidFill>
               </a:defRPr>
             </a:pPr>
             <a:r>
-              <a:t>• Global buyers on Alibaba &amp; Amazon search strictly in keyword-dense commercial English.</a:t>
-            </a:r>
-          </a:p>
-          <a:p>
-            <a:pPr>
-              <a:spcAft>
-                <a:spcPts val="300"/>
-              </a:spcAft>
-              <a:defRPr sz="1100">
+              <a:t>• Global buyers on Alibaba and Amazon search strictly in commercial, keyword-rich English.</a:t>
+            </a:r>
+          </a:p>
+          <a:p>
+            <a:pPr>
+              <a:spcAft>
+                <a:spcPts val="200"/>
+              </a:spcAft>
+              <a:defRPr sz="1000">
                 <a:solidFill>
                   <a:srgbClr val="64748B"/>
                 </a:solidFill>
               </a:defRPr>
             </a:pPr>
             <a:r>
-              <a:t>• Translators don't know export trade jargon; listings get lost.</a:t>
+              <a:t>• Traditional translators lack export trade terminology, resulting in lost ranking and buyer confusion.</a:t>
             </a:r>
           </a:p>
         </p:txBody>
@@ -6183,8 +6160,8 @@
         </p:nvSpPr>
         <p:spPr>
           <a:xfrm>
-            <a:off x="4389120" y="1371600"/>
-            <a:ext cx="3291840" cy="4754880"/>
+            <a:off x="4389120" y="1280160"/>
+            <a:ext cx="3291840" cy="4937760"/>
           </a:xfrm>
           <a:prstGeom prst="roundRect">
             <a:avLst/>
@@ -6213,24 +6190,24 @@
           </a:fontRef>
         </p:style>
         <p:txBody>
-          <a:bodyPr rtlCol="0" anchor="ctr" wrap="square" lIns="228600" tIns="182880" rIns="228600" bIns="182880"/>
+          <a:bodyPr rtlCol="0" anchor="ctr" wrap="square" lIns="182880" tIns="164592" rIns="182880" bIns="164592"/>
           <a:lstStyle/>
           <a:p>
             <a:pPr algn="ctr">
-              <a:defRPr sz="1400" b="1">
+              <a:defRPr sz="1300" b="1">
                 <a:solidFill>
                   <a:srgbClr val="0F172A"/>
                 </a:solidFill>
               </a:defRPr>
             </a:pPr>
             <a:r>
-              <a:t>2. Listing Complexity</a:t>
-            </a:r>
-          </a:p>
-          <a:p>
-            <a:pPr>
-              <a:spcAft>
-                <a:spcPts val="400"/>
+              <a:t>2. Marketplace Complexity</a:t>
+            </a:r>
+          </a:p>
+          <a:p>
+            <a:pPr>
+              <a:spcAft>
+                <a:spcPts val="300"/>
               </a:spcAft>
               <a:defRPr sz="900" b="1">
                 <a:solidFill>
@@ -6245,46 +6222,46 @@
           <a:p>
             <a:pPr>
               <a:spcAft>
-                <a:spcPts val="300"/>
-              </a:spcAft>
-              <a:defRPr sz="1100">
+                <a:spcPts val="200"/>
+              </a:spcAft>
+              <a:defRPr sz="1000">
                 <a:solidFill>
                   <a:srgbClr val="64748B"/>
                 </a:solidFill>
               </a:defRPr>
             </a:pPr>
             <a:r>
-              <a:t>• Alibaba &amp; Amazon enforce rigid character limits, required bullet structures, and SEO rules.</a:t>
-            </a:r>
-          </a:p>
-          <a:p>
-            <a:pPr>
-              <a:spcAft>
-                <a:spcPts val="300"/>
-              </a:spcAft>
-              <a:defRPr sz="1100">
+              <a:t>• Alibaba &amp; Amazon enforce strict character limits, mandatory 5-bullet benefit structures, and backend SEO tags.</a:t>
+            </a:r>
+          </a:p>
+          <a:p>
+            <a:pPr>
+              <a:spcAft>
+                <a:spcPts val="200"/>
+              </a:spcAft>
+              <a:defRPr sz="1000">
                 <a:solidFill>
                   <a:srgbClr val="64748B"/>
                 </a:solidFill>
               </a:defRPr>
             </a:pPr>
             <a:r>
-              <a:t>• Exporters don't know how to write 5 buyer-focused benefit bullets or select 15 high-intent keywords.</a:t>
-            </a:r>
-          </a:p>
-          <a:p>
-            <a:pPr>
-              <a:spcAft>
-                <a:spcPts val="300"/>
-              </a:spcAft>
-              <a:defRPr sz="1100">
+              <a:t>• Exporters struggle to format titles, attributes, and search keywords for algorithmic visibility.</a:t>
+            </a:r>
+          </a:p>
+          <a:p>
+            <a:pPr>
+              <a:spcAft>
+                <a:spcPts val="200"/>
+              </a:spcAft>
+              <a:defRPr sz="1000">
                 <a:solidFill>
                   <a:srgbClr val="64748B"/>
                 </a:solidFill>
               </a:defRPr>
             </a:pPr>
             <a:r>
-              <a:t>• Manual copy-paste between external tools is slow, confusing, and error-prone.</a:t>
+              <a:t>• Manual copy-pasting between external tools is slow, confusing, and prone to costly compliance errors.</a:t>
             </a:r>
           </a:p>
         </p:txBody>
@@ -6297,8 +6274,8 @@
         </p:nvSpPr>
         <p:spPr>
           <a:xfrm>
-            <a:off x="8046720" y="1371600"/>
-            <a:ext cx="3291840" cy="4754880"/>
+            <a:off x="8046720" y="1280160"/>
+            <a:ext cx="3291840" cy="4937760"/>
           </a:xfrm>
           <a:prstGeom prst="roundRect">
             <a:avLst/>
@@ -6327,24 +6304,24 @@
           </a:fontRef>
         </p:style>
         <p:txBody>
-          <a:bodyPr rtlCol="0" anchor="ctr" wrap="square" lIns="228600" tIns="182880" rIns="228600" bIns="182880"/>
+          <a:bodyPr rtlCol="0" anchor="ctr" wrap="square" lIns="182880" tIns="164592" rIns="182880" bIns="164592"/>
           <a:lstStyle/>
           <a:p>
             <a:pPr algn="ctr">
-              <a:defRPr sz="1400" b="1">
+              <a:defRPr sz="1300" b="1">
                 <a:solidFill>
                   <a:srgbClr val="0F172A"/>
                 </a:solidFill>
               </a:defRPr>
             </a:pPr>
             <a:r>
-              <a:t>3. Pricing &amp; Regulatory Blindspots</a:t>
-            </a:r>
-          </a:p>
-          <a:p>
-            <a:pPr>
-              <a:spcAft>
-                <a:spcPts val="400"/>
+              <a:t>3. Pricing &amp; Compliance Blindspots</a:t>
+            </a:r>
+          </a:p>
+          <a:p>
+            <a:pPr>
+              <a:spcAft>
+                <a:spcPts val="300"/>
               </a:spcAft>
               <a:defRPr sz="900" b="1">
                 <a:solidFill>
@@ -6359,46 +6336,46 @@
           <a:p>
             <a:pPr>
               <a:spcAft>
-                <a:spcPts val="300"/>
-              </a:spcAft>
-              <a:defRPr sz="1100">
+                <a:spcPts val="200"/>
+              </a:spcAft>
+              <a:defRPr sz="1000">
                 <a:solidFill>
                   <a:srgbClr val="64748B"/>
                 </a:solidFill>
               </a:defRPr>
             </a:pPr>
             <a:r>
-              <a:t>• Exporters rarely know US/EU market willingness-to-pay; they frequently under-price by 20-30%.</a:t>
-            </a:r>
-          </a:p>
-          <a:p>
-            <a:pPr>
-              <a:spcAft>
-                <a:spcPts val="300"/>
-              </a:spcAft>
-              <a:defRPr sz="1100">
+              <a:t>• Exporters rarely know US and EU market willingness-to-pay and consistently under-price by 20% to 30%.</a:t>
+            </a:r>
+          </a:p>
+          <a:p>
+            <a:pPr>
+              <a:spcAft>
+                <a:spcPts val="200"/>
+              </a:spcAft>
+              <a:defRPr sz="1000">
                 <a:solidFill>
                   <a:srgbClr val="64748B"/>
                 </a:solidFill>
               </a:defRPr>
             </a:pPr>
             <a:r>
-              <a:t>• Choosing between Payoneer &amp; Wise by buyer country is confusing.</a:t>
-            </a:r>
-          </a:p>
-          <a:p>
-            <a:pPr>
-              <a:spcAft>
-                <a:spcPts val="300"/>
-              </a:spcAft>
-              <a:defRPr sz="1100">
+              <a:t>• Choosing between Payoneer and Wise for international payouts is confusing.</a:t>
+            </a:r>
+          </a:p>
+          <a:p>
+            <a:pPr>
+              <a:spcAft>
+                <a:spcPts val="200"/>
+              </a:spcAft>
+              <a:defRPr sz="1000">
                 <a:solidFill>
                   <a:srgbClr val="64748B"/>
                 </a:solidFill>
               </a:defRPr>
             </a:pPr>
             <a:r>
-              <a:t>• FBR 0.25% export tax regime &amp; PSEB e-PRC requirements are misunderstood.</a:t>
+              <a:t>• FBR 0.25% export tax regime and bank e-PRC requirements are hard to navigate.</a:t>
             </a:r>
           </a:p>
         </p:txBody>
@@ -6474,43 +6451,8 @@
         </p:nvSpPr>
         <p:spPr>
           <a:xfrm>
-            <a:off x="731520" y="137160"/>
+            <a:off x="731520" y="109728"/>
             <a:ext cx="7315200" cy="274320"/>
-          </a:xfrm>
-          <a:prstGeom prst="rect">
-            <a:avLst/>
-          </a:prstGeom>
-          <a:noFill/>
-        </p:spPr>
-        <p:txBody>
-          <a:bodyPr wrap="square">
-            <a:spAutoFit/>
-          </a:bodyPr>
-          <a:lstStyle/>
-          <a:p>
-            <a:pPr>
-              <a:defRPr sz="1000" b="1">
-                <a:solidFill>
-                  <a:srgbClr val="0284C7"/>
-                </a:solidFill>
-              </a:defRPr>
-            </a:pPr>
-            <a:r>
-              <a:t>CORETECH INNOVATION | NLP HACKATHON 2026</a:t>
-            </a:r>
-          </a:p>
-        </p:txBody>
-      </p:sp>
-      <p:sp>
-        <p:nvSpPr>
-          <p:cNvPr id="4" name="TextBox 3"/>
-          <p:cNvSpPr txBox="1"/>
-          <p:nvPr/>
-        </p:nvSpPr>
-        <p:spPr>
-          <a:xfrm>
-            <a:off x="731520" y="365760"/>
-            <a:ext cx="9144000" cy="502920"/>
           </a:xfrm>
           <a:prstGeom prst="rect">
             <a:avLst/>
@@ -6524,28 +6466,28 @@
           <a:lstStyle/>
           <a:p>
             <a:pPr>
-              <a:defRPr sz="2000" b="1">
-                <a:solidFill>
-                  <a:srgbClr val="FFFFFF"/>
-                </a:solidFill>
-              </a:defRPr>
-            </a:pPr>
-            <a:r>
-              <a:t>Proposed Solution: End-to-End AI Export Assistant</a:t>
-            </a:r>
-          </a:p>
-        </p:txBody>
-      </p:sp>
-      <p:sp>
-        <p:nvSpPr>
-          <p:cNvPr id="5" name="TextBox 4"/>
+              <a:defRPr sz="1000" b="1">
+                <a:solidFill>
+                  <a:srgbClr val="0284C7"/>
+                </a:solidFill>
+              </a:defRPr>
+            </a:pPr>
+            <a:r>
+              <a:t>CORETECH INNOVATION | NLP HACKATHON 2026</a:t>
+            </a:r>
+          </a:p>
+        </p:txBody>
+      </p:sp>
+      <p:sp>
+        <p:nvSpPr>
+          <p:cNvPr id="4" name="TextBox 3"/>
           <p:cNvSpPr txBox="1"/>
           <p:nvPr/>
         </p:nvSpPr>
         <p:spPr>
           <a:xfrm>
-            <a:off x="9601200" y="320040"/>
-            <a:ext cx="2011680" cy="365760"/>
+            <a:off x="731520" y="347472"/>
+            <a:ext cx="9144000" cy="502920"/>
           </a:xfrm>
           <a:prstGeom prst="rect">
             <a:avLst/>
@@ -6559,6 +6501,41 @@
           <a:lstStyle/>
           <a:p>
             <a:pPr>
+              <a:defRPr sz="2000" b="1">
+                <a:solidFill>
+                  <a:srgbClr val="FFFFFF"/>
+                </a:solidFill>
+              </a:defRPr>
+            </a:pPr>
+            <a:r>
+              <a:t>Proposed Solution: End-to-End AI Export Assistant</a:t>
+            </a:r>
+          </a:p>
+        </p:txBody>
+      </p:sp>
+      <p:sp>
+        <p:nvSpPr>
+          <p:cNvPr id="5" name="TextBox 4"/>
+          <p:cNvSpPr txBox="1"/>
+          <p:nvPr/>
+        </p:nvSpPr>
+        <p:spPr>
+          <a:xfrm>
+            <a:off x="9326880" y="320040"/>
+            <a:ext cx="2377440" cy="365760"/>
+          </a:xfrm>
+          <a:prstGeom prst="rect">
+            <a:avLst/>
+          </a:prstGeom>
+          <a:noFill/>
+        </p:spPr>
+        <p:txBody>
+          <a:bodyPr wrap="none">
+            <a:spAutoFit/>
+          </a:bodyPr>
+          <a:lstStyle/>
+          <a:p>
+            <a:pPr>
               <a:defRPr sz="900" b="1">
                 <a:solidFill>
                   <a:srgbClr val="10B981"/>
@@ -6579,8 +6556,8 @@
         </p:nvSpPr>
         <p:spPr>
           <a:xfrm>
-            <a:off x="731520" y="1371600"/>
-            <a:ext cx="5120640" cy="2286000"/>
+            <a:off x="731520" y="1280160"/>
+            <a:ext cx="5120640" cy="2377440"/>
           </a:xfrm>
           <a:prstGeom prst="roundRect">
             <a:avLst/>
@@ -6609,11 +6586,11 @@
           </a:fontRef>
         </p:style>
         <p:txBody>
-          <a:bodyPr rtlCol="0" anchor="ctr" wrap="square" lIns="228600" tIns="182880" rIns="228600" bIns="182880"/>
+          <a:bodyPr rtlCol="0" anchor="ctr" wrap="square" lIns="182880" tIns="164592" rIns="182880" bIns="164592"/>
           <a:lstStyle/>
           <a:p>
             <a:pPr algn="ctr">
-              <a:defRPr sz="1400" b="1">
+              <a:defRPr sz="1300" b="1">
                 <a:solidFill>
                   <a:srgbClr val="0F172A"/>
                 </a:solidFill>
@@ -6626,7 +6603,7 @@
           <a:p>
             <a:pPr>
               <a:spcAft>
-                <a:spcPts val="400"/>
+                <a:spcPts val="300"/>
               </a:spcAft>
               <a:defRPr sz="900" b="1">
                 <a:solidFill>
@@ -6641,31 +6618,46 @@
           <a:p>
             <a:pPr>
               <a:spcAft>
-                <a:spcPts val="300"/>
-              </a:spcAft>
-              <a:defRPr sz="1100">
+                <a:spcPts val="200"/>
+              </a:spcAft>
+              <a:defRPr sz="1000">
                 <a:solidFill>
                   <a:srgbClr val="64748B"/>
                 </a:solidFill>
               </a:defRPr>
             </a:pPr>
             <a:r>
-              <a:t>• Speak or type in Urdu or Roman Urdu (e.g. 'Mere paas luxury quartz watches hain...')</a:t>
-            </a:r>
-          </a:p>
-          <a:p>
-            <a:pPr>
-              <a:spcAft>
-                <a:spcPts val="300"/>
-              </a:spcAft>
-              <a:defRPr sz="1100">
+              <a:t>• Speak or type in conversational Urdu or Roman Urdu.</a:t>
+            </a:r>
+          </a:p>
+          <a:p>
+            <a:pPr>
+              <a:spcAft>
+                <a:spcPts val="200"/>
+              </a:spcAft>
+              <a:defRPr sz="1000">
                 <a:solidFill>
                   <a:srgbClr val="64748B"/>
                 </a:solidFill>
               </a:defRPr>
             </a:pPr>
             <a:r>
-              <a:t>• Speech-to-Text integration (Whisper / Web Speech API) + Unicode &amp; verbal number normalization.</a:t>
+              <a:t>• Preprocesses unicode and normalizes verbal numbers ('paanch sau' -&gt; 500, 'challis dollar' -&gt; $40, 'chamra' -&gt; leather).</a:t>
+            </a:r>
+          </a:p>
+          <a:p>
+            <a:pPr>
+              <a:spcAft>
+                <a:spcPts val="200"/>
+              </a:spcAft>
+              <a:defRPr sz="1000">
+                <a:solidFill>
+                  <a:srgbClr val="64748B"/>
+                </a:solidFill>
+              </a:defRPr>
+            </a:pPr>
+            <a:r>
+              <a:t>• Speech-to-Text integration via Web Audio / Speech API.</a:t>
             </a:r>
           </a:p>
         </p:txBody>
@@ -6678,8 +6670,8 @@
         </p:nvSpPr>
         <p:spPr>
           <a:xfrm>
-            <a:off x="6217920" y="1371600"/>
-            <a:ext cx="5120640" cy="2286000"/>
+            <a:off x="6217920" y="1280160"/>
+            <a:ext cx="5120640" cy="2377440"/>
           </a:xfrm>
           <a:prstGeom prst="roundRect">
             <a:avLst/>
@@ -6708,24 +6700,24 @@
           </a:fontRef>
         </p:style>
         <p:txBody>
-          <a:bodyPr rtlCol="0" anchor="ctr" wrap="square" lIns="228600" tIns="182880" rIns="228600" bIns="182880"/>
+          <a:bodyPr rtlCol="0" anchor="ctr" wrap="square" lIns="182880" tIns="164592" rIns="182880" bIns="164592"/>
           <a:lstStyle/>
           <a:p>
             <a:pPr algn="ctr">
-              <a:defRPr sz="1400" b="1">
+              <a:defRPr sz="1300" b="1">
                 <a:solidFill>
                   <a:srgbClr val="0F172A"/>
                 </a:solidFill>
               </a:defRPr>
             </a:pPr>
             <a:r>
-              <a:t>Smart Urdu Slot Dialogue Loop</a:t>
-            </a:r>
-          </a:p>
-          <a:p>
-            <a:pPr>
-              <a:spcAft>
-                <a:spcPts val="400"/>
+              <a:t>Smart Urdu Slot-Filling Dialogue</a:t>
+            </a:r>
+          </a:p>
+          <a:p>
+            <a:pPr>
+              <a:spcAft>
+                <a:spcPts val="300"/>
               </a:spcAft>
               <a:defRPr sz="900" b="1">
                 <a:solidFill>
@@ -6740,31 +6732,46 @@
           <a:p>
             <a:pPr>
               <a:spcAft>
-                <a:spcPts val="300"/>
-              </a:spcAft>
-              <a:defRPr sz="1100">
+                <a:spcPts val="200"/>
+              </a:spcAft>
+              <a:defRPr sz="1000">
                 <a:solidFill>
                   <a:srgbClr val="64748B"/>
                 </a:solidFill>
               </a:defRPr>
             </a:pPr>
             <a:r>
-              <a:t>• Per-category schema verification. If MOQ or material is missing, the AI asks follow-up questions in conversational Urdu.</a:t>
-            </a:r>
-          </a:p>
-          <a:p>
-            <a:pPr>
-              <a:spcAft>
-                <a:spcPts val="300"/>
-              </a:spcAft>
-              <a:defRPr sz="1100">
+              <a:t>• Category-specific schema validation.</a:t>
+            </a:r>
+          </a:p>
+          <a:p>
+            <a:pPr>
+              <a:spcAft>
+                <a:spcPts val="200"/>
+              </a:spcAft>
+              <a:defRPr sz="1000">
                 <a:solidFill>
                   <a:srgbClr val="64748B"/>
                 </a:solidFill>
               </a:defRPr>
             </a:pPr>
             <a:r>
-              <a:t>• Customized dynamically for ANY product (Watches, Toys, Balls, Apparel, Surgical).</a:t>
+              <a:t>• If key commercial attributes (MOQ, material, dimensions) are missing, the AI prompts the exporter in natural conversational Urdu.</a:t>
+            </a:r>
+          </a:p>
+          <a:p>
+            <a:pPr>
+              <a:spcAft>
+                <a:spcPts val="200"/>
+              </a:spcAft>
+              <a:defRPr sz="1000">
+                <a:solidFill>
+                  <a:srgbClr val="64748B"/>
+                </a:solidFill>
+              </a:defRPr>
+            </a:pPr>
+            <a:r>
+              <a:t>• Dynamically adapts to ANY product (Watches, Toys, Balls, Apparel, Surgical).</a:t>
             </a:r>
           </a:p>
         </p:txBody>
@@ -6778,7 +6785,7 @@
         <p:spPr>
           <a:xfrm>
             <a:off x="731520" y="3931920"/>
-            <a:ext cx="5120640" cy="2286000"/>
+            <a:ext cx="5120640" cy="2377440"/>
           </a:xfrm>
           <a:prstGeom prst="roundRect">
             <a:avLst/>
@@ -6807,11 +6814,11 @@
           </a:fontRef>
         </p:style>
         <p:txBody>
-          <a:bodyPr rtlCol="0" anchor="ctr" wrap="square" lIns="228600" tIns="182880" rIns="228600" bIns="182880"/>
+          <a:bodyPr rtlCol="0" anchor="ctr" wrap="square" lIns="182880" tIns="164592" rIns="182880" bIns="164592"/>
           <a:lstStyle/>
           <a:p>
             <a:pPr algn="ctr">
-              <a:defRPr sz="1400" b="1">
+              <a:defRPr sz="1300" b="1">
                 <a:solidFill>
                   <a:srgbClr val="0F172A"/>
                 </a:solidFill>
@@ -6824,7 +6831,7 @@
           <a:p>
             <a:pPr>
               <a:spcAft>
-                <a:spcPts val="400"/>
+                <a:spcPts val="300"/>
               </a:spcAft>
               <a:defRPr sz="900" b="1">
                 <a:solidFill>
@@ -6839,31 +6846,46 @@
           <a:p>
             <a:pPr>
               <a:spcAft>
-                <a:spcPts val="300"/>
-              </a:spcAft>
-              <a:defRPr sz="1100">
+                <a:spcPts val="200"/>
+              </a:spcAft>
+              <a:defRPr sz="1000">
                 <a:solidFill>
                   <a:srgbClr val="64748B"/>
                 </a:solidFill>
               </a:defRPr>
             </a:pPr>
             <a:r>
-              <a:t>• Top-seller vector style retrieval crafts optimized titles, 5 benefit bullets, and 15 SEO keywords.</a:t>
-            </a:r>
-          </a:p>
-          <a:p>
-            <a:pPr>
-              <a:spcAft>
-                <a:spcPts val="300"/>
-              </a:spcAft>
-              <a:defRPr sz="1100">
+              <a:t>• Curated top-seller style retrieval creates marketplace-ready titles, 5 benefit-driven bullets, and 15 SEO keywords.</a:t>
+            </a:r>
+          </a:p>
+          <a:p>
+            <a:pPr>
+              <a:spcAft>
+                <a:spcPts val="200"/>
+              </a:spcAft>
+              <a:defRPr sz="1000">
                 <a:solidFill>
                   <a:srgbClr val="64748B"/>
                 </a:solidFill>
               </a:defRPr>
             </a:pPr>
             <a:r>
-              <a:t>• Rubric-as-judge scores completeness (0-100) and automatically refines until score &gt;= 80.</a:t>
+              <a:t>• Official 5-dimension rubric judges completeness (0-100).</a:t>
+            </a:r>
+          </a:p>
+          <a:p>
+            <a:pPr>
+              <a:spcAft>
+                <a:spcPts val="200"/>
+              </a:spcAft>
+              <a:defRPr sz="1000">
+                <a:solidFill>
+                  <a:srgbClr val="64748B"/>
+                </a:solidFill>
+              </a:defRPr>
+            </a:pPr>
+            <a:r>
+              <a:t>• Auto-improve feedback loop refines listing until score &gt;= 80.</a:t>
             </a:r>
           </a:p>
         </p:txBody>
@@ -6877,7 +6899,7 @@
         <p:spPr>
           <a:xfrm>
             <a:off x="6217920" y="3931920"/>
-            <a:ext cx="5120640" cy="2286000"/>
+            <a:ext cx="5120640" cy="2377440"/>
           </a:xfrm>
           <a:prstGeom prst="roundRect">
             <a:avLst/>
@@ -6906,11 +6928,11 @@
           </a:fontRef>
         </p:style>
         <p:txBody>
-          <a:bodyPr rtlCol="0" anchor="ctr" wrap="square" lIns="228600" tIns="182880" rIns="228600" bIns="182880"/>
+          <a:bodyPr rtlCol="0" anchor="ctr" wrap="square" lIns="182880" tIns="164592" rIns="182880" bIns="164592"/>
           <a:lstStyle/>
           <a:p>
             <a:pPr algn="ctr">
-              <a:defRPr sz="1400" b="1">
+              <a:defRPr sz="1300" b="1">
                 <a:solidFill>
                   <a:srgbClr val="0F172A"/>
                 </a:solidFill>
@@ -6923,7 +6945,7 @@
           <a:p>
             <a:pPr>
               <a:spcAft>
-                <a:spcPts val="400"/>
+                <a:spcPts val="300"/>
               </a:spcAft>
               <a:defRPr sz="900" b="1">
                 <a:solidFill>
@@ -6938,9 +6960,9 @@
           <a:p>
             <a:pPr>
               <a:spcAft>
-                <a:spcPts val="300"/>
-              </a:spcAft>
-              <a:defRPr sz="1100">
+                <a:spcPts val="200"/>
+              </a:spcAft>
+              <a:defRPr sz="1000">
                 <a:solidFill>
                   <a:srgbClr val="64748B"/>
                 </a:solidFill>
@@ -6953,16 +6975,16 @@
           <a:p>
             <a:pPr>
               <a:spcAft>
-                <a:spcPts val="300"/>
-              </a:spcAft>
-              <a:defRPr sz="1100">
+                <a:spcPts val="200"/>
+              </a:spcAft>
+              <a:defRPr sz="1000">
                 <a:solidFill>
                   <a:srgbClr val="64748B"/>
                 </a:solidFill>
               </a:defRPr>
             </a:pPr>
             <a:r>
-              <a:t>• Autonomous Buyer Communication Agent translates exporter's Urdu replies into professional B2B quotes.</a:t>
+              <a:t>• Autonomous Buyer Communication Agent translates exporter's casual Urdu replies into tone-checked, professional B2B export English quotes.</a:t>
             </a:r>
           </a:p>
         </p:txBody>
@@ -7038,43 +7060,8 @@
         </p:nvSpPr>
         <p:spPr>
           <a:xfrm>
-            <a:off x="731520" y="137160"/>
+            <a:off x="731520" y="109728"/>
             <a:ext cx="7315200" cy="274320"/>
-          </a:xfrm>
-          <a:prstGeom prst="rect">
-            <a:avLst/>
-          </a:prstGeom>
-          <a:noFill/>
-        </p:spPr>
-        <p:txBody>
-          <a:bodyPr wrap="square">
-            <a:spAutoFit/>
-          </a:bodyPr>
-          <a:lstStyle/>
-          <a:p>
-            <a:pPr>
-              <a:defRPr sz="1000" b="1">
-                <a:solidFill>
-                  <a:srgbClr val="0284C7"/>
-                </a:solidFill>
-              </a:defRPr>
-            </a:pPr>
-            <a:r>
-              <a:t>CORETECH INNOVATION | NLP HACKATHON 2026</a:t>
-            </a:r>
-          </a:p>
-        </p:txBody>
-      </p:sp>
-      <p:sp>
-        <p:nvSpPr>
-          <p:cNvPr id="4" name="TextBox 3"/>
-          <p:cNvSpPr txBox="1"/>
-          <p:nvPr/>
-        </p:nvSpPr>
-        <p:spPr>
-          <a:xfrm>
-            <a:off x="731520" y="365760"/>
-            <a:ext cx="9144000" cy="502920"/>
           </a:xfrm>
           <a:prstGeom prst="rect">
             <a:avLst/>
@@ -7088,28 +7075,28 @@
           <a:lstStyle/>
           <a:p>
             <a:pPr>
-              <a:defRPr sz="2000" b="1">
-                <a:solidFill>
-                  <a:srgbClr val="FFFFFF"/>
-                </a:solidFill>
-              </a:defRPr>
-            </a:pPr>
-            <a:r>
-              <a:t>System Architecture: 5-Layer Production Design</a:t>
-            </a:r>
-          </a:p>
-        </p:txBody>
-      </p:sp>
-      <p:sp>
-        <p:nvSpPr>
-          <p:cNvPr id="5" name="TextBox 4"/>
+              <a:defRPr sz="1000" b="1">
+                <a:solidFill>
+                  <a:srgbClr val="0284C7"/>
+                </a:solidFill>
+              </a:defRPr>
+            </a:pPr>
+            <a:r>
+              <a:t>CORETECH INNOVATION | NLP HACKATHON 2026</a:t>
+            </a:r>
+          </a:p>
+        </p:txBody>
+      </p:sp>
+      <p:sp>
+        <p:nvSpPr>
+          <p:cNvPr id="4" name="TextBox 3"/>
           <p:cNvSpPr txBox="1"/>
           <p:nvPr/>
         </p:nvSpPr>
         <p:spPr>
           <a:xfrm>
-            <a:off x="9601200" y="320040"/>
-            <a:ext cx="2011680" cy="365760"/>
+            <a:off x="731520" y="347472"/>
+            <a:ext cx="9144000" cy="502920"/>
           </a:xfrm>
           <a:prstGeom prst="rect">
             <a:avLst/>
@@ -7123,6 +7110,41 @@
           <a:lstStyle/>
           <a:p>
             <a:pPr>
+              <a:defRPr sz="2000" b="1">
+                <a:solidFill>
+                  <a:srgbClr val="FFFFFF"/>
+                </a:solidFill>
+              </a:defRPr>
+            </a:pPr>
+            <a:r>
+              <a:t>System Architecture: 5-Layer Engineering Flow</a:t>
+            </a:r>
+          </a:p>
+        </p:txBody>
+      </p:sp>
+      <p:sp>
+        <p:nvSpPr>
+          <p:cNvPr id="5" name="TextBox 4"/>
+          <p:cNvSpPr txBox="1"/>
+          <p:nvPr/>
+        </p:nvSpPr>
+        <p:spPr>
+          <a:xfrm>
+            <a:off x="9326880" y="320040"/>
+            <a:ext cx="2377440" cy="365760"/>
+          </a:xfrm>
+          <a:prstGeom prst="rect">
+            <a:avLst/>
+          </a:prstGeom>
+          <a:noFill/>
+        </p:spPr>
+        <p:txBody>
+          <a:bodyPr wrap="none">
+            <a:spAutoFit/>
+          </a:bodyPr>
+          <a:lstStyle/>
+          <a:p>
+            <a:pPr>
               <a:defRPr sz="900" b="1">
                 <a:solidFill>
                   <a:srgbClr val="10B981"/>
@@ -7135,16 +7157,75 @@
           </a:p>
         </p:txBody>
       </p:sp>
-      <p:sp>
-        <p:nvSpPr>
-          <p:cNvPr id="6" name="Rounded Rectangle 5"/>
+      <p:pic>
+        <p:nvPicPr>
+          <p:cNvPr id="6" name="Picture 5" descr="diagram_architecture.png"/>
+          <p:cNvPicPr>
+            <a:picLocks noChangeAspect="1"/>
+          </p:cNvPicPr>
+          <p:nvPr/>
+        </p:nvPicPr>
+        <p:blipFill>
+          <a:blip r:embed="rId2"/>
+          <a:stretch>
+            <a:fillRect/>
+          </a:stretch>
+        </p:blipFill>
+        <p:spPr>
+          <a:xfrm>
+            <a:off x="731520" y="1280160"/>
+            <a:ext cx="6766560" cy="4937760"/>
+          </a:xfrm>
+          <a:prstGeom prst="rect">
+            <a:avLst/>
+          </a:prstGeom>
+        </p:spPr>
+      </p:pic>
+      <p:sp>
+        <p:nvSpPr>
+          <p:cNvPr id="7" name="TextBox 6"/>
+          <p:cNvSpPr txBox="1"/>
+          <p:nvPr/>
+        </p:nvSpPr>
+        <p:spPr>
+          <a:xfrm>
+            <a:off x="731520" y="6263640"/>
+            <a:ext cx="6766560" cy="320040"/>
+          </a:xfrm>
+          <a:prstGeom prst="rect">
+            <a:avLst/>
+          </a:prstGeom>
+          <a:noFill/>
+        </p:spPr>
+        <p:txBody>
+          <a:bodyPr wrap="none">
+            <a:spAutoFit/>
+          </a:bodyPr>
+          <a:lstStyle/>
+          <a:p>
+            <a:pPr>
+              <a:defRPr sz="900" b="1">
+                <a:solidFill>
+                  <a:srgbClr val="64748B"/>
+                </a:solidFill>
+              </a:defRPr>
+            </a:pPr>
+            <a:r>
+              <a:t>Figure: Five-Layer Production System Architecture (CoreTech Innovation)</a:t>
+            </a:r>
+          </a:p>
+        </p:txBody>
+      </p:sp>
+      <p:sp>
+        <p:nvSpPr>
+          <p:cNvPr id="8" name="Rounded Rectangle 7"/>
           <p:cNvSpPr/>
           <p:nvPr/>
         </p:nvSpPr>
         <p:spPr>
           <a:xfrm>
-            <a:off x="731520" y="1371600"/>
-            <a:ext cx="2011680" cy="4846320"/>
+            <a:off x="7772400" y="1280160"/>
+            <a:ext cx="3657600" cy="4937760"/>
           </a:xfrm>
           <a:prstGeom prst="roundRect">
             <a:avLst/>
@@ -7173,24 +7254,24 @@
           </a:fontRef>
         </p:style>
         <p:txBody>
-          <a:bodyPr rtlCol="0" anchor="ctr" wrap="square" lIns="228600" tIns="182880" rIns="228600" bIns="182880"/>
+          <a:bodyPr rtlCol="0" anchor="ctr" wrap="square" lIns="182880" tIns="164592" rIns="182880" bIns="164592"/>
           <a:lstStyle/>
           <a:p>
             <a:pPr algn="ctr">
-              <a:defRPr sz="1400" b="1">
+              <a:defRPr sz="1300" b="1">
                 <a:solidFill>
                   <a:srgbClr val="0F172A"/>
                 </a:solidFill>
               </a:defRPr>
             </a:pPr>
             <a:r>
-              <a:t>1. Client Layer</a:t>
-            </a:r>
-          </a:p>
-          <a:p>
-            <a:pPr>
-              <a:spcAft>
-                <a:spcPts val="400"/>
+              <a:t>Architectural Highlights</a:t>
+            </a:r>
+          </a:p>
+          <a:p>
+            <a:pPr>
+              <a:spcAft>
+                <a:spcPts val="300"/>
               </a:spcAft>
               <a:defRPr sz="900" b="1">
                 <a:solidFill>
@@ -7199,613 +7280,82 @@
               </a:defRPr>
             </a:pPr>
             <a:r>
-              <a:t>[LAYER 1]</a:t>
-            </a:r>
-          </a:p>
-          <a:p>
-            <a:pPr>
-              <a:spcAft>
-                <a:spcPts val="300"/>
-              </a:spcAft>
-              <a:defRPr sz="1100">
+              <a:t>[5-LAYER DESIGN]</a:t>
+            </a:r>
+          </a:p>
+          <a:p>
+            <a:pPr>
+              <a:spcAft>
+                <a:spcPts val="200"/>
+              </a:spcAft>
+              <a:defRPr sz="1000">
                 <a:solidFill>
                   <a:srgbClr val="64748B"/>
                 </a:solidFill>
               </a:defRPr>
             </a:pPr>
             <a:r>
-              <a:t>• Urdu Voice &amp; Text Input</a:t>
-            </a:r>
-          </a:p>
-          <a:p>
-            <a:pPr>
-              <a:spcAft>
-                <a:spcPts val="300"/>
-              </a:spcAft>
-              <a:defRPr sz="1100">
+              <a:t>• 1. Client Layer: Responsive web dashboard supporting Urdu/Roman Urdu text, voice recording, live chips, and preview tabs.</a:t>
+            </a:r>
+          </a:p>
+          <a:p>
+            <a:pPr>
+              <a:spcAft>
+                <a:spcPts val="200"/>
+              </a:spcAft>
+              <a:defRPr sz="1000">
                 <a:solidFill>
                   <a:srgbClr val="64748B"/>
                 </a:solidFill>
               </a:defRPr>
             </a:pPr>
             <a:r>
-              <a:t>• Real-Time Extracted Chips</a:t>
-            </a:r>
-          </a:p>
-          <a:p>
-            <a:pPr>
-              <a:spcAft>
-                <a:spcPts val="300"/>
-              </a:spcAft>
-              <a:defRPr sz="1100">
+              <a:t>• 2. Application Layer: FastAPI microservice orchestrator handling async NLP execution, JWT auth, and draft persistence.</a:t>
+            </a:r>
+          </a:p>
+          <a:p>
+            <a:pPr>
+              <a:spcAft>
+                <a:spcPts val="200"/>
+              </a:spcAft>
+              <a:defRPr sz="1000">
                 <a:solidFill>
                   <a:srgbClr val="64748B"/>
                 </a:solidFill>
               </a:defRPr>
             </a:pPr>
             <a:r>
-              <a:t>• Urdu Dialogue Follow-up Card</a:t>
-            </a:r>
-          </a:p>
-          <a:p>
-            <a:pPr>
-              <a:spcAft>
-                <a:spcPts val="300"/>
-              </a:spcAft>
-              <a:defRPr sz="1100">
+              <a:t>• 3. AI/NLP Layer: Preprocessor, Pydantic NER extractor, slot dialogue manager, RAG vector store, and rubric judge.</a:t>
+            </a:r>
+          </a:p>
+          <a:p>
+            <a:pPr>
+              <a:spcAft>
+                <a:spcPts val="200"/>
+              </a:spcAft>
+              <a:defRPr sz="1000">
                 <a:solidFill>
                   <a:srgbClr val="64748B"/>
                 </a:solidFill>
               </a:defRPr>
             </a:pPr>
             <a:r>
-              <a:t>• Quality Score Gauge (0-100)</a:t>
-            </a:r>
-          </a:p>
-          <a:p>
-            <a:pPr>
-              <a:spcAft>
-                <a:spcPts val="300"/>
-              </a:spcAft>
-              <a:defRPr sz="1100">
+              <a:t>• 4. Integration Layer: Mock Alibaba Publish API and Amazon SP-API with realistic ASIN and listing ID allocation.</a:t>
+            </a:r>
+          </a:p>
+          <a:p>
+            <a:pPr>
+              <a:spcAft>
+                <a:spcPts val="200"/>
+              </a:spcAft>
+              <a:defRPr sz="1000">
                 <a:solidFill>
                   <a:srgbClr val="64748B"/>
                 </a:solidFill>
               </a:defRPr>
             </a:pPr>
             <a:r>
-              <a:t>• Live Marketplace Viewers</a:t>
-            </a:r>
-          </a:p>
-        </p:txBody>
-      </p:sp>
-      <p:sp>
-        <p:nvSpPr>
-          <p:cNvPr id="7" name="Rounded Rectangle 6"/>
-          <p:cNvSpPr/>
-          <p:nvPr/>
-        </p:nvSpPr>
-        <p:spPr>
-          <a:xfrm>
-            <a:off x="2926080" y="1371600"/>
-            <a:ext cx="2011680" cy="4846320"/>
-          </a:xfrm>
-          <a:prstGeom prst="roundRect">
-            <a:avLst/>
-          </a:prstGeom>
-          <a:solidFill>
-            <a:srgbClr val="FFFFFF"/>
-          </a:solidFill>
-          <a:ln w="19050">
-            <a:solidFill>
-              <a:srgbClr val="10B981"/>
-            </a:solidFill>
-          </a:ln>
-        </p:spPr>
-        <p:style>
-          <a:lnRef idx="1">
-            <a:schemeClr val="accent1"/>
-          </a:lnRef>
-          <a:fillRef idx="3">
-            <a:schemeClr val="accent1"/>
-          </a:fillRef>
-          <a:effectRef idx="2">
-            <a:schemeClr val="accent1"/>
-          </a:effectRef>
-          <a:fontRef idx="minor">
-            <a:schemeClr val="lt1"/>
-          </a:fontRef>
-        </p:style>
-        <p:txBody>
-          <a:bodyPr rtlCol="0" anchor="ctr" wrap="square" lIns="228600" tIns="182880" rIns="228600" bIns="182880"/>
-          <a:lstStyle/>
-          <a:p>
-            <a:pPr algn="ctr">
-              <a:defRPr sz="1400" b="1">
-                <a:solidFill>
-                  <a:srgbClr val="0F172A"/>
-                </a:solidFill>
-              </a:defRPr>
-            </a:pPr>
-            <a:r>
-              <a:t>2. Application Layer</a:t>
-            </a:r>
-          </a:p>
-          <a:p>
-            <a:pPr>
-              <a:spcAft>
-                <a:spcPts val="400"/>
-              </a:spcAft>
-              <a:defRPr sz="900" b="1">
-                <a:solidFill>
-                  <a:srgbClr val="10B981"/>
-                </a:solidFill>
-              </a:defRPr>
-            </a:pPr>
-            <a:r>
-              <a:t>[LAYER 2]</a:t>
-            </a:r>
-          </a:p>
-          <a:p>
-            <a:pPr>
-              <a:spcAft>
-                <a:spcPts val="300"/>
-              </a:spcAft>
-              <a:defRPr sz="1100">
-                <a:solidFill>
-                  <a:srgbClr val="64748B"/>
-                </a:solidFill>
-              </a:defRPr>
-            </a:pPr>
-            <a:r>
-              <a:t>• FastAPI REST Orchestrator</a:t>
-            </a:r>
-          </a:p>
-          <a:p>
-            <a:pPr>
-              <a:spcAft>
-                <a:spcPts val="300"/>
-              </a:spcAft>
-              <a:defRPr sz="1100">
-                <a:solidFill>
-                  <a:srgbClr val="64748B"/>
-                </a:solidFill>
-              </a:defRPr>
-            </a:pPr>
-            <a:r>
-              <a:t>• Async Task Queues</a:t>
-            </a:r>
-          </a:p>
-          <a:p>
-            <a:pPr>
-              <a:spcAft>
-                <a:spcPts val="300"/>
-              </a:spcAft>
-              <a:defRPr sz="1100">
-                <a:solidFill>
-                  <a:srgbClr val="64748B"/>
-                </a:solidFill>
-              </a:defRPr>
-            </a:pPr>
-            <a:r>
-              <a:t>• JWT &amp; OAuth2 Mock Tokens</a:t>
-            </a:r>
-          </a:p>
-          <a:p>
-            <a:pPr>
-              <a:spcAft>
-                <a:spcPts val="300"/>
-              </a:spcAft>
-              <a:defRPr sz="1100">
-                <a:solidFill>
-                  <a:srgbClr val="64748B"/>
-                </a:solidFill>
-              </a:defRPr>
-            </a:pPr>
-            <a:r>
-              <a:t>• Draft &amp; Version History Management</a:t>
-            </a:r>
-          </a:p>
-        </p:txBody>
-      </p:sp>
-      <p:sp>
-        <p:nvSpPr>
-          <p:cNvPr id="8" name="Rounded Rectangle 7"/>
-          <p:cNvSpPr/>
-          <p:nvPr/>
-        </p:nvSpPr>
-        <p:spPr>
-          <a:xfrm>
-            <a:off x="5120640" y="1371600"/>
-            <a:ext cx="2011680" cy="4846320"/>
-          </a:xfrm>
-          <a:prstGeom prst="roundRect">
-            <a:avLst/>
-          </a:prstGeom>
-          <a:solidFill>
-            <a:srgbClr val="FFFFFF"/>
-          </a:solidFill>
-          <a:ln w="19050">
-            <a:solidFill>
-              <a:srgbClr val="0284C7"/>
-            </a:solidFill>
-          </a:ln>
-        </p:spPr>
-        <p:style>
-          <a:lnRef idx="1">
-            <a:schemeClr val="accent1"/>
-          </a:lnRef>
-          <a:fillRef idx="3">
-            <a:schemeClr val="accent1"/>
-          </a:fillRef>
-          <a:effectRef idx="2">
-            <a:schemeClr val="accent1"/>
-          </a:effectRef>
-          <a:fontRef idx="minor">
-            <a:schemeClr val="lt1"/>
-          </a:fontRef>
-        </p:style>
-        <p:txBody>
-          <a:bodyPr rtlCol="0" anchor="ctr" wrap="square" lIns="228600" tIns="182880" rIns="228600" bIns="182880"/>
-          <a:lstStyle/>
-          <a:p>
-            <a:pPr algn="ctr">
-              <a:defRPr sz="1400" b="1">
-                <a:solidFill>
-                  <a:srgbClr val="0F172A"/>
-                </a:solidFill>
-              </a:defRPr>
-            </a:pPr>
-            <a:r>
-              <a:t>3. AI / NLP Layer</a:t>
-            </a:r>
-          </a:p>
-          <a:p>
-            <a:pPr>
-              <a:spcAft>
-                <a:spcPts val="400"/>
-              </a:spcAft>
-              <a:defRPr sz="900" b="1">
-                <a:solidFill>
-                  <a:srgbClr val="10B981"/>
-                </a:solidFill>
-              </a:defRPr>
-            </a:pPr>
-            <a:r>
-              <a:t>[LAYER 3]</a:t>
-            </a:r>
-          </a:p>
-          <a:p>
-            <a:pPr>
-              <a:spcAft>
-                <a:spcPts val="300"/>
-              </a:spcAft>
-              <a:defRPr sz="1100">
-                <a:solidFill>
-                  <a:srgbClr val="64748B"/>
-                </a:solidFill>
-              </a:defRPr>
-            </a:pPr>
-            <a:r>
-              <a:t>• Preprocessor (Roman Urdu Normalizer)</a:t>
-            </a:r>
-          </a:p>
-          <a:p>
-            <a:pPr>
-              <a:spcAft>
-                <a:spcPts val="300"/>
-              </a:spcAft>
-              <a:defRPr sz="1100">
-                <a:solidFill>
-                  <a:srgbClr val="64748B"/>
-                </a:solidFill>
-              </a:defRPr>
-            </a:pPr>
-            <a:r>
-              <a:t>• NER Attribute Extractor (Pydantic)</a:t>
-            </a:r>
-          </a:p>
-          <a:p>
-            <a:pPr>
-              <a:spcAft>
-                <a:spcPts val="300"/>
-              </a:spcAft>
-              <a:defRPr sz="1100">
-                <a:solidFill>
-                  <a:srgbClr val="64748B"/>
-                </a:solidFill>
-              </a:defRPr>
-            </a:pPr>
-            <a:r>
-              <a:t>• Conversational Slot Manager</a:t>
-            </a:r>
-          </a:p>
-          <a:p>
-            <a:pPr>
-              <a:spcAft>
-                <a:spcPts val="300"/>
-              </a:spcAft>
-              <a:defRPr sz="1100">
-                <a:solidFill>
-                  <a:srgbClr val="64748B"/>
-                </a:solidFill>
-              </a:defRPr>
-            </a:pPr>
-            <a:r>
-              <a:t>• RAG Vector Store &amp; Prompt Generator</a:t>
-            </a:r>
-          </a:p>
-          <a:p>
-            <a:pPr>
-              <a:spcAft>
-                <a:spcPts val="300"/>
-              </a:spcAft>
-              <a:defRPr sz="1100">
-                <a:solidFill>
-                  <a:srgbClr val="64748B"/>
-                </a:solidFill>
-              </a:defRPr>
-            </a:pPr>
-            <a:r>
-              <a:t>• Rubric Scorer &amp; Auto-Improve Loop</a:t>
-            </a:r>
-          </a:p>
-        </p:txBody>
-      </p:sp>
-      <p:sp>
-        <p:nvSpPr>
-          <p:cNvPr id="9" name="Rounded Rectangle 8"/>
-          <p:cNvSpPr/>
-          <p:nvPr/>
-        </p:nvSpPr>
-        <p:spPr>
-          <a:xfrm>
-            <a:off x="7315199" y="1371600"/>
-            <a:ext cx="2011680" cy="4846320"/>
-          </a:xfrm>
-          <a:prstGeom prst="roundRect">
-            <a:avLst/>
-          </a:prstGeom>
-          <a:solidFill>
-            <a:srgbClr val="FFFFFF"/>
-          </a:solidFill>
-          <a:ln w="19050">
-            <a:solidFill>
-              <a:srgbClr val="10B981"/>
-            </a:solidFill>
-          </a:ln>
-        </p:spPr>
-        <p:style>
-          <a:lnRef idx="1">
-            <a:schemeClr val="accent1"/>
-          </a:lnRef>
-          <a:fillRef idx="3">
-            <a:schemeClr val="accent1"/>
-          </a:fillRef>
-          <a:effectRef idx="2">
-            <a:schemeClr val="accent1"/>
-          </a:effectRef>
-          <a:fontRef idx="minor">
-            <a:schemeClr val="lt1"/>
-          </a:fontRef>
-        </p:style>
-        <p:txBody>
-          <a:bodyPr rtlCol="0" anchor="ctr" wrap="square" lIns="228600" tIns="182880" rIns="228600" bIns="182880"/>
-          <a:lstStyle/>
-          <a:p>
-            <a:pPr algn="ctr">
-              <a:defRPr sz="1400" b="1">
-                <a:solidFill>
-                  <a:srgbClr val="0F172A"/>
-                </a:solidFill>
-              </a:defRPr>
-            </a:pPr>
-            <a:r>
-              <a:t>4. Integration Layer</a:t>
-            </a:r>
-          </a:p>
-          <a:p>
-            <a:pPr>
-              <a:spcAft>
-                <a:spcPts val="400"/>
-              </a:spcAft>
-              <a:defRPr sz="900" b="1">
-                <a:solidFill>
-                  <a:srgbClr val="10B981"/>
-                </a:solidFill>
-              </a:defRPr>
-            </a:pPr>
-            <a:r>
-              <a:t>[LAYER 4]</a:t>
-            </a:r>
-          </a:p>
-          <a:p>
-            <a:pPr>
-              <a:spcAft>
-                <a:spcPts val="300"/>
-              </a:spcAft>
-              <a:defRPr sz="1100">
-                <a:solidFill>
-                  <a:srgbClr val="64748B"/>
-                </a:solidFill>
-              </a:defRPr>
-            </a:pPr>
-            <a:r>
-              <a:t>• Mock Alibaba Publish API</a:t>
-            </a:r>
-          </a:p>
-          <a:p>
-            <a:pPr>
-              <a:spcAft>
-                <a:spcPts val="300"/>
-              </a:spcAft>
-              <a:defRPr sz="1100">
-                <a:solidFill>
-                  <a:srgbClr val="64748B"/>
-                </a:solidFill>
-              </a:defRPr>
-            </a:pPr>
-            <a:r>
-              <a:t>• Mock Amazon SP-API Catalog</a:t>
-            </a:r>
-          </a:p>
-          <a:p>
-            <a:pPr>
-              <a:spcAft>
-                <a:spcPts val="300"/>
-              </a:spcAft>
-              <a:defRPr sz="1100">
-                <a:solidFill>
-                  <a:srgbClr val="64748B"/>
-                </a:solidFill>
-              </a:defRPr>
-            </a:pPr>
-            <a:r>
-              <a:t>• Buyer RFQ Webhooks</a:t>
-            </a:r>
-          </a:p>
-          <a:p>
-            <a:pPr>
-              <a:spcAft>
-                <a:spcPts val="300"/>
-              </a:spcAft>
-              <a:defRPr sz="1100">
-                <a:solidFill>
-                  <a:srgbClr val="64748B"/>
-                </a:solidFill>
-              </a:defRPr>
-            </a:pPr>
-            <a:r>
-              <a:t>• Payoneer / Wise Fee Calculator</a:t>
-            </a:r>
-          </a:p>
-        </p:txBody>
-      </p:sp>
-      <p:sp>
-        <p:nvSpPr>
-          <p:cNvPr id="10" name="Rounded Rectangle 9"/>
-          <p:cNvSpPr/>
-          <p:nvPr/>
-        </p:nvSpPr>
-        <p:spPr>
-          <a:xfrm>
-            <a:off x="9509760" y="1371600"/>
-            <a:ext cx="2011680" cy="4846320"/>
-          </a:xfrm>
-          <a:prstGeom prst="roundRect">
-            <a:avLst/>
-          </a:prstGeom>
-          <a:solidFill>
-            <a:srgbClr val="FFFFFF"/>
-          </a:solidFill>
-          <a:ln w="19050">
-            <a:solidFill>
-              <a:srgbClr val="0284C7"/>
-            </a:solidFill>
-          </a:ln>
-        </p:spPr>
-        <p:style>
-          <a:lnRef idx="1">
-            <a:schemeClr val="accent1"/>
-          </a:lnRef>
-          <a:fillRef idx="3">
-            <a:schemeClr val="accent1"/>
-          </a:fillRef>
-          <a:effectRef idx="2">
-            <a:schemeClr val="accent1"/>
-          </a:effectRef>
-          <a:fontRef idx="minor">
-            <a:schemeClr val="lt1"/>
-          </a:fontRef>
-        </p:style>
-        <p:txBody>
-          <a:bodyPr rtlCol="0" anchor="ctr" wrap="square" lIns="228600" tIns="182880" rIns="228600" bIns="182880"/>
-          <a:lstStyle/>
-          <a:p>
-            <a:pPr algn="ctr">
-              <a:defRPr sz="1400" b="1">
-                <a:solidFill>
-                  <a:srgbClr val="0F172A"/>
-                </a:solidFill>
-              </a:defRPr>
-            </a:pPr>
-            <a:r>
-              <a:t>5. Data Layer</a:t>
-            </a:r>
-          </a:p>
-          <a:p>
-            <a:pPr>
-              <a:spcAft>
-                <a:spcPts val="400"/>
-              </a:spcAft>
-              <a:defRPr sz="900" b="1">
-                <a:solidFill>
-                  <a:srgbClr val="10B981"/>
-                </a:solidFill>
-              </a:defRPr>
-            </a:pPr>
-            <a:r>
-              <a:t>[LAYER 5]</a:t>
-            </a:r>
-          </a:p>
-          <a:p>
-            <a:pPr>
-              <a:spcAft>
-                <a:spcPts val="300"/>
-              </a:spcAft>
-              <a:defRPr sz="1100">
-                <a:solidFill>
-                  <a:srgbClr val="64748B"/>
-                </a:solidFill>
-              </a:defRPr>
-            </a:pPr>
-            <a:r>
-              <a:t>• SQLite Persistence DB</a:t>
-            </a:r>
-          </a:p>
-          <a:p>
-            <a:pPr>
-              <a:spcAft>
-                <a:spcPts val="300"/>
-              </a:spcAft>
-              <a:defRPr sz="1100">
-                <a:solidFill>
-                  <a:srgbClr val="64748B"/>
-                </a:solidFill>
-              </a:defRPr>
-            </a:pPr>
-            <a:r>
-              <a:t>• Curated Top-Seller RAG Store</a:t>
-            </a:r>
-          </a:p>
-          <a:p>
-            <a:pPr>
-              <a:spcAft>
-                <a:spcPts val="300"/>
-              </a:spcAft>
-              <a:defRPr sz="1100">
-                <a:solidFill>
-                  <a:srgbClr val="64748B"/>
-                </a:solidFill>
-              </a:defRPr>
-            </a:pPr>
-            <a:r>
-              <a:t>• Market Intelligence Snapshots</a:t>
-            </a:r>
-          </a:p>
-          <a:p>
-            <a:pPr>
-              <a:spcAft>
-                <a:spcPts val="300"/>
-              </a:spcAft>
-              <a:defRPr sz="1100">
-                <a:solidFill>
-                  <a:srgbClr val="64748B"/>
-                </a:solidFill>
-              </a:defRPr>
-            </a:pPr>
-            <a:r>
-              <a:t>• Audit &amp; Inquiries Log</a:t>
+              <a:t>• 5. Data Layer: SQLite database storing users, shops, listings, market benchmarks, and buyer inquiry logs.</a:t>
             </a:r>
           </a:p>
         </p:txBody>
@@ -7881,43 +7431,8 @@
         </p:nvSpPr>
         <p:spPr>
           <a:xfrm>
-            <a:off x="731520" y="137160"/>
+            <a:off x="731520" y="109728"/>
             <a:ext cx="7315200" cy="274320"/>
-          </a:xfrm>
-          <a:prstGeom prst="rect">
-            <a:avLst/>
-          </a:prstGeom>
-          <a:noFill/>
-        </p:spPr>
-        <p:txBody>
-          <a:bodyPr wrap="square">
-            <a:spAutoFit/>
-          </a:bodyPr>
-          <a:lstStyle/>
-          <a:p>
-            <a:pPr>
-              <a:defRPr sz="1000" b="1">
-                <a:solidFill>
-                  <a:srgbClr val="0284C7"/>
-                </a:solidFill>
-              </a:defRPr>
-            </a:pPr>
-            <a:r>
-              <a:t>CORETECH INNOVATION | NLP HACKATHON 2026</a:t>
-            </a:r>
-          </a:p>
-        </p:txBody>
-      </p:sp>
-      <p:sp>
-        <p:nvSpPr>
-          <p:cNvPr id="4" name="TextBox 3"/>
-          <p:cNvSpPr txBox="1"/>
-          <p:nvPr/>
-        </p:nvSpPr>
-        <p:spPr>
-          <a:xfrm>
-            <a:off x="731520" y="365760"/>
-            <a:ext cx="9144000" cy="502920"/>
           </a:xfrm>
           <a:prstGeom prst="rect">
             <a:avLst/>
@@ -7931,28 +7446,28 @@
           <a:lstStyle/>
           <a:p>
             <a:pPr>
-              <a:defRPr sz="2000" b="1">
-                <a:solidFill>
-                  <a:srgbClr val="FFFFFF"/>
-                </a:solidFill>
-              </a:defRPr>
-            </a:pPr>
-            <a:r>
-              <a:t>Methodology: 7-Stage NLP Pipeline &amp; Quality Feedback Loops</a:t>
-            </a:r>
-          </a:p>
-        </p:txBody>
-      </p:sp>
-      <p:sp>
-        <p:nvSpPr>
-          <p:cNvPr id="5" name="TextBox 4"/>
+              <a:defRPr sz="1000" b="1">
+                <a:solidFill>
+                  <a:srgbClr val="0284C7"/>
+                </a:solidFill>
+              </a:defRPr>
+            </a:pPr>
+            <a:r>
+              <a:t>CORETECH INNOVATION | NLP HACKATHON 2026</a:t>
+            </a:r>
+          </a:p>
+        </p:txBody>
+      </p:sp>
+      <p:sp>
+        <p:nvSpPr>
+          <p:cNvPr id="4" name="TextBox 3"/>
           <p:cNvSpPr txBox="1"/>
           <p:nvPr/>
         </p:nvSpPr>
         <p:spPr>
           <a:xfrm>
-            <a:off x="9601200" y="320040"/>
-            <a:ext cx="2011680" cy="365760"/>
+            <a:off x="731520" y="347472"/>
+            <a:ext cx="9144000" cy="502920"/>
           </a:xfrm>
           <a:prstGeom prst="rect">
             <a:avLst/>
@@ -7966,6 +7481,41 @@
           <a:lstStyle/>
           <a:p>
             <a:pPr>
+              <a:defRPr sz="2000" b="1">
+                <a:solidFill>
+                  <a:srgbClr val="FFFFFF"/>
+                </a:solidFill>
+              </a:defRPr>
+            </a:pPr>
+            <a:r>
+              <a:t>Methodology: 7-Stage NLP Pipeline &amp; Quality Feedback Loops</a:t>
+            </a:r>
+          </a:p>
+        </p:txBody>
+      </p:sp>
+      <p:sp>
+        <p:nvSpPr>
+          <p:cNvPr id="5" name="TextBox 4"/>
+          <p:cNvSpPr txBox="1"/>
+          <p:nvPr/>
+        </p:nvSpPr>
+        <p:spPr>
+          <a:xfrm>
+            <a:off x="9326880" y="320040"/>
+            <a:ext cx="2377440" cy="365760"/>
+          </a:xfrm>
+          <a:prstGeom prst="rect">
+            <a:avLst/>
+          </a:prstGeom>
+          <a:noFill/>
+        </p:spPr>
+        <p:txBody>
+          <a:bodyPr wrap="none">
+            <a:spAutoFit/>
+          </a:bodyPr>
+          <a:lstStyle/>
+          <a:p>
+            <a:pPr>
               <a:defRPr sz="900" b="1">
                 <a:solidFill>
                   <a:srgbClr val="10B981"/>
@@ -7978,16 +7528,75 @@
           </a:p>
         </p:txBody>
       </p:sp>
-      <p:sp>
-        <p:nvSpPr>
-          <p:cNvPr id="6" name="Rounded Rectangle 5"/>
+      <p:pic>
+        <p:nvPicPr>
+          <p:cNvPr id="6" name="Picture 5" descr="diagram_methodology.png"/>
+          <p:cNvPicPr>
+            <a:picLocks noChangeAspect="1"/>
+          </p:cNvPicPr>
+          <p:nvPr/>
+        </p:nvPicPr>
+        <p:blipFill>
+          <a:blip r:embed="rId2"/>
+          <a:stretch>
+            <a:fillRect/>
+          </a:stretch>
+        </p:blipFill>
+        <p:spPr>
+          <a:xfrm>
+            <a:off x="731520" y="1280160"/>
+            <a:ext cx="6766560" cy="4937760"/>
+          </a:xfrm>
+          <a:prstGeom prst="rect">
+            <a:avLst/>
+          </a:prstGeom>
+        </p:spPr>
+      </p:pic>
+      <p:sp>
+        <p:nvSpPr>
+          <p:cNvPr id="7" name="TextBox 6"/>
+          <p:cNvSpPr txBox="1"/>
+          <p:nvPr/>
+        </p:nvSpPr>
+        <p:spPr>
+          <a:xfrm>
+            <a:off x="731520" y="6263640"/>
+            <a:ext cx="6766560" cy="320040"/>
+          </a:xfrm>
+          <a:prstGeom prst="rect">
+            <a:avLst/>
+          </a:prstGeom>
+          <a:noFill/>
+        </p:spPr>
+        <p:txBody>
+          <a:bodyPr wrap="none">
+            <a:spAutoFit/>
+          </a:bodyPr>
+          <a:lstStyle/>
+          <a:p>
+            <a:pPr>
+              <a:defRPr sz="900" b="1">
+                <a:solidFill>
+                  <a:srgbClr val="64748B"/>
+                </a:solidFill>
+              </a:defRPr>
+            </a:pPr>
+            <a:r>
+              <a:t>Figure: 7-Stage NLP Methodology Flowchart with Slot-Filling &amp; Auto-Improve Feedback Loops</a:t>
+            </a:r>
+          </a:p>
+        </p:txBody>
+      </p:sp>
+      <p:sp>
+        <p:nvSpPr>
+          <p:cNvPr id="8" name="Rounded Rectangle 7"/>
           <p:cNvSpPr/>
           <p:nvPr/>
         </p:nvSpPr>
         <p:spPr>
           <a:xfrm>
-            <a:off x="731520" y="1280160"/>
-            <a:ext cx="10698480" cy="621792"/>
+            <a:off x="7772400" y="1280160"/>
+            <a:ext cx="3657600" cy="4937760"/>
           </a:xfrm>
           <a:prstGeom prst="roundRect">
             <a:avLst/>
@@ -7995,9 +7604,9 @@
           <a:solidFill>
             <a:srgbClr val="FFFFFF"/>
           </a:solidFill>
-          <a:ln>
+          <a:ln w="19050">
             <a:solidFill>
-              <a:srgbClr val="0284C7"/>
+              <a:srgbClr val="10B981"/>
             </a:solidFill>
           </a:ln>
         </p:spPr>
@@ -8016,398 +7625,138 @@
           </a:fontRef>
         </p:style>
         <p:txBody>
-          <a:bodyPr rtlCol="0" anchor="ctr"/>
+          <a:bodyPr rtlCol="0" anchor="ctr" wrap="square" lIns="182880" tIns="164592" rIns="182880" bIns="164592"/>
           <a:lstStyle/>
           <a:p>
             <a:pPr algn="ctr">
-              <a:defRPr b="1" sz="1100">
+              <a:defRPr sz="1300" b="1">
                 <a:solidFill>
                   <a:srgbClr val="0F172A"/>
                 </a:solidFill>
               </a:defRPr>
             </a:pPr>
             <a:r>
-              <a:t>0. Capture &amp; Normalization: </a:t>
-            </a:r>
-            <a:r>
-              <a:rPr b="0" sz="1000">
+              <a:t>Pipeline Stages &amp; Quality Rubric</a:t>
+            </a:r>
+          </a:p>
+          <a:p>
+            <a:pPr>
+              <a:spcAft>
+                <a:spcPts val="300"/>
+              </a:spcAft>
+              <a:defRPr sz="900" b="1">
+                <a:solidFill>
+                  <a:srgbClr val="10B981"/>
+                </a:solidFill>
+              </a:defRPr>
+            </a:pPr>
+            <a:r>
+              <a:t>[7-STAGE PIPELINE]</a:t>
+            </a:r>
+          </a:p>
+          <a:p>
+            <a:pPr>
+              <a:spcAft>
+                <a:spcPts val="200"/>
+              </a:spcAft>
+              <a:defRPr sz="1000">
                 <a:solidFill>
                   <a:srgbClr val="64748B"/>
                 </a:solidFill>
-              </a:rPr>
-              <a:t>Speech/text captured; Roman Urdu mapped ('chamra'-&gt;leather, 'paanch sau'-&gt;500).</a:t>
-            </a:r>
-          </a:p>
-        </p:txBody>
-      </p:sp>
-      <p:sp>
-        <p:nvSpPr>
-          <p:cNvPr id="7" name="Rounded Rectangle 6"/>
-          <p:cNvSpPr/>
-          <p:nvPr/>
-        </p:nvSpPr>
-        <p:spPr>
-          <a:xfrm>
-            <a:off x="731520" y="1993391"/>
-            <a:ext cx="10698480" cy="621792"/>
-          </a:xfrm>
-          <a:prstGeom prst="roundRect">
-            <a:avLst/>
-          </a:prstGeom>
-          <a:solidFill>
-            <a:srgbClr val="FFFFFF"/>
-          </a:solidFill>
-          <a:ln>
-            <a:solidFill>
-              <a:srgbClr val="0284C7"/>
-            </a:solidFill>
-          </a:ln>
-        </p:spPr>
-        <p:style>
-          <a:lnRef idx="1">
-            <a:schemeClr val="accent1"/>
-          </a:lnRef>
-          <a:fillRef idx="3">
-            <a:schemeClr val="accent1"/>
-          </a:fillRef>
-          <a:effectRef idx="2">
-            <a:schemeClr val="accent1"/>
-          </a:effectRef>
-          <a:fontRef idx="minor">
-            <a:schemeClr val="lt1"/>
-          </a:fontRef>
-        </p:style>
-        <p:txBody>
-          <a:bodyPr rtlCol="0" anchor="ctr"/>
-          <a:lstStyle/>
-          <a:p>
-            <a:pPr algn="ctr">
-              <a:defRPr b="1" sz="1100">
-                <a:solidFill>
-                  <a:srgbClr val="0F172A"/>
-                </a:solidFill>
-              </a:defRPr>
-            </a:pPr>
-            <a:r>
-              <a:t>1. Attribute Extraction (NER): </a:t>
-            </a:r>
-            <a:r>
-              <a:rPr b="0" sz="1000">
+              </a:defRPr>
+            </a:pPr>
+            <a:r>
+              <a:t>• Stage 0-1: Capture &amp; Preprocess (Unicode normalization, verbal numbers, unit mapping).</a:t>
+            </a:r>
+          </a:p>
+          <a:p>
+            <a:pPr>
+              <a:spcAft>
+                <a:spcPts val="200"/>
+              </a:spcAft>
+              <a:defRPr sz="1000">
                 <a:solidFill>
                   <a:srgbClr val="64748B"/>
                 </a:solidFill>
-              </a:rPr>
-              <a:t>Pydantic validated JSON: category, product_type, material, sizes, colors, MOQ, price, lead time.</a:t>
-            </a:r>
-          </a:p>
-        </p:txBody>
-      </p:sp>
-      <p:sp>
-        <p:nvSpPr>
-          <p:cNvPr id="8" name="Rounded Rectangle 7"/>
-          <p:cNvSpPr/>
-          <p:nvPr/>
-        </p:nvSpPr>
-        <p:spPr>
-          <a:xfrm>
-            <a:off x="731520" y="2706624"/>
-            <a:ext cx="10698480" cy="621792"/>
-          </a:xfrm>
-          <a:prstGeom prst="roundRect">
-            <a:avLst/>
-          </a:prstGeom>
-          <a:solidFill>
-            <a:srgbClr val="FFFFFF"/>
-          </a:solidFill>
-          <a:ln>
-            <a:solidFill>
-              <a:srgbClr val="0284C7"/>
-            </a:solidFill>
-          </a:ln>
-        </p:spPr>
-        <p:style>
-          <a:lnRef idx="1">
-            <a:schemeClr val="accent1"/>
-          </a:lnRef>
-          <a:fillRef idx="3">
-            <a:schemeClr val="accent1"/>
-          </a:fillRef>
-          <a:effectRef idx="2">
-            <a:schemeClr val="accent1"/>
-          </a:effectRef>
-          <a:fontRef idx="minor">
-            <a:schemeClr val="lt1"/>
-          </a:fontRef>
-        </p:style>
-        <p:txBody>
-          <a:bodyPr rtlCol="0" anchor="ctr"/>
-          <a:lstStyle/>
-          <a:p>
-            <a:pPr algn="ctr">
-              <a:defRPr b="1" sz="1100">
-                <a:solidFill>
-                  <a:srgbClr val="0F172A"/>
-                </a:solidFill>
-              </a:defRPr>
-            </a:pPr>
-            <a:r>
-              <a:t>2. Smart Slot Check: </a:t>
-            </a:r>
-            <a:r>
-              <a:rPr b="0" sz="1000">
+              </a:defRPr>
+            </a:pPr>
+            <a:r>
+              <a:t>• Stage 2: Structured NER extraction validated with Pydantic JSON schema.</a:t>
+            </a:r>
+          </a:p>
+          <a:p>
+            <a:pPr>
+              <a:spcAft>
+                <a:spcPts val="200"/>
+              </a:spcAft>
+              <a:defRPr sz="1000">
                 <a:solidFill>
                   <a:srgbClr val="64748B"/>
                 </a:solidFill>
-              </a:rPr>
-              <a:t>Checks required fields. If incomplete, generates dynamic conversational Urdu prompt.</a:t>
-            </a:r>
-          </a:p>
-        </p:txBody>
-      </p:sp>
-      <p:sp>
-        <p:nvSpPr>
-          <p:cNvPr id="9" name="Rounded Rectangle 8"/>
-          <p:cNvSpPr/>
-          <p:nvPr/>
-        </p:nvSpPr>
-        <p:spPr>
-          <a:xfrm>
-            <a:off x="731520" y="3419856"/>
-            <a:ext cx="10698480" cy="621792"/>
-          </a:xfrm>
-          <a:prstGeom prst="roundRect">
-            <a:avLst/>
-          </a:prstGeom>
-          <a:solidFill>
-            <a:srgbClr val="FFFFFF"/>
-          </a:solidFill>
-          <a:ln>
-            <a:solidFill>
-              <a:srgbClr val="0284C7"/>
-            </a:solidFill>
-          </a:ln>
-        </p:spPr>
-        <p:style>
-          <a:lnRef idx="1">
-            <a:schemeClr val="accent1"/>
-          </a:lnRef>
-          <a:fillRef idx="3">
-            <a:schemeClr val="accent1"/>
-          </a:fillRef>
-          <a:effectRef idx="2">
-            <a:schemeClr val="accent1"/>
-          </a:effectRef>
-          <a:fontRef idx="minor">
-            <a:schemeClr val="lt1"/>
-          </a:fontRef>
-        </p:style>
-        <p:txBody>
-          <a:bodyPr rtlCol="0" anchor="ctr"/>
-          <a:lstStyle/>
-          <a:p>
-            <a:pPr algn="ctr">
-              <a:defRPr b="1" sz="1100">
-                <a:solidFill>
-                  <a:srgbClr val="0F172A"/>
-                </a:solidFill>
-              </a:defRPr>
-            </a:pPr>
-            <a:r>
-              <a:t>3. RAG Listing Generator: </a:t>
-            </a:r>
-            <a:r>
-              <a:rPr b="0" sz="1000">
+              </a:defRPr>
+            </a:pPr>
+            <a:r>
+              <a:t>• Stage 3: Slot checking against category schema; generates conversational Urdu follow-up if missing.</a:t>
+            </a:r>
+          </a:p>
+          <a:p>
+            <a:pPr>
+              <a:spcAft>
+                <a:spcPts val="200"/>
+              </a:spcAft>
+              <a:defRPr sz="1000">
                 <a:solidFill>
                   <a:srgbClr val="64748B"/>
                 </a:solidFill>
-              </a:rPr>
-              <a:t>Few-shot top-seller retrieval generates title, 5 benefit-driven bullets, and 15 keywords.</a:t>
-            </a:r>
-          </a:p>
-        </p:txBody>
-      </p:sp>
-      <p:sp>
-        <p:nvSpPr>
-          <p:cNvPr id="10" name="Rounded Rectangle 9"/>
-          <p:cNvSpPr/>
-          <p:nvPr/>
-        </p:nvSpPr>
-        <p:spPr>
-          <a:xfrm>
-            <a:off x="731520" y="4133087"/>
-            <a:ext cx="10698480" cy="621792"/>
-          </a:xfrm>
-          <a:prstGeom prst="roundRect">
-            <a:avLst/>
-          </a:prstGeom>
-          <a:solidFill>
-            <a:srgbClr val="FFFFFF"/>
-          </a:solidFill>
-          <a:ln>
-            <a:solidFill>
-              <a:srgbClr val="0284C7"/>
-            </a:solidFill>
-          </a:ln>
-        </p:spPr>
-        <p:style>
-          <a:lnRef idx="1">
-            <a:schemeClr val="accent1"/>
-          </a:lnRef>
-          <a:fillRef idx="3">
-            <a:schemeClr val="accent1"/>
-          </a:fillRef>
-          <a:effectRef idx="2">
-            <a:schemeClr val="accent1"/>
-          </a:effectRef>
-          <a:fontRef idx="minor">
-            <a:schemeClr val="lt1"/>
-          </a:fontRef>
-        </p:style>
-        <p:txBody>
-          <a:bodyPr rtlCol="0" anchor="ctr"/>
-          <a:lstStyle/>
-          <a:p>
-            <a:pPr algn="ctr">
-              <a:defRPr b="1" sz="1100">
-                <a:solidFill>
-                  <a:srgbClr val="0F172A"/>
-                </a:solidFill>
-              </a:defRPr>
-            </a:pPr>
-            <a:r>
-              <a:t>4. Platform Formatter: </a:t>
-            </a:r>
-            <a:r>
-              <a:rPr b="0" sz="1000">
+              </a:defRPr>
+            </a:pPr>
+            <a:r>
+              <a:t>• Stage 4: Prompted LLM / RAG listing generator (title, 5 bullets, 15 SEO tags).</a:t>
+            </a:r>
+          </a:p>
+          <a:p>
+            <a:pPr>
+              <a:spcAft>
+                <a:spcPts val="200"/>
+              </a:spcAft>
+              <a:defRPr sz="1000">
                 <a:solidFill>
                   <a:srgbClr val="64748B"/>
                 </a:solidFill>
-              </a:rPr>
-              <a:t>Formats payloads adhering to Alibaba RFQ (128 char title) and Amazon SP-API limits.</a:t>
-            </a:r>
-          </a:p>
-        </p:txBody>
-      </p:sp>
-      <p:sp>
-        <p:nvSpPr>
-          <p:cNvPr id="11" name="Rounded Rectangle 10"/>
-          <p:cNvSpPr/>
-          <p:nvPr/>
-        </p:nvSpPr>
-        <p:spPr>
-          <a:xfrm>
-            <a:off x="731520" y="4846320"/>
-            <a:ext cx="10698480" cy="621792"/>
-          </a:xfrm>
-          <a:prstGeom prst="roundRect">
-            <a:avLst/>
-          </a:prstGeom>
-          <a:solidFill>
-            <a:srgbClr val="FFFFFF"/>
-          </a:solidFill>
-          <a:ln>
-            <a:solidFill>
-              <a:srgbClr val="0284C7"/>
-            </a:solidFill>
-          </a:ln>
-        </p:spPr>
-        <p:style>
-          <a:lnRef idx="1">
-            <a:schemeClr val="accent1"/>
-          </a:lnRef>
-          <a:fillRef idx="3">
-            <a:schemeClr val="accent1"/>
-          </a:fillRef>
-          <a:effectRef idx="2">
-            <a:schemeClr val="accent1"/>
-          </a:effectRef>
-          <a:fontRef idx="minor">
-            <a:schemeClr val="lt1"/>
-          </a:fontRef>
-        </p:style>
-        <p:txBody>
-          <a:bodyPr rtlCol="0" anchor="ctr"/>
-          <a:lstStyle/>
-          <a:p>
-            <a:pPr algn="ctr">
-              <a:defRPr b="1" sz="1100">
-                <a:solidFill>
-                  <a:srgbClr val="0F172A"/>
-                </a:solidFill>
-              </a:defRPr>
-            </a:pPr>
-            <a:r>
-              <a:t>5. Quality Scorer (0-100): </a:t>
-            </a:r>
-            <a:r>
-              <a:rPr b="0" sz="1000">
+              </a:defRPr>
+            </a:pPr>
+            <a:r>
+              <a:t>• Stage 5: Platform formatter (Alibaba 128-char limit &amp; Amazon SP-API schema).</a:t>
+            </a:r>
+          </a:p>
+          <a:p>
+            <a:pPr>
+              <a:spcAft>
+                <a:spcPts val="200"/>
+              </a:spcAft>
+              <a:defRPr sz="1000">
                 <a:solidFill>
                   <a:srgbClr val="64748B"/>
                 </a:solidFill>
-              </a:rPr>
-              <a:t>Official rubric: Completeness (30), Title (20), Bullets (20), SEO (15), Compliance (15). Auto-improves if &lt; 80.</a:t>
-            </a:r>
-          </a:p>
-        </p:txBody>
-      </p:sp>
-      <p:sp>
-        <p:nvSpPr>
-          <p:cNvPr id="12" name="Rounded Rectangle 11"/>
-          <p:cNvSpPr/>
-          <p:nvPr/>
-        </p:nvSpPr>
-        <p:spPr>
-          <a:xfrm>
-            <a:off x="731520" y="5559552"/>
-            <a:ext cx="10698480" cy="621792"/>
-          </a:xfrm>
-          <a:prstGeom prst="roundRect">
-            <a:avLst/>
-          </a:prstGeom>
-          <a:solidFill>
-            <a:srgbClr val="FFFFFF"/>
-          </a:solidFill>
-          <a:ln>
-            <a:solidFill>
-              <a:srgbClr val="0284C7"/>
-            </a:solidFill>
-          </a:ln>
-        </p:spPr>
-        <p:style>
-          <a:lnRef idx="1">
-            <a:schemeClr val="accent1"/>
-          </a:lnRef>
-          <a:fillRef idx="3">
-            <a:schemeClr val="accent1"/>
-          </a:fillRef>
-          <a:effectRef idx="2">
-            <a:schemeClr val="accent1"/>
-          </a:effectRef>
-          <a:fontRef idx="minor">
-            <a:schemeClr val="lt1"/>
-          </a:fontRef>
-        </p:style>
-        <p:txBody>
-          <a:bodyPr rtlCol="0" anchor="ctr"/>
-          <a:lstStyle/>
-          <a:p>
-            <a:pPr algn="ctr">
-              <a:defRPr b="1" sz="1100">
-                <a:solidFill>
-                  <a:srgbClr val="0F172A"/>
-                </a:solidFill>
-              </a:defRPr>
-            </a:pPr>
-            <a:r>
-              <a:t>6. Exporter Approval &amp; Publish: </a:t>
-            </a:r>
-            <a:r>
-              <a:rPr b="0" sz="1000">
+              </a:defRPr>
+            </a:pPr>
+            <a:r>
+              <a:t>• Stage 6: 0-100 Rubric Scorer. If score &lt; 80, auto-improves (up to 2 iterations).</a:t>
+            </a:r>
+          </a:p>
+          <a:p>
+            <a:pPr>
+              <a:spcAft>
+                <a:spcPts val="200"/>
+              </a:spcAft>
+              <a:defRPr sz="1000">
                 <a:solidFill>
                   <a:srgbClr val="64748B"/>
                 </a:solidFill>
-              </a:rPr>
-              <a:t>Human-in-the-loop: Exporter reviews Urdu summary and clicks Approve to publish live.</a:t>
+              </a:defRPr>
+            </a:pPr>
+            <a:r>
+              <a:t>• Stage 7: Exporter reviews Urdu summary and clicks Approve to publish live.</a:t>
             </a:r>
           </a:p>
         </p:txBody>
@@ -8483,43 +7832,8 @@
         </p:nvSpPr>
         <p:spPr>
           <a:xfrm>
-            <a:off x="731520" y="137160"/>
+            <a:off x="731520" y="109728"/>
             <a:ext cx="7315200" cy="274320"/>
-          </a:xfrm>
-          <a:prstGeom prst="rect">
-            <a:avLst/>
-          </a:prstGeom>
-          <a:noFill/>
-        </p:spPr>
-        <p:txBody>
-          <a:bodyPr wrap="square">
-            <a:spAutoFit/>
-          </a:bodyPr>
-          <a:lstStyle/>
-          <a:p>
-            <a:pPr>
-              <a:defRPr sz="1000" b="1">
-                <a:solidFill>
-                  <a:srgbClr val="0284C7"/>
-                </a:solidFill>
-              </a:defRPr>
-            </a:pPr>
-            <a:r>
-              <a:t>CORETECH INNOVATION | NLP HACKATHON 2026</a:t>
-            </a:r>
-          </a:p>
-        </p:txBody>
-      </p:sp>
-      <p:sp>
-        <p:nvSpPr>
-          <p:cNvPr id="4" name="TextBox 3"/>
-          <p:cNvSpPr txBox="1"/>
-          <p:nvPr/>
-        </p:nvSpPr>
-        <p:spPr>
-          <a:xfrm>
-            <a:off x="731520" y="365760"/>
-            <a:ext cx="9144000" cy="502920"/>
           </a:xfrm>
           <a:prstGeom prst="rect">
             <a:avLst/>
@@ -8533,28 +7847,28 @@
           <a:lstStyle/>
           <a:p>
             <a:pPr>
-              <a:defRPr sz="2000" b="1">
-                <a:solidFill>
-                  <a:srgbClr val="FFFFFF"/>
-                </a:solidFill>
-              </a:defRPr>
-            </a:pPr>
-            <a:r>
-              <a:t>Universal Product Intelligence: Dynamic For ANY Industry</a:t>
-            </a:r>
-          </a:p>
-        </p:txBody>
-      </p:sp>
-      <p:sp>
-        <p:nvSpPr>
-          <p:cNvPr id="5" name="TextBox 4"/>
+              <a:defRPr sz="1000" b="1">
+                <a:solidFill>
+                  <a:srgbClr val="0284C7"/>
+                </a:solidFill>
+              </a:defRPr>
+            </a:pPr>
+            <a:r>
+              <a:t>CORETECH INNOVATION | NLP HACKATHON 2026</a:t>
+            </a:r>
+          </a:p>
+        </p:txBody>
+      </p:sp>
+      <p:sp>
+        <p:nvSpPr>
+          <p:cNvPr id="4" name="TextBox 3"/>
           <p:cNvSpPr txBox="1"/>
           <p:nvPr/>
         </p:nvSpPr>
         <p:spPr>
           <a:xfrm>
-            <a:off x="9601200" y="320040"/>
-            <a:ext cx="2011680" cy="365760"/>
+            <a:off x="731520" y="347472"/>
+            <a:ext cx="9144000" cy="502920"/>
           </a:xfrm>
           <a:prstGeom prst="rect">
             <a:avLst/>
@@ -8568,6 +7882,41 @@
           <a:lstStyle/>
           <a:p>
             <a:pPr>
+              <a:defRPr sz="2000" b="1">
+                <a:solidFill>
+                  <a:srgbClr val="FFFFFF"/>
+                </a:solidFill>
+              </a:defRPr>
+            </a:pPr>
+            <a:r>
+              <a:t>Universal Product Intelligence: Dynamic for ANY Industry</a:t>
+            </a:r>
+          </a:p>
+        </p:txBody>
+      </p:sp>
+      <p:sp>
+        <p:nvSpPr>
+          <p:cNvPr id="5" name="TextBox 4"/>
+          <p:cNvSpPr txBox="1"/>
+          <p:nvPr/>
+        </p:nvSpPr>
+        <p:spPr>
+          <a:xfrm>
+            <a:off x="9326880" y="320040"/>
+            <a:ext cx="2377440" cy="365760"/>
+          </a:xfrm>
+          <a:prstGeom prst="rect">
+            <a:avLst/>
+          </a:prstGeom>
+          <a:noFill/>
+        </p:spPr>
+        <p:txBody>
+          <a:bodyPr wrap="none">
+            <a:spAutoFit/>
+          </a:bodyPr>
+          <a:lstStyle/>
+          <a:p>
+            <a:pPr>
               <a:defRPr sz="900" b="1">
                 <a:solidFill>
                   <a:srgbClr val="10B981"/>
@@ -8588,7 +7937,7 @@
         </p:nvSpPr>
         <p:spPr>
           <a:xfrm>
-            <a:off x="731520" y="1371600"/>
+            <a:off x="731520" y="1280160"/>
             <a:ext cx="5120640" cy="2194560"/>
           </a:xfrm>
           <a:prstGeom prst="roundRect">
@@ -8618,11 +7967,11 @@
           </a:fontRef>
         </p:style>
         <p:txBody>
-          <a:bodyPr rtlCol="0" anchor="ctr" wrap="square" lIns="228600" tIns="182880" rIns="228600" bIns="182880"/>
+          <a:bodyPr rtlCol="0" anchor="ctr" wrap="square" lIns="182880" tIns="164592" rIns="182880" bIns="164592"/>
           <a:lstStyle/>
           <a:p>
             <a:pPr algn="ctr">
-              <a:defRPr sz="1400" b="1">
+              <a:defRPr sz="1300" b="1">
                 <a:solidFill>
                   <a:srgbClr val="0F172A"/>
                 </a:solidFill>
@@ -8635,7 +7984,7 @@
           <a:p>
             <a:pPr>
               <a:spcAft>
-                <a:spcPts val="400"/>
+                <a:spcPts val="300"/>
               </a:spcAft>
               <a:defRPr sz="900" b="1">
                 <a:solidFill>
@@ -8650,9 +7999,9 @@
           <a:p>
             <a:pPr>
               <a:spcAft>
-                <a:spcPts val="300"/>
-              </a:spcAft>
-              <a:defRPr sz="1100">
+                <a:spcPts val="200"/>
+              </a:spcAft>
+              <a:defRPr sz="1000">
                 <a:solidFill>
                   <a:srgbClr val="64748B"/>
                 </a:solidFill>
@@ -8665,9 +8014,9 @@
           <a:p>
             <a:pPr>
               <a:spcAft>
-                <a:spcPts val="300"/>
-              </a:spcAft>
-              <a:defRPr sz="1100">
+                <a:spcPts val="200"/>
+              </a:spcAft>
+              <a:defRPr sz="1000">
                 <a:solidFill>
                   <a:srgbClr val="64748B"/>
                 </a:solidFill>
@@ -8680,16 +8029,16 @@
           <a:p>
             <a:pPr>
               <a:spcAft>
-                <a:spcPts val="300"/>
-              </a:spcAft>
-              <a:defRPr sz="1100">
+                <a:spcPts val="200"/>
+              </a:spcAft>
+              <a:defRPr sz="1000">
                 <a:solidFill>
                   <a:srgbClr val="64748B"/>
                 </a:solidFill>
               </a:defRPr>
             </a:pPr>
             <a:r>
-              <a:t>• Generates dial logo OEM &amp; luxury gift box bullets</a:t>
+              <a:t>• Generates dial logo OEM &amp; luxury presentation packaging</a:t>
             </a:r>
           </a:p>
         </p:txBody>
@@ -8702,7 +8051,7 @@
         </p:nvSpPr>
         <p:spPr>
           <a:xfrm>
-            <a:off x="6217920" y="1371600"/>
+            <a:off x="6217920" y="1280160"/>
             <a:ext cx="5120640" cy="2194560"/>
           </a:xfrm>
           <a:prstGeom prst="roundRect">
@@ -8732,11 +8081,11 @@
           </a:fontRef>
         </p:style>
         <p:txBody>
-          <a:bodyPr rtlCol="0" anchor="ctr" wrap="square" lIns="228600" tIns="182880" rIns="228600" bIns="182880"/>
+          <a:bodyPr rtlCol="0" anchor="ctr" wrap="square" lIns="182880" tIns="164592" rIns="182880" bIns="164592"/>
           <a:lstStyle/>
           <a:p>
             <a:pPr algn="ctr">
-              <a:defRPr sz="1400" b="1">
+              <a:defRPr sz="1300" b="1">
                 <a:solidFill>
                   <a:srgbClr val="0F172A"/>
                 </a:solidFill>
@@ -8749,7 +8098,7 @@
           <a:p>
             <a:pPr>
               <a:spcAft>
-                <a:spcPts val="400"/>
+                <a:spcPts val="300"/>
               </a:spcAft>
               <a:defRPr sz="900" b="1">
                 <a:solidFill>
@@ -8764,9 +8113,9 @@
           <a:p>
             <a:pPr>
               <a:spcAft>
-                <a:spcPts val="300"/>
-              </a:spcAft>
-              <a:defRPr sz="1100">
+                <a:spcPts val="200"/>
+              </a:spcAft>
+              <a:defRPr sz="1000">
                 <a:solidFill>
                   <a:srgbClr val="64748B"/>
                 </a:solidFill>
@@ -8779,24 +8128,24 @@
           <a:p>
             <a:pPr>
               <a:spcAft>
-                <a:spcPts val="300"/>
-              </a:spcAft>
-              <a:defRPr sz="1100">
+                <a:spcPts val="200"/>
+              </a:spcAft>
+              <a:defRPr sz="1000">
                 <a:solidFill>
                   <a:srgbClr val="64748B"/>
                 </a:solidFill>
               </a:defRPr>
             </a:pPr>
             <a:r>
-              <a:t>• Follow-up: Non-toxic ABS plastic, wood, child age group</a:t>
-            </a:r>
-          </a:p>
-          <a:p>
-            <a:pPr>
-              <a:spcAft>
-                <a:spcPts val="300"/>
-              </a:spcAft>
-              <a:defRPr sz="1100">
+              <a:t>• Follow-up: Non-toxic ABS plastic, solid wood, child age group</a:t>
+            </a:r>
+          </a:p>
+          <a:p>
+            <a:pPr>
+              <a:spcAft>
+                <a:spcPts val="200"/>
+              </a:spcAft>
+              <a:defRPr sz="1000">
                 <a:solidFill>
                   <a:srgbClr val="64748B"/>
                 </a:solidFill>
@@ -8816,7 +8165,7 @@
         </p:nvSpPr>
         <p:spPr>
           <a:xfrm>
-            <a:off x="731520" y="3840480"/>
+            <a:off x="731520" y="3749039"/>
             <a:ext cx="5120640" cy="2194560"/>
           </a:xfrm>
           <a:prstGeom prst="roundRect">
@@ -8846,11 +8195,11 @@
           </a:fontRef>
         </p:style>
         <p:txBody>
-          <a:bodyPr rtlCol="0" anchor="ctr" wrap="square" lIns="228600" tIns="182880" rIns="228600" bIns="182880"/>
+          <a:bodyPr rtlCol="0" anchor="ctr" wrap="square" lIns="182880" tIns="164592" rIns="182880" bIns="164592"/>
           <a:lstStyle/>
           <a:p>
             <a:pPr algn="ctr">
-              <a:defRPr sz="1400" b="1">
+              <a:defRPr sz="1300" b="1">
                 <a:solidFill>
                   <a:srgbClr val="0F172A"/>
                 </a:solidFill>
@@ -8863,7 +8212,7 @@
           <a:p>
             <a:pPr>
               <a:spcAft>
-                <a:spcPts val="400"/>
+                <a:spcPts val="300"/>
               </a:spcAft>
               <a:defRPr sz="900" b="1">
                 <a:solidFill>
@@ -8878,24 +8227,24 @@
           <a:p>
             <a:pPr>
               <a:spcAft>
-                <a:spcPts val="300"/>
-              </a:spcAft>
-              <a:defRPr sz="1100">
+                <a:spcPts val="200"/>
+              </a:spcAft>
+              <a:defRPr sz="1000">
                 <a:solidFill>
                   <a:srgbClr val="64748B"/>
                 </a:solidFill>
               </a:defRPr>
             </a:pPr>
             <a:r>
-              <a:t>• Detects Footballs, Soccer, Cricket, Boxing</a:t>
-            </a:r>
-          </a:p>
-          <a:p>
-            <a:pPr>
-              <a:spcAft>
-                <a:spcPts val="300"/>
-              </a:spcAft>
-              <a:defRPr sz="1100">
+              <a:t>• Detects Match Footballs, Soccer, Cricket, Boxing</a:t>
+            </a:r>
+          </a:p>
+          <a:p>
+            <a:pPr>
+              <a:spcAft>
+                <a:spcPts val="200"/>
+              </a:spcAft>
+              <a:defRPr sz="1000">
                 <a:solidFill>
                   <a:srgbClr val="64748B"/>
                 </a:solidFill>
@@ -8908,9 +8257,9 @@
           <a:p>
             <a:pPr>
               <a:spcAft>
-                <a:spcPts val="300"/>
-              </a:spcAft>
-              <a:defRPr sz="1100">
+                <a:spcPts val="200"/>
+              </a:spcAft>
+              <a:defRPr sz="1000">
                 <a:solidFill>
                   <a:srgbClr val="64748B"/>
                 </a:solidFill>
@@ -8930,7 +8279,7 @@
         </p:nvSpPr>
         <p:spPr>
           <a:xfrm>
-            <a:off x="6217920" y="3840480"/>
+            <a:off x="6217920" y="3749039"/>
             <a:ext cx="5120640" cy="2194560"/>
           </a:xfrm>
           <a:prstGeom prst="roundRect">
@@ -8960,11 +8309,11 @@
           </a:fontRef>
         </p:style>
         <p:txBody>
-          <a:bodyPr rtlCol="0" anchor="ctr" wrap="square" lIns="228600" tIns="182880" rIns="228600" bIns="182880"/>
+          <a:bodyPr rtlCol="0" anchor="ctr" wrap="square" lIns="182880" tIns="164592" rIns="182880" bIns="164592"/>
           <a:lstStyle/>
           <a:p>
             <a:pPr algn="ctr">
-              <a:defRPr sz="1400" b="1">
+              <a:defRPr sz="1300" b="1">
                 <a:solidFill>
                   <a:srgbClr val="0F172A"/>
                 </a:solidFill>
@@ -8977,7 +8326,7 @@
           <a:p>
             <a:pPr>
               <a:spcAft>
-                <a:spcPts val="400"/>
+                <a:spcPts val="300"/>
               </a:spcAft>
               <a:defRPr sz="900" b="1">
                 <a:solidFill>
@@ -8992,9 +8341,9 @@
           <a:p>
             <a:pPr>
               <a:spcAft>
-                <a:spcPts val="300"/>
-              </a:spcAft>
-              <a:defRPr sz="1100">
+                <a:spcPts val="200"/>
+              </a:spcAft>
+              <a:defRPr sz="1000">
                 <a:solidFill>
                   <a:srgbClr val="64748B"/>
                 </a:solidFill>
@@ -9007,9 +8356,9 @@
           <a:p>
             <a:pPr>
               <a:spcAft>
-                <a:spcPts val="300"/>
-              </a:spcAft>
-              <a:defRPr sz="1100">
+                <a:spcPts val="200"/>
+              </a:spcAft>
+              <a:defRPr sz="1000">
                 <a:solidFill>
                   <a:srgbClr val="64748B"/>
                 </a:solidFill>
@@ -9022,9 +8371,9 @@
           <a:p>
             <a:pPr>
               <a:spcAft>
-                <a:spcPts val="300"/>
-              </a:spcAft>
-              <a:defRPr sz="1100">
+                <a:spcPts val="200"/>
+              </a:spcAft>
+              <a:defRPr sz="1000">
                 <a:solidFill>
                   <a:srgbClr val="64748B"/>
                 </a:solidFill>
@@ -9107,43 +8456,8 @@
         </p:nvSpPr>
         <p:spPr>
           <a:xfrm>
-            <a:off x="731520" y="137160"/>
+            <a:off x="731520" y="109728"/>
             <a:ext cx="7315200" cy="274320"/>
-          </a:xfrm>
-          <a:prstGeom prst="rect">
-            <a:avLst/>
-          </a:prstGeom>
-          <a:noFill/>
-        </p:spPr>
-        <p:txBody>
-          <a:bodyPr wrap="square">
-            <a:spAutoFit/>
-          </a:bodyPr>
-          <a:lstStyle/>
-          <a:p>
-            <a:pPr>
-              <a:defRPr sz="1000" b="1">
-                <a:solidFill>
-                  <a:srgbClr val="0284C7"/>
-                </a:solidFill>
-              </a:defRPr>
-            </a:pPr>
-            <a:r>
-              <a:t>CORETECH INNOVATION | NLP HACKATHON 2026</a:t>
-            </a:r>
-          </a:p>
-        </p:txBody>
-      </p:sp>
-      <p:sp>
-        <p:nvSpPr>
-          <p:cNvPr id="4" name="TextBox 3"/>
-          <p:cNvSpPr txBox="1"/>
-          <p:nvPr/>
-        </p:nvSpPr>
-        <p:spPr>
-          <a:xfrm>
-            <a:off x="731520" y="365760"/>
-            <a:ext cx="9144000" cy="502920"/>
           </a:xfrm>
           <a:prstGeom prst="rect">
             <a:avLst/>
@@ -9157,28 +8471,28 @@
           <a:lstStyle/>
           <a:p>
             <a:pPr>
-              <a:defRPr sz="2000" b="1">
-                <a:solidFill>
-                  <a:srgbClr val="FFFFFF"/>
-                </a:solidFill>
-              </a:defRPr>
-            </a:pPr>
-            <a:r>
-              <a:t>Live UI Showcase: Responsive Exporter Dashboard</a:t>
-            </a:r>
-          </a:p>
-        </p:txBody>
-      </p:sp>
-      <p:sp>
-        <p:nvSpPr>
-          <p:cNvPr id="5" name="TextBox 4"/>
+              <a:defRPr sz="1000" b="1">
+                <a:solidFill>
+                  <a:srgbClr val="0284C7"/>
+                </a:solidFill>
+              </a:defRPr>
+            </a:pPr>
+            <a:r>
+              <a:t>CORETECH INNOVATION | NLP HACKATHON 2026</a:t>
+            </a:r>
+          </a:p>
+        </p:txBody>
+      </p:sp>
+      <p:sp>
+        <p:nvSpPr>
+          <p:cNvPr id="4" name="TextBox 3"/>
           <p:cNvSpPr txBox="1"/>
           <p:nvPr/>
         </p:nvSpPr>
         <p:spPr>
           <a:xfrm>
-            <a:off x="9601200" y="320040"/>
-            <a:ext cx="2011680" cy="365760"/>
+            <a:off x="731520" y="347472"/>
+            <a:ext cx="9144000" cy="502920"/>
           </a:xfrm>
           <a:prstGeom prst="rect">
             <a:avLst/>
@@ -9192,6 +8506,41 @@
           <a:lstStyle/>
           <a:p>
             <a:pPr>
+              <a:defRPr sz="2000" b="1">
+                <a:solidFill>
+                  <a:srgbClr val="FFFFFF"/>
+                </a:solidFill>
+              </a:defRPr>
+            </a:pPr>
+            <a:r>
+              <a:t>Live UI Screenshot: Exporter Dashboard &amp; Presets</a:t>
+            </a:r>
+          </a:p>
+        </p:txBody>
+      </p:sp>
+      <p:sp>
+        <p:nvSpPr>
+          <p:cNvPr id="5" name="TextBox 4"/>
+          <p:cNvSpPr txBox="1"/>
+          <p:nvPr/>
+        </p:nvSpPr>
+        <p:spPr>
+          <a:xfrm>
+            <a:off x="9326880" y="320040"/>
+            <a:ext cx="2377440" cy="365760"/>
+          </a:xfrm>
+          <a:prstGeom prst="rect">
+            <a:avLst/>
+          </a:prstGeom>
+          <a:noFill/>
+        </p:spPr>
+        <p:txBody>
+          <a:bodyPr wrap="none">
+            <a:spAutoFit/>
+          </a:bodyPr>
+          <a:lstStyle/>
+          <a:p>
+            <a:pPr>
               <a:defRPr sz="900" b="1">
                 <a:solidFill>
                   <a:srgbClr val="10B981"/>
@@ -9204,16 +8553,75 @@
           </a:p>
         </p:txBody>
       </p:sp>
-      <p:sp>
-        <p:nvSpPr>
-          <p:cNvPr id="6" name="Rounded Rectangle 5"/>
+      <p:pic>
+        <p:nvPicPr>
+          <p:cNvPr id="6" name="Picture 5" descr="ss_dashboard.png"/>
+          <p:cNvPicPr>
+            <a:picLocks noChangeAspect="1"/>
+          </p:cNvPicPr>
+          <p:nvPr/>
+        </p:nvPicPr>
+        <p:blipFill>
+          <a:blip r:embed="rId2"/>
+          <a:stretch>
+            <a:fillRect/>
+          </a:stretch>
+        </p:blipFill>
+        <p:spPr>
+          <a:xfrm>
+            <a:off x="731520" y="1280160"/>
+            <a:ext cx="6766560" cy="4937760"/>
+          </a:xfrm>
+          <a:prstGeom prst="rect">
+            <a:avLst/>
+          </a:prstGeom>
+        </p:spPr>
+      </p:pic>
+      <p:sp>
+        <p:nvSpPr>
+          <p:cNvPr id="7" name="TextBox 6"/>
+          <p:cNvSpPr txBox="1"/>
+          <p:nvPr/>
+        </p:nvSpPr>
+        <p:spPr>
+          <a:xfrm>
+            <a:off x="731520" y="6263640"/>
+            <a:ext cx="6766560" cy="320040"/>
+          </a:xfrm>
+          <a:prstGeom prst="rect">
+            <a:avLst/>
+          </a:prstGeom>
+          <a:noFill/>
+        </p:spPr>
+        <p:txBody>
+          <a:bodyPr wrap="none">
+            <a:spAutoFit/>
+          </a:bodyPr>
+          <a:lstStyle/>
+          <a:p>
+            <a:pPr>
+              <a:defRPr sz="900" b="1">
+                <a:solidFill>
+                  <a:srgbClr val="64748B"/>
+                </a:solidFill>
+              </a:defRPr>
+            </a:pPr>
+            <a:r>
+              <a:t>Screenshot 1: Live Web Dashboard with One-Click Exporter Presets &amp; Urdu Input (localhost:8000)</a:t>
+            </a:r>
+          </a:p>
+        </p:txBody>
+      </p:sp>
+      <p:sp>
+        <p:nvSpPr>
+          <p:cNvPr id="8" name="Rounded Rectangle 7"/>
           <p:cNvSpPr/>
           <p:nvPr/>
         </p:nvSpPr>
         <p:spPr>
           <a:xfrm>
-            <a:off x="731520" y="1371600"/>
-            <a:ext cx="5120640" cy="4754880"/>
+            <a:off x="7772400" y="1280160"/>
+            <a:ext cx="3657600" cy="4937760"/>
           </a:xfrm>
           <a:prstGeom prst="roundRect">
             <a:avLst/>
@@ -9242,24 +8650,24 @@
           </a:fontRef>
         </p:style>
         <p:txBody>
-          <a:bodyPr rtlCol="0" anchor="ctr" wrap="square" lIns="228600" tIns="182880" rIns="228600" bIns="182880"/>
+          <a:bodyPr rtlCol="0" anchor="ctr" wrap="square" lIns="182880" tIns="164592" rIns="182880" bIns="164592"/>
           <a:lstStyle/>
           <a:p>
             <a:pPr algn="ctr">
-              <a:defRPr sz="1400" b="1">
+              <a:defRPr sz="1300" b="1">
                 <a:solidFill>
                   <a:srgbClr val="0F172A"/>
                 </a:solidFill>
               </a:defRPr>
             </a:pPr>
             <a:r>
-              <a:t>Interactive Exporter Interface</a:t>
-            </a:r>
-          </a:p>
-          <a:p>
-            <a:pPr>
-              <a:spcAft>
-                <a:spcPts val="400"/>
+              <a:t>Dashboard Features</a:t>
+            </a:r>
+          </a:p>
+          <a:p>
+            <a:pPr>
+              <a:spcAft>
+                <a:spcPts val="300"/>
               </a:spcAft>
               <a:defRPr sz="900" b="1">
                 <a:solidFill>
@@ -9268,256 +8676,82 @@
               </a:defRPr>
             </a:pPr>
             <a:r>
-              <a:t>[FRONTEND DASHBOARD]</a:t>
-            </a:r>
-          </a:p>
-          <a:p>
-            <a:pPr>
-              <a:spcAft>
-                <a:spcPts val="300"/>
-              </a:spcAft>
-              <a:defRPr sz="1100">
+              <a:t>[LIVE DASHBOARD]</a:t>
+            </a:r>
+          </a:p>
+          <a:p>
+            <a:pPr>
+              <a:spcAft>
+                <a:spcPts val="200"/>
+              </a:spcAft>
+              <a:defRPr sz="1000">
                 <a:solidFill>
                   <a:srgbClr val="64748B"/>
                 </a:solidFill>
               </a:defRPr>
             </a:pPr>
             <a:r>
-              <a:t>• 1. Urdu Text &amp; Voice Input Box with live microphone simulation.</a:t>
-            </a:r>
-          </a:p>
-          <a:p>
-            <a:pPr>
-              <a:spcAft>
-                <a:spcPts val="300"/>
-              </a:spcAft>
-              <a:defRPr sz="1100">
+              <a:t>• 1. Bilingual Header: CoreTech Innovation branding, Sialkot/Faisalabad cluster badge, and PPT Deck link.</a:t>
+            </a:r>
+          </a:p>
+          <a:p>
+            <a:pPr>
+              <a:spcAft>
+                <a:spcPts val="200"/>
+              </a:spcAft>
+              <a:defRPr sz="1000">
                 <a:solidFill>
                   <a:srgbClr val="64748B"/>
                 </a:solidFill>
               </a:defRPr>
             </a:pPr>
             <a:r>
-              <a:t>• 2. One-Click Exporter Presets (Watches, Toys, Footballs, Surgical, Leather, Towels).</a:t>
-            </a:r>
-          </a:p>
-          <a:p>
-            <a:pPr>
-              <a:spcAft>
-                <a:spcPts val="300"/>
-              </a:spcAft>
-              <a:defRPr sz="1100">
+              <a:t>• 2. One-Click Exporter Presets: Pre-configured test benchmarks for Leather Jackets, Watches, Toys, Footballs, Surgical Scissors, and Towels.</a:t>
+            </a:r>
+          </a:p>
+          <a:p>
+            <a:pPr>
+              <a:spcAft>
+                <a:spcPts val="200"/>
+              </a:spcAft>
+              <a:defRPr sz="1000">
                 <a:solidFill>
                   <a:srgbClr val="64748B"/>
                 </a:solidFill>
               </a:defRPr>
             </a:pPr>
             <a:r>
-              <a:t>• 3. Live Extracted Attribute Chips (NER Validation).</a:t>
-            </a:r>
-          </a:p>
-          <a:p>
-            <a:pPr>
-              <a:spcAft>
-                <a:spcPts val="300"/>
-              </a:spcAft>
-              <a:defRPr sz="1100">
+              <a:t>• 3. Voice / Text Input Box: Exporter enters natural Urdu or Roman Urdu with microphone capture simulation.</a:t>
+            </a:r>
+          </a:p>
+          <a:p>
+            <a:pPr>
+              <a:spcAft>
+                <a:spcPts val="200"/>
+              </a:spcAft>
+              <a:defRPr sz="1000">
                 <a:solidFill>
                   <a:srgbClr val="64748B"/>
                 </a:solidFill>
               </a:defRPr>
             </a:pPr>
             <a:r>
-              <a:t>• 4. Smart Follow-Up Card in natural Urdu font (Noto Nastaliq Urdu).</a:t>
-            </a:r>
-          </a:p>
-          <a:p>
-            <a:pPr>
-              <a:spcAft>
-                <a:spcPts val="300"/>
-              </a:spcAft>
-              <a:defRPr sz="1100">
+              <a:t>• 4. Target Marketplace Selector: One-click selection for Alibaba (B2B), Amazon (B2C), or Both.</a:t>
+            </a:r>
+          </a:p>
+          <a:p>
+            <a:pPr>
+              <a:spcAft>
+                <a:spcPts val="200"/>
+              </a:spcAft>
+              <a:defRPr sz="1000">
                 <a:solidFill>
                   <a:srgbClr val="64748B"/>
                 </a:solidFill>
               </a:defRPr>
             </a:pPr>
             <a:r>
-              <a:t>• 5. Generated English Listing Preview (Title, 5 Bullets, 15 Keywords).</a:t>
-            </a:r>
-          </a:p>
-          <a:p>
-            <a:pPr>
-              <a:spcAft>
-                <a:spcPts val="300"/>
-              </a:spcAft>
-              <a:defRPr sz="1100">
-                <a:solidFill>
-                  <a:srgbClr val="64748B"/>
-                </a:solidFill>
-              </a:defRPr>
-            </a:pPr>
-            <a:r>
-              <a:t>• 6. Urdu Summary Card for final human verification before publishing.</a:t>
-            </a:r>
-          </a:p>
-        </p:txBody>
-      </p:sp>
-      <p:sp>
-        <p:nvSpPr>
-          <p:cNvPr id="7" name="Rounded Rectangle 6"/>
-          <p:cNvSpPr/>
-          <p:nvPr/>
-        </p:nvSpPr>
-        <p:spPr>
-          <a:xfrm>
-            <a:off x="6217920" y="1371600"/>
-            <a:ext cx="5120640" cy="4754880"/>
-          </a:xfrm>
-          <a:prstGeom prst="roundRect">
-            <a:avLst/>
-          </a:prstGeom>
-          <a:solidFill>
-            <a:srgbClr val="FFFFFF"/>
-          </a:solidFill>
-          <a:ln w="19050">
-            <a:solidFill>
-              <a:srgbClr val="10B981"/>
-            </a:solidFill>
-          </a:ln>
-        </p:spPr>
-        <p:style>
-          <a:lnRef idx="1">
-            <a:schemeClr val="accent1"/>
-          </a:lnRef>
-          <a:fillRef idx="3">
-            <a:schemeClr val="accent1"/>
-          </a:fillRef>
-          <a:effectRef idx="2">
-            <a:schemeClr val="accent1"/>
-          </a:effectRef>
-          <a:fontRef idx="minor">
-            <a:schemeClr val="lt1"/>
-          </a:fontRef>
-        </p:style>
-        <p:txBody>
-          <a:bodyPr rtlCol="0" anchor="ctr" wrap="square" lIns="228600" tIns="182880" rIns="228600" bIns="182880"/>
-          <a:lstStyle/>
-          <a:p>
-            <a:pPr algn="ctr">
-              <a:defRPr sz="1400" b="1">
-                <a:solidFill>
-                  <a:srgbClr val="0F172A"/>
-                </a:solidFill>
-              </a:defRPr>
-            </a:pPr>
-            <a:r>
-              <a:t>Real-Time Analytics &amp; Scoring</a:t>
-            </a:r>
-          </a:p>
-          <a:p>
-            <a:pPr>
-              <a:spcAft>
-                <a:spcPts val="400"/>
-              </a:spcAft>
-              <a:defRPr sz="900" b="1">
-                <a:solidFill>
-                  <a:srgbClr val="10B981"/>
-                </a:solidFill>
-              </a:defRPr>
-            </a:pPr>
-            <a:r>
-              <a:t>[LIVE METRICS &amp; RADAR]</a:t>
-            </a:r>
-          </a:p>
-          <a:p>
-            <a:pPr>
-              <a:spcAft>
-                <a:spcPts val="300"/>
-              </a:spcAft>
-              <a:defRPr sz="1100">
-                <a:solidFill>
-                  <a:srgbClr val="64748B"/>
-                </a:solidFill>
-              </a:defRPr>
-            </a:pPr>
-            <a:r>
-              <a:t>• Composite Quality Scorer (0-100) with visual progress meters.</a:t>
-            </a:r>
-          </a:p>
-          <a:p>
-            <a:pPr>
-              <a:spcAft>
-                <a:spcPts val="300"/>
-              </a:spcAft>
-              <a:defRPr sz="1100">
-                <a:solidFill>
-                  <a:srgbClr val="64748B"/>
-                </a:solidFill>
-              </a:defRPr>
-            </a:pPr>
-            <a:r>
-              <a:t>• Rubric breakdown across 5 official judging dimensions.</a:t>
-            </a:r>
-          </a:p>
-          <a:p>
-            <a:pPr>
-              <a:spcAft>
-                <a:spcPts val="300"/>
-              </a:spcAft>
-              <a:defRPr sz="1100">
-                <a:solidFill>
-                  <a:srgbClr val="64748B"/>
-                </a:solidFill>
-              </a:defRPr>
-            </a:pPr>
-            <a:r>
-              <a:t>• Auto-Improve Feedback Loop notification (&amp;ge;80 target).</a:t>
-            </a:r>
-          </a:p>
-          <a:p>
-            <a:pPr>
-              <a:spcAft>
-                <a:spcPts val="300"/>
-              </a:spcAft>
-              <a:defRPr sz="1100">
-                <a:solidFill>
-                  <a:srgbClr val="64748B"/>
-                </a:solidFill>
-              </a:defRPr>
-            </a:pPr>
-            <a:r>
-              <a:t>• Market Pricing Recommendation Card ($48 suggested vs $40 base).</a:t>
-            </a:r>
-          </a:p>
-          <a:p>
-            <a:pPr>
-              <a:spcAft>
-                <a:spcPts val="300"/>
-              </a:spcAft>
-              <a:defRPr sz="1100">
-                <a:solidFill>
-                  <a:srgbClr val="64748B"/>
-                </a:solidFill>
-              </a:defRPr>
-            </a:pPr>
-            <a:r>
-              <a:t>• Payment Gateway Optimizer (Payoneer vs Wise fee calculator).</a:t>
-            </a:r>
-          </a:p>
-          <a:p>
-            <a:pPr>
-              <a:spcAft>
-                <a:spcPts val="300"/>
-              </a:spcAft>
-              <a:defRPr sz="1100">
-                <a:solidFill>
-                  <a:srgbClr val="64748B"/>
-                </a:solidFill>
-              </a:defRPr>
-            </a:pPr>
-            <a:r>
-              <a:t>• FBR 0.25% Export Withholding Tax &amp; e-PRC guidance.</a:t>
+              <a:t>• 5. Target Country Selector: USA, UK, Germany, UAE.</a:t>
             </a:r>
           </a:p>
         </p:txBody>
@@ -9593,43 +8827,8 @@
         </p:nvSpPr>
         <p:spPr>
           <a:xfrm>
-            <a:off x="731520" y="137160"/>
+            <a:off x="731520" y="109728"/>
             <a:ext cx="7315200" cy="274320"/>
-          </a:xfrm>
-          <a:prstGeom prst="rect">
-            <a:avLst/>
-          </a:prstGeom>
-          <a:noFill/>
-        </p:spPr>
-        <p:txBody>
-          <a:bodyPr wrap="square">
-            <a:spAutoFit/>
-          </a:bodyPr>
-          <a:lstStyle/>
-          <a:p>
-            <a:pPr>
-              <a:defRPr sz="1000" b="1">
-                <a:solidFill>
-                  <a:srgbClr val="0284C7"/>
-                </a:solidFill>
-              </a:defRPr>
-            </a:pPr>
-            <a:r>
-              <a:t>CORETECH INNOVATION | NLP HACKATHON 2026</a:t>
-            </a:r>
-          </a:p>
-        </p:txBody>
-      </p:sp>
-      <p:sp>
-        <p:nvSpPr>
-          <p:cNvPr id="4" name="TextBox 3"/>
-          <p:cNvSpPr txBox="1"/>
-          <p:nvPr/>
-        </p:nvSpPr>
-        <p:spPr>
-          <a:xfrm>
-            <a:off x="731520" y="365760"/>
-            <a:ext cx="9144000" cy="502920"/>
           </a:xfrm>
           <a:prstGeom prst="rect">
             <a:avLst/>
@@ -9643,28 +8842,28 @@
           <a:lstStyle/>
           <a:p>
             <a:pPr>
-              <a:defRPr sz="2000" b="1">
-                <a:solidFill>
-                  <a:srgbClr val="FFFFFF"/>
-                </a:solidFill>
-              </a:defRPr>
-            </a:pPr>
-            <a:r>
-              <a:t>Live Marketplace Integration: Alibaba &amp; Amazon SP-API</a:t>
-            </a:r>
-          </a:p>
-        </p:txBody>
-      </p:sp>
-      <p:sp>
-        <p:nvSpPr>
-          <p:cNvPr id="5" name="TextBox 4"/>
+              <a:defRPr sz="1000" b="1">
+                <a:solidFill>
+                  <a:srgbClr val="0284C7"/>
+                </a:solidFill>
+              </a:defRPr>
+            </a:pPr>
+            <a:r>
+              <a:t>CORETECH INNOVATION | NLP HACKATHON 2026</a:t>
+            </a:r>
+          </a:p>
+        </p:txBody>
+      </p:sp>
+      <p:sp>
+        <p:nvSpPr>
+          <p:cNvPr id="4" name="TextBox 3"/>
           <p:cNvSpPr txBox="1"/>
           <p:nvPr/>
         </p:nvSpPr>
         <p:spPr>
           <a:xfrm>
-            <a:off x="9601200" y="320040"/>
-            <a:ext cx="2011680" cy="365760"/>
+            <a:off x="731520" y="347472"/>
+            <a:ext cx="9144000" cy="502920"/>
           </a:xfrm>
           <a:prstGeom prst="rect">
             <a:avLst/>
@@ -9678,6 +8877,41 @@
           <a:lstStyle/>
           <a:p>
             <a:pPr>
+              <a:defRPr sz="2000" b="1">
+                <a:solidFill>
+                  <a:srgbClr val="FFFFFF"/>
+                </a:solidFill>
+              </a:defRPr>
+            </a:pPr>
+            <a:r>
+              <a:t>Live UI Screenshot: Smart Urdu Slot-Filling Loop</a:t>
+            </a:r>
+          </a:p>
+        </p:txBody>
+      </p:sp>
+      <p:sp>
+        <p:nvSpPr>
+          <p:cNvPr id="5" name="TextBox 4"/>
+          <p:cNvSpPr txBox="1"/>
+          <p:nvPr/>
+        </p:nvSpPr>
+        <p:spPr>
+          <a:xfrm>
+            <a:off x="9326880" y="320040"/>
+            <a:ext cx="2377440" cy="365760"/>
+          </a:xfrm>
+          <a:prstGeom prst="rect">
+            <a:avLst/>
+          </a:prstGeom>
+          <a:noFill/>
+        </p:spPr>
+        <p:txBody>
+          <a:bodyPr wrap="none">
+            <a:spAutoFit/>
+          </a:bodyPr>
+          <a:lstStyle/>
+          <a:p>
+            <a:pPr>
               <a:defRPr sz="900" b="1">
                 <a:solidFill>
                   <a:srgbClr val="10B981"/>
@@ -9690,16 +8924,75 @@
           </a:p>
         </p:txBody>
       </p:sp>
-      <p:sp>
-        <p:nvSpPr>
-          <p:cNvPr id="6" name="Rounded Rectangle 5"/>
+      <p:pic>
+        <p:nvPicPr>
+          <p:cNvPr id="6" name="Picture 5" descr="ss_slot_followup.png"/>
+          <p:cNvPicPr>
+            <a:picLocks noChangeAspect="1"/>
+          </p:cNvPicPr>
+          <p:nvPr/>
+        </p:nvPicPr>
+        <p:blipFill>
+          <a:blip r:embed="rId2"/>
+          <a:stretch>
+            <a:fillRect/>
+          </a:stretch>
+        </p:blipFill>
+        <p:spPr>
+          <a:xfrm>
+            <a:off x="731520" y="1280160"/>
+            <a:ext cx="6766560" cy="4937760"/>
+          </a:xfrm>
+          <a:prstGeom prst="rect">
+            <a:avLst/>
+          </a:prstGeom>
+        </p:spPr>
+      </p:pic>
+      <p:sp>
+        <p:nvSpPr>
+          <p:cNvPr id="7" name="TextBox 6"/>
+          <p:cNvSpPr txBox="1"/>
+          <p:nvPr/>
+        </p:nvSpPr>
+        <p:spPr>
+          <a:xfrm>
+            <a:off x="731520" y="6263640"/>
+            <a:ext cx="6766560" cy="320040"/>
+          </a:xfrm>
+          <a:prstGeom prst="rect">
+            <a:avLst/>
+          </a:prstGeom>
+          <a:noFill/>
+        </p:spPr>
+        <p:txBody>
+          <a:bodyPr wrap="none">
+            <a:spAutoFit/>
+          </a:bodyPr>
+          <a:lstStyle/>
+          <a:p>
+            <a:pPr>
+              <a:defRPr sz="900" b="1">
+                <a:solidFill>
+                  <a:srgbClr val="64748B"/>
+                </a:solidFill>
+              </a:defRPr>
+            </a:pPr>
+            <a:r>
+              <a:t>Screenshot 2: AI Dialog Manager detecting missing MOQ on Surgical Scissors and prompting in Urdu</a:t>
+            </a:r>
+          </a:p>
+        </p:txBody>
+      </p:sp>
+      <p:sp>
+        <p:nvSpPr>
+          <p:cNvPr id="8" name="Rounded Rectangle 7"/>
           <p:cNvSpPr/>
           <p:nvPr/>
         </p:nvSpPr>
         <p:spPr>
           <a:xfrm>
-            <a:off x="731520" y="1371600"/>
-            <a:ext cx="5120640" cy="4754880"/>
+            <a:off x="7772400" y="1280160"/>
+            <a:ext cx="3657600" cy="4937760"/>
           </a:xfrm>
           <a:prstGeom prst="roundRect">
             <a:avLst/>
@@ -9728,24 +9021,24 @@
           </a:fontRef>
         </p:style>
         <p:txBody>
-          <a:bodyPr rtlCol="0" anchor="ctr" wrap="square" lIns="228600" tIns="182880" rIns="228600" bIns="182880"/>
+          <a:bodyPr rtlCol="0" anchor="ctr" wrap="square" lIns="182880" tIns="164592" rIns="182880" bIns="164592"/>
           <a:lstStyle/>
           <a:p>
             <a:pPr algn="ctr">
-              <a:defRPr sz="1400" b="1">
+              <a:defRPr sz="1300" b="1">
                 <a:solidFill>
                   <a:srgbClr val="0F172A"/>
                 </a:solidFill>
               </a:defRPr>
             </a:pPr>
             <a:r>
-              <a:t>Alibaba Trade Showcase Preview</a:t>
-            </a:r>
-          </a:p>
-          <a:p>
-            <a:pPr>
-              <a:spcAft>
-                <a:spcPts val="400"/>
+              <a:t>Conversational Slot Filling</a:t>
+            </a:r>
+          </a:p>
+          <a:p>
+            <a:pPr>
+              <a:spcAft>
+                <a:spcPts val="300"/>
               </a:spcAft>
               <a:defRPr sz="900" b="1">
                 <a:solidFill>
@@ -9754,256 +9047,67 @@
               </a:defRPr>
             </a:pPr>
             <a:r>
-              <a:t>[ALIBABA B2B EXPORT]</a:t>
-            </a:r>
-          </a:p>
-          <a:p>
-            <a:pPr>
-              <a:spcAft>
-                <a:spcPts val="300"/>
-              </a:spcAft>
-              <a:defRPr sz="1100">
+              <a:t>[URDU DIALOGUE LOOP]</a:t>
+            </a:r>
+          </a:p>
+          <a:p>
+            <a:pPr>
+              <a:spcAft>
+                <a:spcPts val="200"/>
+              </a:spcAft>
+              <a:defRPr sz="1000">
                 <a:solidFill>
                   <a:srgbClr val="64748B"/>
                 </a:solidFill>
               </a:defRPr>
             </a:pPr>
             <a:r>
-              <a:t>• Live Route: /marketplace/alibaba/{listing_id}</a:t>
-            </a:r>
-          </a:p>
-          <a:p>
-            <a:pPr>
-              <a:spcAft>
-                <a:spcPts val="300"/>
-              </a:spcAft>
-              <a:defRPr sz="1100">
+              <a:t>• • Missing Attribute Detection: The Pydantic schema checks if required commercial slots are present.</a:t>
+            </a:r>
+          </a:p>
+          <a:p>
+            <a:pPr>
+              <a:spcAft>
+                <a:spcPts val="200"/>
+              </a:spcAft>
+              <a:defRPr sz="1000">
                 <a:solidFill>
                   <a:srgbClr val="64748B"/>
                 </a:solidFill>
               </a:defRPr>
             </a:pPr>
             <a:r>
-              <a:t>• Verified Gold Supplier badge (Pakistan Country Pavilion).</a:t>
-            </a:r>
-          </a:p>
-          <a:p>
-            <a:pPr>
-              <a:spcAft>
-                <a:spcPts val="300"/>
-              </a:spcAft>
-              <a:defRPr sz="1100">
+              <a:t>• • Natural Urdu Prompting: When missing MOQ, the system renders a prominent conversational alert card in Urdu font (Noto Nastaliq Urdu).</a:t>
+            </a:r>
+          </a:p>
+          <a:p>
+            <a:pPr>
+              <a:spcAft>
+                <a:spcPts val="200"/>
+              </a:spcAft>
+              <a:defRPr sz="1000">
                 <a:solidFill>
                   <a:srgbClr val="64748B"/>
                 </a:solidFill>
               </a:defRPr>
             </a:pPr>
             <a:r>
-              <a:t>• Trade Assurance Protection guarantee.</a:t>
-            </a:r>
-          </a:p>
-          <a:p>
-            <a:pPr>
-              <a:spcAft>
-                <a:spcPts val="300"/>
-              </a:spcAft>
-              <a:defRPr sz="1100">
+              <a:t>• • Zero Middleman Friction: The exporter types an answer casually (e.g. 'MOQ 500 pieces').</a:t>
+            </a:r>
+          </a:p>
+          <a:p>
+            <a:pPr>
+              <a:spcAft>
+                <a:spcPts val="200"/>
+              </a:spcAft>
+              <a:defRPr sz="1000">
                 <a:solidFill>
                   <a:srgbClr val="64748B"/>
                 </a:solidFill>
               </a:defRPr>
             </a:pPr>
             <a:r>
-              <a:t>• Tiered FOB Price range &amp; Minimum Order Quantity (MOQ).</a:t>
-            </a:r>
-          </a:p>
-          <a:p>
-            <a:pPr>
-              <a:spcAft>
-                <a:spcPts val="300"/>
-              </a:spcAft>
-              <a:defRPr sz="1100">
-                <a:solidFill>
-                  <a:srgbClr val="64748B"/>
-                </a:solidFill>
-              </a:defRPr>
-            </a:pPr>
-            <a:r>
-              <a:t>• Custom logo embossing &amp; OEM packaging specifications.</a:t>
-            </a:r>
-          </a:p>
-          <a:p>
-            <a:pPr>
-              <a:spcAft>
-                <a:spcPts val="300"/>
-              </a:spcAft>
-              <a:defRPr sz="1100">
-                <a:solidFill>
-                  <a:srgbClr val="64748B"/>
-                </a:solidFill>
-              </a:defRPr>
-            </a:pPr>
-            <a:r>
-              <a:t>• Interactive 'Contact Supplier' &amp; 'Request Sample' actions.</a:t>
-            </a:r>
-          </a:p>
-        </p:txBody>
-      </p:sp>
-      <p:sp>
-        <p:nvSpPr>
-          <p:cNvPr id="7" name="Rounded Rectangle 6"/>
-          <p:cNvSpPr/>
-          <p:nvPr/>
-        </p:nvSpPr>
-        <p:spPr>
-          <a:xfrm>
-            <a:off x="6217920" y="1371600"/>
-            <a:ext cx="5120640" cy="4754880"/>
-          </a:xfrm>
-          <a:prstGeom prst="roundRect">
-            <a:avLst/>
-          </a:prstGeom>
-          <a:solidFill>
-            <a:srgbClr val="FFFFFF"/>
-          </a:solidFill>
-          <a:ln w="19050">
-            <a:solidFill>
-              <a:srgbClr val="0F172A"/>
-            </a:solidFill>
-          </a:ln>
-        </p:spPr>
-        <p:style>
-          <a:lnRef idx="1">
-            <a:schemeClr val="accent1"/>
-          </a:lnRef>
-          <a:fillRef idx="3">
-            <a:schemeClr val="accent1"/>
-          </a:fillRef>
-          <a:effectRef idx="2">
-            <a:schemeClr val="accent1"/>
-          </a:effectRef>
-          <a:fontRef idx="minor">
-            <a:schemeClr val="lt1"/>
-          </a:fontRef>
-        </p:style>
-        <p:txBody>
-          <a:bodyPr rtlCol="0" anchor="ctr" wrap="square" lIns="228600" tIns="182880" rIns="228600" bIns="182880"/>
-          <a:lstStyle/>
-          <a:p>
-            <a:pPr algn="ctr">
-              <a:defRPr sz="1400" b="1">
-                <a:solidFill>
-                  <a:srgbClr val="0F172A"/>
-                </a:solidFill>
-              </a:defRPr>
-            </a:pPr>
-            <a:r>
-              <a:t>Amazon SP-API Product Detail Preview</a:t>
-            </a:r>
-          </a:p>
-          <a:p>
-            <a:pPr>
-              <a:spcAft>
-                <a:spcPts val="400"/>
-              </a:spcAft>
-              <a:defRPr sz="900" b="1">
-                <a:solidFill>
-                  <a:srgbClr val="10B981"/>
-                </a:solidFill>
-              </a:defRPr>
-            </a:pPr>
-            <a:r>
-              <a:t>[AMAZON SP-API CATALOG]</a:t>
-            </a:r>
-          </a:p>
-          <a:p>
-            <a:pPr>
-              <a:spcAft>
-                <a:spcPts val="300"/>
-              </a:spcAft>
-              <a:defRPr sz="1100">
-                <a:solidFill>
-                  <a:srgbClr val="64748B"/>
-                </a:solidFill>
-              </a:defRPr>
-            </a:pPr>
-            <a:r>
-              <a:t>• Live Route: /marketplace/amazon/{listing_id}</a:t>
-            </a:r>
-          </a:p>
-          <a:p>
-            <a:pPr>
-              <a:spcAft>
-                <a:spcPts val="300"/>
-              </a:spcAft>
-              <a:defRPr sz="1100">
-                <a:solidFill>
-                  <a:srgbClr val="64748B"/>
-                </a:solidFill>
-              </a:defRPr>
-            </a:pPr>
-            <a:r>
-              <a:t>• Amazon Seller Central catalog compliance.</a:t>
-            </a:r>
-          </a:p>
-          <a:p>
-            <a:pPr>
-              <a:spcAft>
-                <a:spcPts val="300"/>
-              </a:spcAft>
-              <a:defRPr sz="1100">
-                <a:solidFill>
-                  <a:srgbClr val="64748B"/>
-                </a:solidFill>
-              </a:defRPr>
-            </a:pPr>
-            <a:r>
-              <a:t>• Automatic ASIN allocation (e.g. B08F2A...) &amp; SKU generation.</a:t>
-            </a:r>
-          </a:p>
-          <a:p>
-            <a:pPr>
-              <a:spcAft>
-                <a:spcPts val="300"/>
-              </a:spcAft>
-              <a:defRPr sz="1100">
-                <a:solidFill>
-                  <a:srgbClr val="64748B"/>
-                </a:solidFill>
-              </a:defRPr>
-            </a:pPr>
-            <a:r>
-              <a:t>• Standard Buy Box with Price, Cart, and One-Click Buy.</a:t>
-            </a:r>
-          </a:p>
-          <a:p>
-            <a:pPr>
-              <a:spcAft>
-                <a:spcPts val="300"/>
-              </a:spcAft>
-              <a:defRPr sz="1100">
-                <a:solidFill>
-                  <a:srgbClr val="64748B"/>
-                </a:solidFill>
-              </a:defRPr>
-            </a:pPr>
-            <a:r>
-              <a:t>• 5 Benefit-driven bullets &amp; Product Specifications table.</a:t>
-            </a:r>
-          </a:p>
-          <a:p>
-            <a:pPr>
-              <a:spcAft>
-                <a:spcPts val="300"/>
-              </a:spcAft>
-              <a:defRPr sz="1100">
-                <a:solidFill>
-                  <a:srgbClr val="64748B"/>
-                </a:solidFill>
-              </a:defRPr>
-            </a:pPr>
-            <a:r>
-              <a:t>• Country of Origin: Pakistan export certification.</a:t>
+              <a:t>• • Dynamic Product-Specific Questions: For watches, it asks about case material; for toys, child safety &amp; age group; for balls, ball size matrix.</a:t>
             </a:r>
           </a:p>
         </p:txBody>
@@ -10079,43 +9183,8 @@
         </p:nvSpPr>
         <p:spPr>
           <a:xfrm>
-            <a:off x="731520" y="137160"/>
+            <a:off x="731520" y="109728"/>
             <a:ext cx="7315200" cy="274320"/>
-          </a:xfrm>
-          <a:prstGeom prst="rect">
-            <a:avLst/>
-          </a:prstGeom>
-          <a:noFill/>
-        </p:spPr>
-        <p:txBody>
-          <a:bodyPr wrap="square">
-            <a:spAutoFit/>
-          </a:bodyPr>
-          <a:lstStyle/>
-          <a:p>
-            <a:pPr>
-              <a:defRPr sz="1000" b="1">
-                <a:solidFill>
-                  <a:srgbClr val="0284C7"/>
-                </a:solidFill>
-              </a:defRPr>
-            </a:pPr>
-            <a:r>
-              <a:t>CORETECH INNOVATION | NLP HACKATHON 2026</a:t>
-            </a:r>
-          </a:p>
-        </p:txBody>
-      </p:sp>
-      <p:sp>
-        <p:nvSpPr>
-          <p:cNvPr id="4" name="TextBox 3"/>
-          <p:cNvSpPr txBox="1"/>
-          <p:nvPr/>
-        </p:nvSpPr>
-        <p:spPr>
-          <a:xfrm>
-            <a:off x="731520" y="365760"/>
-            <a:ext cx="9144000" cy="502920"/>
           </a:xfrm>
           <a:prstGeom prst="rect">
             <a:avLst/>
@@ -10129,28 +9198,28 @@
           <a:lstStyle/>
           <a:p>
             <a:pPr>
-              <a:defRPr sz="2000" b="1">
-                <a:solidFill>
-                  <a:srgbClr val="FFFFFF"/>
-                </a:solidFill>
-              </a:defRPr>
-            </a:pPr>
-            <a:r>
-              <a:t>Autonomous Negotiation: Buyer Communication Agent</a:t>
-            </a:r>
-          </a:p>
-        </p:txBody>
-      </p:sp>
-      <p:sp>
-        <p:nvSpPr>
-          <p:cNvPr id="5" name="TextBox 4"/>
+              <a:defRPr sz="1000" b="1">
+                <a:solidFill>
+                  <a:srgbClr val="0284C7"/>
+                </a:solidFill>
+              </a:defRPr>
+            </a:pPr>
+            <a:r>
+              <a:t>CORETECH INNOVATION | NLP HACKATHON 2026</a:t>
+            </a:r>
+          </a:p>
+        </p:txBody>
+      </p:sp>
+      <p:sp>
+        <p:nvSpPr>
+          <p:cNvPr id="4" name="TextBox 3"/>
           <p:cNvSpPr txBox="1"/>
           <p:nvPr/>
         </p:nvSpPr>
         <p:spPr>
           <a:xfrm>
-            <a:off x="9601200" y="320040"/>
-            <a:ext cx="2011680" cy="365760"/>
+            <a:off x="731520" y="347472"/>
+            <a:ext cx="9144000" cy="502920"/>
           </a:xfrm>
           <a:prstGeom prst="rect">
             <a:avLst/>
@@ -10164,6 +9233,41 @@
           <a:lstStyle/>
           <a:p>
             <a:pPr>
+              <a:defRPr sz="2000" b="1">
+                <a:solidFill>
+                  <a:srgbClr val="FFFFFF"/>
+                </a:solidFill>
+              </a:defRPr>
+            </a:pPr>
+            <a:r>
+              <a:t>Live UI Screenshot: RAG Listing Preview &amp; Quality Scorer</a:t>
+            </a:r>
+          </a:p>
+        </p:txBody>
+      </p:sp>
+      <p:sp>
+        <p:nvSpPr>
+          <p:cNvPr id="5" name="TextBox 4"/>
+          <p:cNvSpPr txBox="1"/>
+          <p:nvPr/>
+        </p:nvSpPr>
+        <p:spPr>
+          <a:xfrm>
+            <a:off x="9326880" y="320040"/>
+            <a:ext cx="2377440" cy="365760"/>
+          </a:xfrm>
+          <a:prstGeom prst="rect">
+            <a:avLst/>
+          </a:prstGeom>
+          <a:noFill/>
+        </p:spPr>
+        <p:txBody>
+          <a:bodyPr wrap="none">
+            <a:spAutoFit/>
+          </a:bodyPr>
+          <a:lstStyle/>
+          <a:p>
+            <a:pPr>
               <a:defRPr sz="900" b="1">
                 <a:solidFill>
                   <a:srgbClr val="10B981"/>
@@ -10176,230 +9280,61 @@
           </a:p>
         </p:txBody>
       </p:sp>
-      <p:sp>
-        <p:nvSpPr>
-          <p:cNvPr id="6" name="Rounded Rectangle 5"/>
-          <p:cNvSpPr/>
-          <p:nvPr/>
-        </p:nvSpPr>
-        <p:spPr>
-          <a:xfrm>
-            <a:off x="731520" y="1371600"/>
-            <a:ext cx="3291840" cy="4754880"/>
-          </a:xfrm>
-          <a:prstGeom prst="roundRect">
-            <a:avLst/>
-          </a:prstGeom>
-          <a:solidFill>
-            <a:srgbClr val="FFFFFF"/>
-          </a:solidFill>
-          <a:ln w="19050">
-            <a:solidFill>
-              <a:srgbClr val="0284C7"/>
-            </a:solidFill>
-          </a:ln>
-        </p:spPr>
-        <p:style>
-          <a:lnRef idx="1">
-            <a:schemeClr val="accent1"/>
-          </a:lnRef>
-          <a:fillRef idx="3">
-            <a:schemeClr val="accent1"/>
-          </a:fillRef>
-          <a:effectRef idx="2">
-            <a:schemeClr val="accent1"/>
-          </a:effectRef>
-          <a:fontRef idx="minor">
-            <a:schemeClr val="lt1"/>
-          </a:fontRef>
-        </p:style>
-        <p:txBody>
-          <a:bodyPr rtlCol="0" anchor="ctr" wrap="square" lIns="228600" tIns="182880" rIns="228600" bIns="182880"/>
-          <a:lstStyle/>
-          <a:p>
-            <a:pPr algn="ctr">
-              <a:defRPr sz="1400" b="1">
-                <a:solidFill>
-                  <a:srgbClr val="0F172A"/>
-                </a:solidFill>
-              </a:defRPr>
-            </a:pPr>
-            <a:r>
-              <a:t>1. Buyer Inquiry Received</a:t>
-            </a:r>
-          </a:p>
-          <a:p>
-            <a:pPr>
-              <a:spcAft>
-                <a:spcPts val="400"/>
-              </a:spcAft>
+      <p:pic>
+        <p:nvPicPr>
+          <p:cNvPr id="6" name="Picture 5" descr="ss_listing_preview.png"/>
+          <p:cNvPicPr>
+            <a:picLocks noChangeAspect="1"/>
+          </p:cNvPicPr>
+          <p:nvPr/>
+        </p:nvPicPr>
+        <p:blipFill>
+          <a:blip r:embed="rId2"/>
+          <a:stretch>
+            <a:fillRect/>
+          </a:stretch>
+        </p:blipFill>
+        <p:spPr>
+          <a:xfrm>
+            <a:off x="731520" y="1280160"/>
+            <a:ext cx="6766560" cy="4937760"/>
+          </a:xfrm>
+          <a:prstGeom prst="rect">
+            <a:avLst/>
+          </a:prstGeom>
+        </p:spPr>
+      </p:pic>
+      <p:sp>
+        <p:nvSpPr>
+          <p:cNvPr id="7" name="TextBox 6"/>
+          <p:cNvSpPr txBox="1"/>
+          <p:nvPr/>
+        </p:nvSpPr>
+        <p:spPr>
+          <a:xfrm>
+            <a:off x="731520" y="6263640"/>
+            <a:ext cx="6766560" cy="320040"/>
+          </a:xfrm>
+          <a:prstGeom prst="rect">
+            <a:avLst/>
+          </a:prstGeom>
+          <a:noFill/>
+        </p:spPr>
+        <p:txBody>
+          <a:bodyPr wrap="none">
+            <a:spAutoFit/>
+          </a:bodyPr>
+          <a:lstStyle/>
+          <a:p>
+            <a:pPr>
               <a:defRPr sz="900" b="1">
                 <a:solidFill>
-                  <a:srgbClr val="10B981"/>
-                </a:solidFill>
-              </a:defRPr>
-            </a:pPr>
-            <a:r>
-              <a:t>[INTENT CLASSIFIER]</a:t>
-            </a:r>
-          </a:p>
-          <a:p>
-            <a:pPr>
-              <a:spcAft>
-                <a:spcPts val="300"/>
-              </a:spcAft>
-              <a:defRPr sz="1100">
-                <a:solidFill>
                   <a:srgbClr val="64748B"/>
                 </a:solidFill>
               </a:defRPr>
             </a:pPr>
             <a:r>
-              <a:t>• International buyer sends RFQ or inquiry in English.</a:t>
-            </a:r>
-          </a:p>
-          <a:p>
-            <a:pPr>
-              <a:spcAft>
-                <a:spcPts val="300"/>
-              </a:spcAft>
-              <a:defRPr sz="1100">
-                <a:solidFill>
-                  <a:srgbClr val="64748B"/>
-                </a:solidFill>
-              </a:defRPr>
-            </a:pPr>
-            <a:r>
-              <a:t>• Agent classifies intent: MOQ, Custom Pricing, Sample Request, Shipping.</a:t>
-            </a:r>
-          </a:p>
-          <a:p>
-            <a:pPr>
-              <a:spcAft>
-                <a:spcPts val="300"/>
-              </a:spcAft>
-              <a:defRPr sz="1100">
-                <a:solidFill>
-                  <a:srgbClr val="64748B"/>
-                </a:solidFill>
-              </a:defRPr>
-            </a:pPr>
-            <a:r>
-              <a:t>• Catalog queries auto-answered in fluent business English.</a:t>
-            </a:r>
-          </a:p>
-        </p:txBody>
-      </p:sp>
-      <p:sp>
-        <p:nvSpPr>
-          <p:cNvPr id="7" name="Rounded Rectangle 6"/>
-          <p:cNvSpPr/>
-          <p:nvPr/>
-        </p:nvSpPr>
-        <p:spPr>
-          <a:xfrm>
-            <a:off x="4389120" y="1371600"/>
-            <a:ext cx="3291840" cy="4754880"/>
-          </a:xfrm>
-          <a:prstGeom prst="roundRect">
-            <a:avLst/>
-          </a:prstGeom>
-          <a:solidFill>
-            <a:srgbClr val="FFFFFF"/>
-          </a:solidFill>
-          <a:ln w="19050">
-            <a:solidFill>
-              <a:srgbClr val="F59E0B"/>
-            </a:solidFill>
-          </a:ln>
-        </p:spPr>
-        <p:style>
-          <a:lnRef idx="1">
-            <a:schemeClr val="accent1"/>
-          </a:lnRef>
-          <a:fillRef idx="3">
-            <a:schemeClr val="accent1"/>
-          </a:fillRef>
-          <a:effectRef idx="2">
-            <a:schemeClr val="accent1"/>
-          </a:effectRef>
-          <a:fontRef idx="minor">
-            <a:schemeClr val="lt1"/>
-          </a:fontRef>
-        </p:style>
-        <p:txBody>
-          <a:bodyPr rtlCol="0" anchor="ctr" wrap="square" lIns="228600" tIns="182880" rIns="228600" bIns="182880"/>
-          <a:lstStyle/>
-          <a:p>
-            <a:pPr algn="ctr">
-              <a:defRPr sz="1400" b="1">
-                <a:solidFill>
-                  <a:srgbClr val="0F172A"/>
-                </a:solidFill>
-              </a:defRPr>
-            </a:pPr>
-            <a:r>
-              <a:t>2. Urdu Escalation Alert</a:t>
-            </a:r>
-          </a:p>
-          <a:p>
-            <a:pPr>
-              <a:spcAft>
-                <a:spcPts val="400"/>
-              </a:spcAft>
-              <a:defRPr sz="900" b="1">
-                <a:solidFill>
-                  <a:srgbClr val="10B981"/>
-                </a:solidFill>
-              </a:defRPr>
-            </a:pPr>
-            <a:r>
-              <a:t>[BILINGUAL ESCALATION]</a:t>
-            </a:r>
-          </a:p>
-          <a:p>
-            <a:pPr>
-              <a:spcAft>
-                <a:spcPts val="300"/>
-              </a:spcAft>
-              <a:defRPr sz="1100">
-                <a:solidFill>
-                  <a:srgbClr val="64748B"/>
-                </a:solidFill>
-              </a:defRPr>
-            </a:pPr>
-            <a:r>
-              <a:t>• For custom quotes or custom branding, the agent alerts the exporter in Urdu:</a:t>
-            </a:r>
-          </a:p>
-          <a:p>
-            <a:pPr>
-              <a:spcAft>
-                <a:spcPts val="300"/>
-              </a:spcAft>
-              <a:defRPr sz="1100">
-                <a:solidFill>
-                  <a:srgbClr val="64748B"/>
-                </a:solidFill>
-              </a:defRPr>
-            </a:pPr>
-            <a:r>
-              <a:t>• 'USA ke buyer Marcus Vance ne custom quote maanga hai. Aap ka kya rate hai?'</a:t>
-            </a:r>
-          </a:p>
-          <a:p>
-            <a:pPr>
-              <a:spcAft>
-                <a:spcPts val="300"/>
-              </a:spcAft>
-              <a:defRPr sz="1100">
-                <a:solidFill>
-                  <a:srgbClr val="64748B"/>
-                </a:solidFill>
-              </a:defRPr>
-            </a:pPr>
-            <a:r>
-              <a:t>• Exporter replies casually in Urdu: 'iska rate 26 dollar hai aur 12 din lagain gay'.</a:t>
+              <a:t>Screenshot 3: RAG Listing Output (Title, 5 Bullets, 15 Keywords) and 0-100 Rubric Quality Gauge</a:t>
             </a:r>
           </a:p>
         </p:txBody>
@@ -10412,8 +9347,8 @@
         </p:nvSpPr>
         <p:spPr>
           <a:xfrm>
-            <a:off x="8046720" y="1371600"/>
-            <a:ext cx="3291840" cy="4754880"/>
+            <a:off x="7772400" y="1280160"/>
+            <a:ext cx="3657600" cy="4937760"/>
           </a:xfrm>
           <a:prstGeom prst="roundRect">
             <a:avLst/>
@@ -10442,24 +9377,24 @@
           </a:fontRef>
         </p:style>
         <p:txBody>
-          <a:bodyPr rtlCol="0" anchor="ctr" wrap="square" lIns="228600" tIns="182880" rIns="228600" bIns="182880"/>
+          <a:bodyPr rtlCol="0" anchor="ctr" wrap="square" lIns="182880" tIns="164592" rIns="182880" bIns="164592"/>
           <a:lstStyle/>
           <a:p>
             <a:pPr algn="ctr">
-              <a:defRPr sz="1400" b="1">
+              <a:defRPr sz="1300" b="1">
                 <a:solidFill>
                   <a:srgbClr val="0F172A"/>
                 </a:solidFill>
               </a:defRPr>
             </a:pPr>
             <a:r>
-              <a:t>3. Tone &amp; Policy Checked Quote</a:t>
-            </a:r>
-          </a:p>
-          <a:p>
-            <a:pPr>
-              <a:spcAft>
-                <a:spcPts val="400"/>
+              <a:t>High-Converting Export Listing</a:t>
+            </a:r>
+          </a:p>
+          <a:p>
+            <a:pPr>
+              <a:spcAft>
+                <a:spcPts val="300"/>
               </a:spcAft>
               <a:defRPr sz="900" b="1">
                 <a:solidFill>
@@ -10468,52 +9403,82 @@
               </a:defRPr>
             </a:pPr>
             <a:r>
-              <a:t>[ENGLISH B2B SYNTHESIS]</a:t>
-            </a:r>
-          </a:p>
-          <a:p>
-            <a:pPr>
-              <a:spcAft>
-                <a:spcPts val="300"/>
-              </a:spcAft>
-              <a:defRPr sz="1100">
+              <a:t>[EXPORT-READY OUTPUT]</a:t>
+            </a:r>
+          </a:p>
+          <a:p>
+            <a:pPr>
+              <a:spcAft>
+                <a:spcPts val="200"/>
+              </a:spcAft>
+              <a:defRPr sz="1000">
                 <a:solidFill>
                   <a:srgbClr val="64748B"/>
                 </a:solidFill>
               </a:defRPr>
             </a:pPr>
             <a:r>
-              <a:t>• Agent converts exporter's Urdu note into professional B2B export English.</a:t>
-            </a:r>
-          </a:p>
-          <a:p>
-            <a:pPr>
-              <a:spcAft>
-                <a:spcPts val="300"/>
-              </a:spcAft>
-              <a:defRPr sz="1100">
+              <a:t>• • Title Optimization: Character-length compliant title with primary commercial keywords.</a:t>
+            </a:r>
+          </a:p>
+          <a:p>
+            <a:pPr>
+              <a:spcAft>
+                <a:spcPts val="200"/>
+              </a:spcAft>
+              <a:defRPr sz="1000">
                 <a:solidFill>
                   <a:srgbClr val="64748B"/>
                 </a:solidFill>
               </a:defRPr>
             </a:pPr>
             <a:r>
-              <a:t>• Includes polite greeting, quoted price, lead time, ISO compliance statement.</a:t>
-            </a:r>
-          </a:p>
-          <a:p>
-            <a:pPr>
-              <a:spcAft>
-                <a:spcPts val="300"/>
-              </a:spcAft>
-              <a:defRPr sz="1100">
+              <a:t>• • 5 Buyer-Focused Bullets: Structured around durability, OEM customization, factory direct pricing, and transit timelines.</a:t>
+            </a:r>
+          </a:p>
+          <a:p>
+            <a:pPr>
+              <a:spcAft>
+                <a:spcPts val="200"/>
+              </a:spcAft>
+              <a:defRPr sz="1000">
                 <a:solidFill>
                   <a:srgbClr val="64748B"/>
                 </a:solidFill>
               </a:defRPr>
             </a:pPr>
             <a:r>
-              <a:t>• Automated policy filter strips sensitive contact leaks (WhatsApp/phone).</a:t>
+              <a:t>• • 15 Backend SEO Keywords: High-intent B2B search terms for North America and European buyers.</a:t>
+            </a:r>
+          </a:p>
+          <a:p>
+            <a:pPr>
+              <a:spcAft>
+                <a:spcPts val="200"/>
+              </a:spcAft>
+              <a:defRPr sz="1000">
+                <a:solidFill>
+                  <a:srgbClr val="64748B"/>
+                </a:solidFill>
+              </a:defRPr>
+            </a:pPr>
+            <a:r>
+              <a:t>• • Quality Rubric Score: Evaluated across 5 dimensions with a 94/100 composite score.</a:t>
+            </a:r>
+          </a:p>
+          <a:p>
+            <a:pPr>
+              <a:spcAft>
+                <a:spcPts val="200"/>
+              </a:spcAft>
+              <a:defRPr sz="1000">
+                <a:solidFill>
+                  <a:srgbClr val="64748B"/>
+                </a:solidFill>
+              </a:defRPr>
+            </a:pPr>
+            <a:r>
+              <a:t>• • Urdu Approval Summary: Exporter reviews an Urdu summary before approving for publish.</a:t>
             </a:r>
           </a:p>
         </p:txBody>
